--- a/portfolio/生存竞技场-武器皮肤分析与创意策划案.pptx
+++ b/portfolio/生存竞技场-武器皮肤分析与创意策划案.pptx
@@ -25,6 +25,7 @@
     <p:sldId id="273" r:id="rId24"/>
     <p:sldId id="274" r:id="rId25"/>
     <p:sldId id="275" r:id="rId26"/>
+    <p:sldId id="276" r:id="rId27"/>
   </p:sldIdLst>
   <p:sldSz cx="12191695" cy="6858000" type="screen4x3"/>
   <p:notesSz cx="6858000" cy="9144000"/>
@@ -4528,7 +4529,7 @@
                 </a:solidFill>
                 <a:latin typeface="微软雅黑"/>
               </a:rPr>
-              <a:t>03 / 创意策划案</a:t>
+              <a:t>03.5 / 数据验证</a:t>
             </a:r>
           </a:p>
         </p:txBody>
@@ -4570,7 +4571,7 @@
                 </a:solidFill>
                 <a:latin typeface="微软雅黑"/>
               </a:rPr>
-              <a:t>商店界面：让玩家在买之前就看到「动起来的样子」</a:t>
+              <a:t>真实用户数据看板</a:t>
             </a:r>
           </a:p>
         </p:txBody>
@@ -4612,7 +4613,7 @@
                 </a:solidFill>
                 <a:latin typeface="微软雅黑"/>
               </a:rPr>
-              <a:t>每张卡片用独立 canvas 实时渲染真实皮肤，而不是一张静态截图</a:t>
+              <a:t>关键行为全部客户端埋点 → Supabase 落库 → 看板实时聚合；以下取自生产环境实际数据</a:t>
             </a:r>
           </a:p>
         </p:txBody>
@@ -4625,8 +4626,1064 @@
         </p:nvSpPr>
         <p:spPr>
           <a:xfrm>
-            <a:off x="841248" y="1783080"/>
-            <a:ext cx="4114800" cy="4297680"/>
+            <a:off x="841248" y="1691640"/>
+            <a:ext cx="1673352" cy="914400"/>
+          </a:xfrm>
+          <a:prstGeom prst="roundRect">
+            <a:avLst>
+              <a:gd name="adj" fmla="val 6000"/>
+            </a:avLst>
+          </a:prstGeom>
+          <a:solidFill>
+            <a:srgbClr val="161A26"/>
+          </a:solidFill>
+          <a:ln w="9525">
+            <a:solidFill>
+              <a:srgbClr val="2A3144"/>
+            </a:solidFill>
+          </a:ln>
+          <a:effectLst/>
+        </p:spPr>
+        <p:style>
+          <a:lnRef idx="1">
+            <a:schemeClr val="accent1"/>
+          </a:lnRef>
+          <a:fillRef idx="3">
+            <a:schemeClr val="accent1"/>
+          </a:fillRef>
+          <a:effectRef idx="2">
+            <a:schemeClr val="accent1"/>
+          </a:effectRef>
+          <a:fontRef idx="minor">
+            <a:schemeClr val="lt1"/>
+          </a:fontRef>
+        </p:style>
+        <p:txBody>
+          <a:bodyPr rtlCol="0" anchor="ctr"/>
+          <a:lstStyle/>
+          <a:p>
+            <a:pPr algn="ctr"/>
+          </a:p>
+        </p:txBody>
+      </p:sp>
+      <p:sp>
+        <p:nvSpPr>
+          <p:cNvPr id="8" name="Rectangle 7"/>
+          <p:cNvSpPr/>
+          <p:nvPr/>
+        </p:nvSpPr>
+        <p:spPr>
+          <a:xfrm>
+            <a:off x="841248" y="1691640"/>
+            <a:ext cx="1673352" cy="41148"/>
+          </a:xfrm>
+          <a:prstGeom prst="rect">
+            <a:avLst/>
+          </a:prstGeom>
+          <a:solidFill>
+            <a:srgbClr val="E94560"/>
+          </a:solidFill>
+          <a:ln>
+            <a:noFill/>
+          </a:ln>
+          <a:effectLst/>
+        </p:spPr>
+        <p:style>
+          <a:lnRef idx="1">
+            <a:schemeClr val="accent1"/>
+          </a:lnRef>
+          <a:fillRef idx="3">
+            <a:schemeClr val="accent1"/>
+          </a:fillRef>
+          <a:effectRef idx="2">
+            <a:schemeClr val="accent1"/>
+          </a:effectRef>
+          <a:fontRef idx="minor">
+            <a:schemeClr val="lt1"/>
+          </a:fontRef>
+        </p:style>
+        <p:txBody>
+          <a:bodyPr rtlCol="0" anchor="ctr"/>
+          <a:lstStyle/>
+          <a:p>
+            <a:pPr algn="ctr"/>
+          </a:p>
+        </p:txBody>
+      </p:sp>
+      <p:sp>
+        <p:nvSpPr>
+          <p:cNvPr id="9" name="TextBox 8"/>
+          <p:cNvSpPr txBox="1"/>
+          <p:nvPr/>
+        </p:nvSpPr>
+        <p:spPr>
+          <a:xfrm>
+            <a:off x="1042416" y="1837944"/>
+            <a:ext cx="1307592" cy="365760"/>
+          </a:xfrm>
+          <a:prstGeom prst="rect">
+            <a:avLst/>
+          </a:prstGeom>
+          <a:noFill/>
+        </p:spPr>
+        <p:txBody>
+          <a:bodyPr wrap="square" anchor="t" lIns="0" rIns="0" tIns="0" bIns="0">
+            <a:spAutoFit/>
+          </a:bodyPr>
+          <a:lstStyle/>
+          <a:p>
+            <a:pPr algn="l">
+              <a:lnSpc>
+                <a:spcPct val="100000"/>
+              </a:lnSpc>
+              <a:spcAft>
+                <a:spcPts val="0"/>
+              </a:spcAft>
+            </a:pPr>
+            <a:r>
+              <a:rPr sz="2400" b="1">
+                <a:solidFill>
+                  <a:srgbClr val="E8EBF2"/>
+                </a:solidFill>
+                <a:latin typeface="微软雅黑"/>
+              </a:rPr>
+              <a:t>79 人</a:t>
+            </a:r>
+          </a:p>
+        </p:txBody>
+      </p:sp>
+      <p:sp>
+        <p:nvSpPr>
+          <p:cNvPr id="10" name="TextBox 9"/>
+          <p:cNvSpPr txBox="1"/>
+          <p:nvPr/>
+        </p:nvSpPr>
+        <p:spPr>
+          <a:xfrm>
+            <a:off x="1042416" y="2203704"/>
+            <a:ext cx="1307592" cy="201168"/>
+          </a:xfrm>
+          <a:prstGeom prst="rect">
+            <a:avLst/>
+          </a:prstGeom>
+          <a:noFill/>
+        </p:spPr>
+        <p:txBody>
+          <a:bodyPr wrap="square" anchor="t" lIns="0" rIns="0" tIns="0" bIns="0">
+            <a:spAutoFit/>
+          </a:bodyPr>
+          <a:lstStyle/>
+          <a:p>
+            <a:pPr algn="l">
+              <a:lnSpc>
+                <a:spcPct val="100000"/>
+              </a:lnSpc>
+              <a:spcAft>
+                <a:spcPts val="0"/>
+              </a:spcAft>
+            </a:pPr>
+            <a:r>
+              <a:rPr sz="1050" b="0">
+                <a:solidFill>
+                  <a:srgbClr val="98A2B8"/>
+                </a:solidFill>
+                <a:latin typeface="微软雅黑"/>
+              </a:rPr>
+              <a:t>累计独立玩家</a:t>
+            </a:r>
+          </a:p>
+        </p:txBody>
+      </p:sp>
+      <p:sp>
+        <p:nvSpPr>
+          <p:cNvPr id="11" name="Rounded Rectangle 10"/>
+          <p:cNvSpPr/>
+          <p:nvPr/>
+        </p:nvSpPr>
+        <p:spPr>
+          <a:xfrm>
+            <a:off x="2642616" y="1691640"/>
+            <a:ext cx="1673352" cy="914400"/>
+          </a:xfrm>
+          <a:prstGeom prst="roundRect">
+            <a:avLst>
+              <a:gd name="adj" fmla="val 6000"/>
+            </a:avLst>
+          </a:prstGeom>
+          <a:solidFill>
+            <a:srgbClr val="161A26"/>
+          </a:solidFill>
+          <a:ln w="9525">
+            <a:solidFill>
+              <a:srgbClr val="2A3144"/>
+            </a:solidFill>
+          </a:ln>
+          <a:effectLst/>
+        </p:spPr>
+        <p:style>
+          <a:lnRef idx="1">
+            <a:schemeClr val="accent1"/>
+          </a:lnRef>
+          <a:fillRef idx="3">
+            <a:schemeClr val="accent1"/>
+          </a:fillRef>
+          <a:effectRef idx="2">
+            <a:schemeClr val="accent1"/>
+          </a:effectRef>
+          <a:fontRef idx="minor">
+            <a:schemeClr val="lt1"/>
+          </a:fontRef>
+        </p:style>
+        <p:txBody>
+          <a:bodyPr rtlCol="0" anchor="ctr"/>
+          <a:lstStyle/>
+          <a:p>
+            <a:pPr algn="ctr"/>
+          </a:p>
+        </p:txBody>
+      </p:sp>
+      <p:sp>
+        <p:nvSpPr>
+          <p:cNvPr id="12" name="Rectangle 11"/>
+          <p:cNvSpPr/>
+          <p:nvPr/>
+        </p:nvSpPr>
+        <p:spPr>
+          <a:xfrm>
+            <a:off x="2642616" y="1691640"/>
+            <a:ext cx="1673352" cy="41148"/>
+          </a:xfrm>
+          <a:prstGeom prst="rect">
+            <a:avLst/>
+          </a:prstGeom>
+          <a:solidFill>
+            <a:srgbClr val="E94560"/>
+          </a:solidFill>
+          <a:ln>
+            <a:noFill/>
+          </a:ln>
+          <a:effectLst/>
+        </p:spPr>
+        <p:style>
+          <a:lnRef idx="1">
+            <a:schemeClr val="accent1"/>
+          </a:lnRef>
+          <a:fillRef idx="3">
+            <a:schemeClr val="accent1"/>
+          </a:fillRef>
+          <a:effectRef idx="2">
+            <a:schemeClr val="accent1"/>
+          </a:effectRef>
+          <a:fontRef idx="minor">
+            <a:schemeClr val="lt1"/>
+          </a:fontRef>
+        </p:style>
+        <p:txBody>
+          <a:bodyPr rtlCol="0" anchor="ctr"/>
+          <a:lstStyle/>
+          <a:p>
+            <a:pPr algn="ctr"/>
+          </a:p>
+        </p:txBody>
+      </p:sp>
+      <p:sp>
+        <p:nvSpPr>
+          <p:cNvPr id="13" name="TextBox 12"/>
+          <p:cNvSpPr txBox="1"/>
+          <p:nvPr/>
+        </p:nvSpPr>
+        <p:spPr>
+          <a:xfrm>
+            <a:off x="2843784" y="1837944"/>
+            <a:ext cx="1307592" cy="365760"/>
+          </a:xfrm>
+          <a:prstGeom prst="rect">
+            <a:avLst/>
+          </a:prstGeom>
+          <a:noFill/>
+        </p:spPr>
+        <p:txBody>
+          <a:bodyPr wrap="square" anchor="t" lIns="0" rIns="0" tIns="0" bIns="0">
+            <a:spAutoFit/>
+          </a:bodyPr>
+          <a:lstStyle/>
+          <a:p>
+            <a:pPr algn="l">
+              <a:lnSpc>
+                <a:spcPct val="100000"/>
+              </a:lnSpc>
+              <a:spcAft>
+                <a:spcPts val="0"/>
+              </a:spcAft>
+            </a:pPr>
+            <a:r>
+              <a:rPr sz="2400" b="1">
+                <a:solidFill>
+                  <a:srgbClr val="E8EBF2"/>
+                </a:solidFill>
+                <a:latin typeface="微软雅黑"/>
+              </a:rPr>
+              <a:t>133 局</a:t>
+            </a:r>
+          </a:p>
+        </p:txBody>
+      </p:sp>
+      <p:sp>
+        <p:nvSpPr>
+          <p:cNvPr id="14" name="TextBox 13"/>
+          <p:cNvSpPr txBox="1"/>
+          <p:nvPr/>
+        </p:nvSpPr>
+        <p:spPr>
+          <a:xfrm>
+            <a:off x="2843784" y="2203704"/>
+            <a:ext cx="1307592" cy="201168"/>
+          </a:xfrm>
+          <a:prstGeom prst="rect">
+            <a:avLst/>
+          </a:prstGeom>
+          <a:noFill/>
+        </p:spPr>
+        <p:txBody>
+          <a:bodyPr wrap="square" anchor="t" lIns="0" rIns="0" tIns="0" bIns="0">
+            <a:spAutoFit/>
+          </a:bodyPr>
+          <a:lstStyle/>
+          <a:p>
+            <a:pPr algn="l">
+              <a:lnSpc>
+                <a:spcPct val="100000"/>
+              </a:lnSpc>
+              <a:spcAft>
+                <a:spcPts val="0"/>
+              </a:spcAft>
+            </a:pPr>
+            <a:r>
+              <a:rPr sz="1050" b="0">
+                <a:solidFill>
+                  <a:srgbClr val="98A2B8"/>
+                </a:solidFill>
+                <a:latin typeface="微软雅黑"/>
+              </a:rPr>
+              <a:t>累计开局对局</a:t>
+            </a:r>
+          </a:p>
+        </p:txBody>
+      </p:sp>
+      <p:sp>
+        <p:nvSpPr>
+          <p:cNvPr id="15" name="Rounded Rectangle 14"/>
+          <p:cNvSpPr/>
+          <p:nvPr/>
+        </p:nvSpPr>
+        <p:spPr>
+          <a:xfrm>
+            <a:off x="4443984" y="1691640"/>
+            <a:ext cx="1673352" cy="914400"/>
+          </a:xfrm>
+          <a:prstGeom prst="roundRect">
+            <a:avLst>
+              <a:gd name="adj" fmla="val 6000"/>
+            </a:avLst>
+          </a:prstGeom>
+          <a:solidFill>
+            <a:srgbClr val="161A26"/>
+          </a:solidFill>
+          <a:ln w="9525">
+            <a:solidFill>
+              <a:srgbClr val="2A3144"/>
+            </a:solidFill>
+          </a:ln>
+          <a:effectLst/>
+        </p:spPr>
+        <p:style>
+          <a:lnRef idx="1">
+            <a:schemeClr val="accent1"/>
+          </a:lnRef>
+          <a:fillRef idx="3">
+            <a:schemeClr val="accent1"/>
+          </a:fillRef>
+          <a:effectRef idx="2">
+            <a:schemeClr val="accent1"/>
+          </a:effectRef>
+          <a:fontRef idx="minor">
+            <a:schemeClr val="lt1"/>
+          </a:fontRef>
+        </p:style>
+        <p:txBody>
+          <a:bodyPr rtlCol="0" anchor="ctr"/>
+          <a:lstStyle/>
+          <a:p>
+            <a:pPr algn="ctr"/>
+          </a:p>
+        </p:txBody>
+      </p:sp>
+      <p:sp>
+        <p:nvSpPr>
+          <p:cNvPr id="16" name="Rectangle 15"/>
+          <p:cNvSpPr/>
+          <p:nvPr/>
+        </p:nvSpPr>
+        <p:spPr>
+          <a:xfrm>
+            <a:off x="4443984" y="1691640"/>
+            <a:ext cx="1673352" cy="41148"/>
+          </a:xfrm>
+          <a:prstGeom prst="rect">
+            <a:avLst/>
+          </a:prstGeom>
+          <a:solidFill>
+            <a:srgbClr val="E94560"/>
+          </a:solidFill>
+          <a:ln>
+            <a:noFill/>
+          </a:ln>
+          <a:effectLst/>
+        </p:spPr>
+        <p:style>
+          <a:lnRef idx="1">
+            <a:schemeClr val="accent1"/>
+          </a:lnRef>
+          <a:fillRef idx="3">
+            <a:schemeClr val="accent1"/>
+          </a:fillRef>
+          <a:effectRef idx="2">
+            <a:schemeClr val="accent1"/>
+          </a:effectRef>
+          <a:fontRef idx="minor">
+            <a:schemeClr val="lt1"/>
+          </a:fontRef>
+        </p:style>
+        <p:txBody>
+          <a:bodyPr rtlCol="0" anchor="ctr"/>
+          <a:lstStyle/>
+          <a:p>
+            <a:pPr algn="ctr"/>
+          </a:p>
+        </p:txBody>
+      </p:sp>
+      <p:sp>
+        <p:nvSpPr>
+          <p:cNvPr id="17" name="TextBox 16"/>
+          <p:cNvSpPr txBox="1"/>
+          <p:nvPr/>
+        </p:nvSpPr>
+        <p:spPr>
+          <a:xfrm>
+            <a:off x="4645152" y="1837944"/>
+            <a:ext cx="1307592" cy="365760"/>
+          </a:xfrm>
+          <a:prstGeom prst="rect">
+            <a:avLst/>
+          </a:prstGeom>
+          <a:noFill/>
+        </p:spPr>
+        <p:txBody>
+          <a:bodyPr wrap="square" anchor="t" lIns="0" rIns="0" tIns="0" bIns="0">
+            <a:spAutoFit/>
+          </a:bodyPr>
+          <a:lstStyle/>
+          <a:p>
+            <a:pPr algn="l">
+              <a:lnSpc>
+                <a:spcPct val="100000"/>
+              </a:lnSpc>
+              <a:spcAft>
+                <a:spcPts val="0"/>
+              </a:spcAft>
+            </a:pPr>
+            <a:r>
+              <a:rPr sz="2400" b="1">
+                <a:solidFill>
+                  <a:srgbClr val="E8EBF2"/>
+                </a:solidFill>
+                <a:latin typeface="微软雅黑"/>
+              </a:rPr>
+              <a:t>1,996 条</a:t>
+            </a:r>
+          </a:p>
+        </p:txBody>
+      </p:sp>
+      <p:sp>
+        <p:nvSpPr>
+          <p:cNvPr id="18" name="TextBox 17"/>
+          <p:cNvSpPr txBox="1"/>
+          <p:nvPr/>
+        </p:nvSpPr>
+        <p:spPr>
+          <a:xfrm>
+            <a:off x="4645152" y="2203704"/>
+            <a:ext cx="1307592" cy="201168"/>
+          </a:xfrm>
+          <a:prstGeom prst="rect">
+            <a:avLst/>
+          </a:prstGeom>
+          <a:noFill/>
+        </p:spPr>
+        <p:txBody>
+          <a:bodyPr wrap="square" anchor="t" lIns="0" rIns="0" tIns="0" bIns="0">
+            <a:spAutoFit/>
+          </a:bodyPr>
+          <a:lstStyle/>
+          <a:p>
+            <a:pPr algn="l">
+              <a:lnSpc>
+                <a:spcPct val="100000"/>
+              </a:lnSpc>
+              <a:spcAft>
+                <a:spcPts val="0"/>
+              </a:spcAft>
+            </a:pPr>
+            <a:r>
+              <a:rPr sz="1050" b="0">
+                <a:solidFill>
+                  <a:srgbClr val="98A2B8"/>
+                </a:solidFill>
+                <a:latin typeface="微软雅黑"/>
+              </a:rPr>
+              <a:t>累计埋点事件</a:t>
+            </a:r>
+          </a:p>
+        </p:txBody>
+      </p:sp>
+      <p:sp>
+        <p:nvSpPr>
+          <p:cNvPr id="19" name="Rounded Rectangle 18"/>
+          <p:cNvSpPr/>
+          <p:nvPr/>
+        </p:nvSpPr>
+        <p:spPr>
+          <a:xfrm>
+            <a:off x="841248" y="2743200"/>
+            <a:ext cx="1673352" cy="914400"/>
+          </a:xfrm>
+          <a:prstGeom prst="roundRect">
+            <a:avLst>
+              <a:gd name="adj" fmla="val 6000"/>
+            </a:avLst>
+          </a:prstGeom>
+          <a:solidFill>
+            <a:srgbClr val="161A26"/>
+          </a:solidFill>
+          <a:ln w="9525">
+            <a:solidFill>
+              <a:srgbClr val="2A3144"/>
+            </a:solidFill>
+          </a:ln>
+          <a:effectLst/>
+        </p:spPr>
+        <p:style>
+          <a:lnRef idx="1">
+            <a:schemeClr val="accent1"/>
+          </a:lnRef>
+          <a:fillRef idx="3">
+            <a:schemeClr val="accent1"/>
+          </a:fillRef>
+          <a:effectRef idx="2">
+            <a:schemeClr val="accent1"/>
+          </a:effectRef>
+          <a:fontRef idx="minor">
+            <a:schemeClr val="lt1"/>
+          </a:fontRef>
+        </p:style>
+        <p:txBody>
+          <a:bodyPr rtlCol="0" anchor="ctr"/>
+          <a:lstStyle/>
+          <a:p>
+            <a:pPr algn="ctr"/>
+          </a:p>
+        </p:txBody>
+      </p:sp>
+      <p:sp>
+        <p:nvSpPr>
+          <p:cNvPr id="20" name="Rectangle 19"/>
+          <p:cNvSpPr/>
+          <p:nvPr/>
+        </p:nvSpPr>
+        <p:spPr>
+          <a:xfrm>
+            <a:off x="841248" y="2743200"/>
+            <a:ext cx="1673352" cy="41148"/>
+          </a:xfrm>
+          <a:prstGeom prst="rect">
+            <a:avLst/>
+          </a:prstGeom>
+          <a:solidFill>
+            <a:srgbClr val="E94560"/>
+          </a:solidFill>
+          <a:ln>
+            <a:noFill/>
+          </a:ln>
+          <a:effectLst/>
+        </p:spPr>
+        <p:style>
+          <a:lnRef idx="1">
+            <a:schemeClr val="accent1"/>
+          </a:lnRef>
+          <a:fillRef idx="3">
+            <a:schemeClr val="accent1"/>
+          </a:fillRef>
+          <a:effectRef idx="2">
+            <a:schemeClr val="accent1"/>
+          </a:effectRef>
+          <a:fontRef idx="minor">
+            <a:schemeClr val="lt1"/>
+          </a:fontRef>
+        </p:style>
+        <p:txBody>
+          <a:bodyPr rtlCol="0" anchor="ctr"/>
+          <a:lstStyle/>
+          <a:p>
+            <a:pPr algn="ctr"/>
+          </a:p>
+        </p:txBody>
+      </p:sp>
+      <p:sp>
+        <p:nvSpPr>
+          <p:cNvPr id="21" name="TextBox 20"/>
+          <p:cNvSpPr txBox="1"/>
+          <p:nvPr/>
+        </p:nvSpPr>
+        <p:spPr>
+          <a:xfrm>
+            <a:off x="1042416" y="2889504"/>
+            <a:ext cx="1307592" cy="365760"/>
+          </a:xfrm>
+          <a:prstGeom prst="rect">
+            <a:avLst/>
+          </a:prstGeom>
+          <a:noFill/>
+        </p:spPr>
+        <p:txBody>
+          <a:bodyPr wrap="square" anchor="t" lIns="0" rIns="0" tIns="0" bIns="0">
+            <a:spAutoFit/>
+          </a:bodyPr>
+          <a:lstStyle/>
+          <a:p>
+            <a:pPr algn="l">
+              <a:lnSpc>
+                <a:spcPct val="100000"/>
+              </a:lnSpc>
+              <a:spcAft>
+                <a:spcPts val="0"/>
+              </a:spcAft>
+            </a:pPr>
+            <a:r>
+              <a:rPr sz="2400" b="1">
+                <a:solidFill>
+                  <a:srgbClr val="E8EBF2"/>
+                </a:solidFill>
+                <a:latin typeface="微软雅黑"/>
+              </a:rPr>
+              <a:t>56 次</a:t>
+            </a:r>
+          </a:p>
+        </p:txBody>
+      </p:sp>
+      <p:sp>
+        <p:nvSpPr>
+          <p:cNvPr id="22" name="TextBox 21"/>
+          <p:cNvSpPr txBox="1"/>
+          <p:nvPr/>
+        </p:nvSpPr>
+        <p:spPr>
+          <a:xfrm>
+            <a:off x="1042416" y="3255264"/>
+            <a:ext cx="1307592" cy="201168"/>
+          </a:xfrm>
+          <a:prstGeom prst="rect">
+            <a:avLst/>
+          </a:prstGeom>
+          <a:noFill/>
+        </p:spPr>
+        <p:txBody>
+          <a:bodyPr wrap="square" anchor="t" lIns="0" rIns="0" tIns="0" bIns="0">
+            <a:spAutoFit/>
+          </a:bodyPr>
+          <a:lstStyle/>
+          <a:p>
+            <a:pPr algn="l">
+              <a:lnSpc>
+                <a:spcPct val="100000"/>
+              </a:lnSpc>
+              <a:spcAft>
+                <a:spcPts val="0"/>
+              </a:spcAft>
+            </a:pPr>
+            <a:r>
+              <a:rPr sz="1050" b="0">
+                <a:solidFill>
+                  <a:srgbClr val="98A2B8"/>
+                </a:solidFill>
+                <a:latin typeface="微软雅黑"/>
+              </a:rPr>
+              <a:t>复活次数</a:t>
+            </a:r>
+          </a:p>
+        </p:txBody>
+      </p:sp>
+      <p:sp>
+        <p:nvSpPr>
+          <p:cNvPr id="23" name="Rounded Rectangle 22"/>
+          <p:cNvSpPr/>
+          <p:nvPr/>
+        </p:nvSpPr>
+        <p:spPr>
+          <a:xfrm>
+            <a:off x="2642616" y="2743200"/>
+            <a:ext cx="1673352" cy="914400"/>
+          </a:xfrm>
+          <a:prstGeom prst="roundRect">
+            <a:avLst>
+              <a:gd name="adj" fmla="val 6000"/>
+            </a:avLst>
+          </a:prstGeom>
+          <a:solidFill>
+            <a:srgbClr val="161A26"/>
+          </a:solidFill>
+          <a:ln w="9525">
+            <a:solidFill>
+              <a:srgbClr val="2A3144"/>
+            </a:solidFill>
+          </a:ln>
+          <a:effectLst/>
+        </p:spPr>
+        <p:style>
+          <a:lnRef idx="1">
+            <a:schemeClr val="accent1"/>
+          </a:lnRef>
+          <a:fillRef idx="3">
+            <a:schemeClr val="accent1"/>
+          </a:fillRef>
+          <a:effectRef idx="2">
+            <a:schemeClr val="accent1"/>
+          </a:effectRef>
+          <a:fontRef idx="minor">
+            <a:schemeClr val="lt1"/>
+          </a:fontRef>
+        </p:style>
+        <p:txBody>
+          <a:bodyPr rtlCol="0" anchor="ctr"/>
+          <a:lstStyle/>
+          <a:p>
+            <a:pPr algn="ctr"/>
+          </a:p>
+        </p:txBody>
+      </p:sp>
+      <p:sp>
+        <p:nvSpPr>
+          <p:cNvPr id="24" name="Rectangle 23"/>
+          <p:cNvSpPr/>
+          <p:nvPr/>
+        </p:nvSpPr>
+        <p:spPr>
+          <a:xfrm>
+            <a:off x="2642616" y="2743200"/>
+            <a:ext cx="1673352" cy="41148"/>
+          </a:xfrm>
+          <a:prstGeom prst="rect">
+            <a:avLst/>
+          </a:prstGeom>
+          <a:solidFill>
+            <a:srgbClr val="E94560"/>
+          </a:solidFill>
+          <a:ln>
+            <a:noFill/>
+          </a:ln>
+          <a:effectLst/>
+        </p:spPr>
+        <p:style>
+          <a:lnRef idx="1">
+            <a:schemeClr val="accent1"/>
+          </a:lnRef>
+          <a:fillRef idx="3">
+            <a:schemeClr val="accent1"/>
+          </a:fillRef>
+          <a:effectRef idx="2">
+            <a:schemeClr val="accent1"/>
+          </a:effectRef>
+          <a:fontRef idx="minor">
+            <a:schemeClr val="lt1"/>
+          </a:fontRef>
+        </p:style>
+        <p:txBody>
+          <a:bodyPr rtlCol="0" anchor="ctr"/>
+          <a:lstStyle/>
+          <a:p>
+            <a:pPr algn="ctr"/>
+          </a:p>
+        </p:txBody>
+      </p:sp>
+      <p:sp>
+        <p:nvSpPr>
+          <p:cNvPr id="25" name="TextBox 24"/>
+          <p:cNvSpPr txBox="1"/>
+          <p:nvPr/>
+        </p:nvSpPr>
+        <p:spPr>
+          <a:xfrm>
+            <a:off x="2843784" y="2889504"/>
+            <a:ext cx="1307592" cy="365760"/>
+          </a:xfrm>
+          <a:prstGeom prst="rect">
+            <a:avLst/>
+          </a:prstGeom>
+          <a:noFill/>
+        </p:spPr>
+        <p:txBody>
+          <a:bodyPr wrap="square" anchor="t" lIns="0" rIns="0" tIns="0" bIns="0">
+            <a:spAutoFit/>
+          </a:bodyPr>
+          <a:lstStyle/>
+          <a:p>
+            <a:pPr algn="l">
+              <a:lnSpc>
+                <a:spcPct val="100000"/>
+              </a:lnSpc>
+              <a:spcAft>
+                <a:spcPts val="0"/>
+              </a:spcAft>
+            </a:pPr>
+            <a:r>
+              <a:rPr sz="2400" b="1">
+                <a:solidFill>
+                  <a:srgbClr val="E8EBF2"/>
+                </a:solidFill>
+                <a:latin typeface="微软雅黑"/>
+              </a:rPr>
+              <a:t>31 笔</a:t>
+            </a:r>
+          </a:p>
+        </p:txBody>
+      </p:sp>
+      <p:sp>
+        <p:nvSpPr>
+          <p:cNvPr id="26" name="TextBox 25"/>
+          <p:cNvSpPr txBox="1"/>
+          <p:nvPr/>
+        </p:nvSpPr>
+        <p:spPr>
+          <a:xfrm>
+            <a:off x="2843784" y="3255264"/>
+            <a:ext cx="1307592" cy="201168"/>
+          </a:xfrm>
+          <a:prstGeom prst="rect">
+            <a:avLst/>
+          </a:prstGeom>
+          <a:noFill/>
+        </p:spPr>
+        <p:txBody>
+          <a:bodyPr wrap="square" anchor="t" lIns="0" rIns="0" tIns="0" bIns="0">
+            <a:spAutoFit/>
+          </a:bodyPr>
+          <a:lstStyle/>
+          <a:p>
+            <a:pPr algn="l">
+              <a:lnSpc>
+                <a:spcPct val="100000"/>
+              </a:lnSpc>
+              <a:spcAft>
+                <a:spcPts val="0"/>
+              </a:spcAft>
+            </a:pPr>
+            <a:r>
+              <a:rPr sz="1050" b="0">
+                <a:solidFill>
+                  <a:srgbClr val="98A2B8"/>
+                </a:solidFill>
+                <a:latin typeface="微软雅黑"/>
+              </a:rPr>
+              <a:t>商店购买</a:t>
+            </a:r>
+          </a:p>
+        </p:txBody>
+      </p:sp>
+      <p:sp>
+        <p:nvSpPr>
+          <p:cNvPr id="27" name="Rounded Rectangle 26"/>
+          <p:cNvSpPr/>
+          <p:nvPr/>
+        </p:nvSpPr>
+        <p:spPr>
+          <a:xfrm>
+            <a:off x="4443984" y="2743200"/>
+            <a:ext cx="1673352" cy="914400"/>
+          </a:xfrm>
+          <a:prstGeom prst="roundRect">
+            <a:avLst>
+              <a:gd name="adj" fmla="val 6000"/>
+            </a:avLst>
+          </a:prstGeom>
+          <a:solidFill>
+            <a:srgbClr val="161A26"/>
+          </a:solidFill>
+          <a:ln w="9525">
+            <a:solidFill>
+              <a:srgbClr val="2A3144"/>
+            </a:solidFill>
+          </a:ln>
+          <a:effectLst/>
+        </p:spPr>
+        <p:style>
+          <a:lnRef idx="1">
+            <a:schemeClr val="accent1"/>
+          </a:lnRef>
+          <a:fillRef idx="3">
+            <a:schemeClr val="accent1"/>
+          </a:fillRef>
+          <a:effectRef idx="2">
+            <a:schemeClr val="accent1"/>
+          </a:effectRef>
+          <a:fontRef idx="minor">
+            <a:schemeClr val="lt1"/>
+          </a:fontRef>
+        </p:style>
+        <p:txBody>
+          <a:bodyPr rtlCol="0" anchor="ctr"/>
+          <a:lstStyle/>
+          <a:p>
+            <a:pPr algn="ctr"/>
+          </a:p>
+        </p:txBody>
+      </p:sp>
+      <p:sp>
+        <p:nvSpPr>
+          <p:cNvPr id="28" name="Rectangle 27"/>
+          <p:cNvSpPr/>
+          <p:nvPr/>
+        </p:nvSpPr>
+        <p:spPr>
+          <a:xfrm>
+            <a:off x="4443984" y="2743200"/>
+            <a:ext cx="1673352" cy="41148"/>
+          </a:xfrm>
+          <a:prstGeom prst="rect">
+            <a:avLst/>
+          </a:prstGeom>
+          <a:solidFill>
+            <a:srgbClr val="E94560"/>
+          </a:solidFill>
+          <a:ln>
+            <a:noFill/>
+          </a:ln>
+          <a:effectLst/>
+        </p:spPr>
+        <p:style>
+          <a:lnRef idx="1">
+            <a:schemeClr val="accent1"/>
+          </a:lnRef>
+          <a:fillRef idx="3">
+            <a:schemeClr val="accent1"/>
+          </a:fillRef>
+          <a:effectRef idx="2">
+            <a:schemeClr val="accent1"/>
+          </a:effectRef>
+          <a:fontRef idx="minor">
+            <a:schemeClr val="lt1"/>
+          </a:fontRef>
+        </p:style>
+        <p:txBody>
+          <a:bodyPr rtlCol="0" anchor="ctr"/>
+          <a:lstStyle/>
+          <a:p>
+            <a:pPr algn="ctr"/>
+          </a:p>
+        </p:txBody>
+      </p:sp>
+      <p:sp>
+        <p:nvSpPr>
+          <p:cNvPr id="29" name="TextBox 28"/>
+          <p:cNvSpPr txBox="1"/>
+          <p:nvPr/>
+        </p:nvSpPr>
+        <p:spPr>
+          <a:xfrm>
+            <a:off x="4645152" y="2889504"/>
+            <a:ext cx="1307592" cy="365760"/>
+          </a:xfrm>
+          <a:prstGeom prst="rect">
+            <a:avLst/>
+          </a:prstGeom>
+          <a:noFill/>
+        </p:spPr>
+        <p:txBody>
+          <a:bodyPr wrap="square" anchor="t" lIns="0" rIns="0" tIns="0" bIns="0">
+            <a:spAutoFit/>
+          </a:bodyPr>
+          <a:lstStyle/>
+          <a:p>
+            <a:pPr algn="l">
+              <a:lnSpc>
+                <a:spcPct val="100000"/>
+              </a:lnSpc>
+              <a:spcAft>
+                <a:spcPts val="0"/>
+              </a:spcAft>
+            </a:pPr>
+            <a:r>
+              <a:rPr sz="2400" b="1">
+                <a:solidFill>
+                  <a:srgbClr val="E8EBF2"/>
+                </a:solidFill>
+                <a:latin typeface="微软雅黑"/>
+              </a:rPr>
+              <a:t>37%</a:t>
+            </a:r>
+          </a:p>
+        </p:txBody>
+      </p:sp>
+      <p:sp>
+        <p:nvSpPr>
+          <p:cNvPr id="30" name="TextBox 29"/>
+          <p:cNvSpPr txBox="1"/>
+          <p:nvPr/>
+        </p:nvSpPr>
+        <p:spPr>
+          <a:xfrm>
+            <a:off x="4645152" y="3255264"/>
+            <a:ext cx="1307592" cy="201168"/>
+          </a:xfrm>
+          <a:prstGeom prst="rect">
+            <a:avLst/>
+          </a:prstGeom>
+          <a:noFill/>
+        </p:spPr>
+        <p:txBody>
+          <a:bodyPr wrap="square" anchor="t" lIns="0" rIns="0" tIns="0" bIns="0">
+            <a:spAutoFit/>
+          </a:bodyPr>
+          <a:lstStyle/>
+          <a:p>
+            <a:pPr algn="l">
+              <a:lnSpc>
+                <a:spcPct val="100000"/>
+              </a:lnSpc>
+              <a:spcAft>
+                <a:spcPts val="0"/>
+              </a:spcAft>
+            </a:pPr>
+            <a:r>
+              <a:rPr sz="1050" b="0">
+                <a:solidFill>
+                  <a:srgbClr val="98A2B8"/>
+                </a:solidFill>
+                <a:latin typeface="微软雅黑"/>
+              </a:rPr>
+              <a:t>移动端事件占比</a:t>
+            </a:r>
+          </a:p>
+        </p:txBody>
+      </p:sp>
+      <p:sp>
+        <p:nvSpPr>
+          <p:cNvPr id="31" name="Rounded Rectangle 30"/>
+          <p:cNvSpPr/>
+          <p:nvPr/>
+        </p:nvSpPr>
+        <p:spPr>
+          <a:xfrm>
+            <a:off x="6236208" y="1691640"/>
+            <a:ext cx="5120640" cy="1965960"/>
           </a:xfrm>
           <a:prstGeom prst="roundRect">
             <a:avLst>
@@ -4667,7 +5724,7 @@
       </p:sp>
       <p:pic>
         <p:nvPicPr>
-          <p:cNvPr id="8" name="Picture 7" descr="skins-shop.png"/>
+          <p:cNvPr id="32" name="Picture 31" descr="dashboard.png"/>
           <p:cNvPicPr>
             <a:picLocks noChangeAspect="1"/>
           </p:cNvPicPr>
@@ -4681,8 +5738,8 @@
         </p:blipFill>
         <p:spPr>
           <a:xfrm>
-            <a:off x="1249861" y="1874519"/>
-            <a:ext cx="3297574" cy="4114800"/>
+            <a:off x="8338045" y="1783080"/>
+            <a:ext cx="916965" cy="1783080"/>
           </a:xfrm>
           <a:prstGeom prst="rect">
             <a:avLst/>
@@ -4691,14 +5748,62 @@
       </p:pic>
       <p:sp>
         <p:nvSpPr>
-          <p:cNvPr id="9" name="TextBox 8"/>
-          <p:cNvSpPr txBox="1"/>
-          <p:nvPr/>
-        </p:nvSpPr>
-        <p:spPr>
-          <a:xfrm>
-            <a:off x="5394960" y="1828800"/>
-            <a:ext cx="5943600" cy="365760"/>
+          <p:cNvPr id="33" name="Rounded Rectangle 32"/>
+          <p:cNvSpPr/>
+          <p:nvPr/>
+        </p:nvSpPr>
+        <p:spPr>
+          <a:xfrm>
+            <a:off x="841248" y="3840480"/>
+            <a:ext cx="10515600" cy="2377440"/>
+          </a:xfrm>
+          <a:prstGeom prst="roundRect">
+            <a:avLst>
+              <a:gd name="adj" fmla="val 4000"/>
+            </a:avLst>
+          </a:prstGeom>
+          <a:solidFill>
+            <a:srgbClr val="161A26"/>
+          </a:solidFill>
+          <a:ln w="9525">
+            <a:solidFill>
+              <a:srgbClr val="2A3144"/>
+            </a:solidFill>
+          </a:ln>
+          <a:effectLst/>
+        </p:spPr>
+        <p:style>
+          <a:lnRef idx="1">
+            <a:schemeClr val="accent1"/>
+          </a:lnRef>
+          <a:fillRef idx="3">
+            <a:schemeClr val="accent1"/>
+          </a:fillRef>
+          <a:effectRef idx="2">
+            <a:schemeClr val="accent1"/>
+          </a:effectRef>
+          <a:fontRef idx="minor">
+            <a:schemeClr val="lt1"/>
+          </a:fontRef>
+        </p:style>
+        <p:txBody>
+          <a:bodyPr rtlCol="0" anchor="ctr"/>
+          <a:lstStyle/>
+          <a:p>
+            <a:pPr algn="ctr"/>
+          </a:p>
+        </p:txBody>
+      </p:sp>
+      <p:sp>
+        <p:nvSpPr>
+          <p:cNvPr id="34" name="TextBox 33"/>
+          <p:cNvSpPr txBox="1"/>
+          <p:nvPr/>
+        </p:nvSpPr>
+        <p:spPr>
+          <a:xfrm>
+            <a:off x="1143000" y="4023360"/>
+            <a:ext cx="9966960" cy="2103120"/>
           </a:xfrm>
           <a:prstGeom prst="rect">
             <a:avLst/>
@@ -4713,10 +5818,10 @@
           <a:p>
             <a:pPr algn="l">
               <a:lnSpc>
-                <a:spcPct val="100000"/>
-              </a:lnSpc>
-              <a:spcAft>
-                <a:spcPts val="0"/>
+                <a:spcPct val="130000"/>
+              </a:lnSpc>
+              <a:spcAft>
+                <a:spcPts val="200"/>
               </a:spcAft>
             </a:pPr>
             <a:r>
@@ -4726,239 +5831,176 @@
                 </a:solidFill>
                 <a:latin typeface="微软雅黑"/>
               </a:rPr>
-              <a:t>这次改造做了四件事</a:t>
-            </a:r>
-          </a:p>
-        </p:txBody>
-      </p:sp>
-      <p:sp>
-        <p:nvSpPr>
-          <p:cNvPr id="10" name="TextBox 9"/>
-          <p:cNvSpPr txBox="1"/>
-          <p:nvPr/>
-        </p:nvSpPr>
-        <p:spPr>
-          <a:xfrm>
-            <a:off x="5394960" y="2240280"/>
-            <a:ext cx="5943600" cy="3840480"/>
-          </a:xfrm>
-          <a:prstGeom prst="rect">
-            <a:avLst/>
-          </a:prstGeom>
-          <a:noFill/>
-        </p:spPr>
-        <p:txBody>
-          <a:bodyPr wrap="square" anchor="t" lIns="0" rIns="0" tIns="0" bIns="0">
-            <a:spAutoFit/>
-          </a:bodyPr>
-          <a:lstStyle/>
-          <a:p>
-            <a:pPr algn="l">
-              <a:lnSpc>
-                <a:spcPct val="125000"/>
+              <a:t>从数据里读到的三件事</a:t>
+            </a:r>
+          </a:p>
+          <a:p>
+            <a:pPr algn="l">
+              <a:lnSpc>
+                <a:spcPct val="130000"/>
               </a:lnSpc>
               <a:spcAft>
                 <a:spcPts val="200"/>
               </a:spcAft>
             </a:pPr>
             <a:r>
-              <a:rPr sz="1250" b="1">
+              <a:rPr sz="700" b="0">
+                <a:solidFill>
+                  <a:srgbClr val="98A2B8"/>
+                </a:solidFill>
+                <a:latin typeface="微软雅黑"/>
+              </a:rPr>
+              <a:t/>
+            </a:r>
+          </a:p>
+          <a:p>
+            <a:pPr algn="l">
+              <a:lnSpc>
+                <a:spcPct val="130000"/>
+              </a:lnSpc>
+              <a:spcAft>
+                <a:spcPts val="200"/>
+              </a:spcAft>
+            </a:pPr>
+            <a:r>
+              <a:rPr sz="1200" b="1">
                 <a:solidFill>
                   <a:srgbClr val="E8EBF2"/>
                 </a:solidFill>
                 <a:latin typeface="微软雅黑"/>
               </a:rPr>
-              <a:t>① 实时动效预览</a:t>
-            </a:r>
-          </a:p>
-          <a:p>
-            <a:pPr algn="l">
-              <a:lnSpc>
-                <a:spcPct val="125000"/>
+              <a:t>① 双端适配真的有人在用 </a:t>
+            </a:r>
+            <a:r>
+              <a:rPr sz="1150" b="0">
+                <a:solidFill>
+                  <a:srgbClr val="98A2B8"/>
+                </a:solidFill>
+                <a:latin typeface="微软雅黑"/>
+              </a:rPr>
+              <a:t>— 移动端 UA 产生 275 条事件、桌面端 725 条，「手机+电脑都能玩」不是宣传语。</a:t>
+            </a:r>
+          </a:p>
+          <a:p>
+            <a:pPr algn="l">
+              <a:lnSpc>
+                <a:spcPct val="130000"/>
               </a:lnSpc>
               <a:spcAft>
                 <a:spcPts val="200"/>
               </a:spcAft>
             </a:pPr>
             <a:r>
+              <a:rPr sz="1200" b="1">
+                <a:solidFill>
+                  <a:srgbClr val="E8EBF2"/>
+                </a:solidFill>
+                <a:latin typeface="微软雅黑"/>
+              </a:rPr>
+              <a:t>② 复活机制是被真实使用的核心循环 </a:t>
+            </a:r>
+            <a:r>
               <a:rPr sz="1150" b="0">
                 <a:solidFill>
                   <a:srgbClr val="98A2B8"/>
                 </a:solidFill>
                 <a:latin typeface="微软雅黑"/>
               </a:rPr>
-              <a:t>每张卡片挂一个独立 canvas，跑同一套渲染逻辑。静态格子立刻变成「活的」，玩家买前就能预判效果。</a:t>
-            </a:r>
-          </a:p>
-          <a:p>
-            <a:pPr algn="l">
-              <a:lnSpc>
-                <a:spcPct val="125000"/>
+              <a:t>— 56 次复活中，看广告 38% / 花钻石 25% / 用令牌 21% / 好友助力 16%，四条路径都有人走。</a:t>
+            </a:r>
+          </a:p>
+          <a:p>
+            <a:pPr algn="l">
+              <a:lnSpc>
+                <a:spcPct val="130000"/>
               </a:lnSpc>
               <a:spcAft>
                 <a:spcPts val="200"/>
               </a:spcAft>
             </a:pPr>
             <a:r>
-              <a:rPr sz="800" b="0">
+              <a:rPr sz="1200" b="1">
+                <a:solidFill>
+                  <a:srgbClr val="E8EBF2"/>
+                </a:solidFill>
+                <a:latin typeface="微软雅黑"/>
+              </a:rPr>
+              <a:t>③ 武器使用率 81% 集中在手枪 </a:t>
+            </a:r>
+            <a:r>
+              <a:rPr sz="1150" b="0">
                 <a:solidFill>
                   <a:srgbClr val="98A2B8"/>
                 </a:solidFill>
                 <a:latin typeface="微软雅黑"/>
               </a:rPr>
+              <a:t>— 最有价值的负面发现：手枪是免费初始武器，说明多数玩家没走到解锁新武器的波次就阵亡了。</a:t>
+            </a:r>
+          </a:p>
+          <a:p>
+            <a:pPr algn="l">
+              <a:lnSpc>
+                <a:spcPct val="130000"/>
+              </a:lnSpc>
+              <a:spcAft>
+                <a:spcPts val="200"/>
+              </a:spcAft>
+            </a:pPr>
+            <a:r>
+              <a:rPr sz="700" b="0">
+                <a:solidFill>
+                  <a:srgbClr val="98A2B8"/>
+                </a:solidFill>
+                <a:latin typeface="微软雅黑"/>
+              </a:rPr>
               <a:t/>
             </a:r>
           </a:p>
           <a:p>
             <a:pPr algn="l">
               <a:lnSpc>
-                <a:spcPct val="125000"/>
+                <a:spcPct val="130000"/>
               </a:lnSpc>
               <a:spcAft>
                 <a:spcPts val="200"/>
               </a:spcAft>
             </a:pPr>
             <a:r>
-              <a:rPr sz="1250" b="1">
-                <a:solidFill>
-                  <a:srgbClr val="E8EBF2"/>
-                </a:solidFill>
-                <a:latin typeface="微软雅黑"/>
-              </a:rPr>
-              <a:t>② 稀有度视觉化</a:t>
-            </a:r>
-          </a:p>
-          <a:p>
-            <a:pPr algn="l">
-              <a:lnSpc>
-                <a:spcPct val="125000"/>
+              <a:rPr sz="1050" b="1">
+                <a:solidFill>
+                  <a:srgbClr val="FBBF24"/>
+                </a:solidFill>
+                <a:latin typeface="微软雅黑"/>
+              </a:rPr>
+              <a:t>数据诚实性：</a:t>
+            </a:r>
+            <a:r>
+              <a:rPr sz="1050" b="0">
+                <a:solidFill>
+                  <a:srgbClr val="6B7488"/>
+                </a:solidFill>
+                <a:latin typeface="微软雅黑"/>
+              </a:rPr>
+              <a:t>死亡波次分布中「第 1 波 109 次」包含开发与自动化测试数据，不能当作真实难度曲线；场均时长同受测试会话影响。</a:t>
+            </a:r>
+          </a:p>
+          <a:p>
+            <a:pPr algn="l">
+              <a:lnSpc>
+                <a:spcPct val="130000"/>
               </a:lnSpc>
               <a:spcAft>
                 <a:spcPts val="200"/>
               </a:spcAft>
             </a:pPr>
             <a:r>
-              <a:rPr sz="1150" b="0">
-                <a:solidFill>
-                  <a:srgbClr val="98A2B8"/>
-                </a:solidFill>
-                <a:latin typeface="微软雅黑"/>
-              </a:rPr>
-              <a:t>稀有度不只写在名字里：卡片顶部有稀有度色条、角标、以及史诗/传说专属的底纹晕光，形成「稀有物品」的价值暗示。</a:t>
-            </a:r>
-          </a:p>
-          <a:p>
-            <a:pPr algn="l">
-              <a:lnSpc>
-                <a:spcPct val="125000"/>
-              </a:lnSpc>
-              <a:spcAft>
-                <a:spcPts val="200"/>
-              </a:spcAft>
-            </a:pPr>
-            <a:r>
-              <a:rPr sz="800" b="0">
-                <a:solidFill>
-                  <a:srgbClr val="98A2B8"/>
-                </a:solidFill>
-                <a:latin typeface="微软雅黑"/>
-              </a:rPr>
-              <a:t/>
-            </a:r>
-          </a:p>
-          <a:p>
-            <a:pPr algn="l">
-              <a:lnSpc>
-                <a:spcPct val="125000"/>
-              </a:lnSpc>
-              <a:spcAft>
-                <a:spcPts val="200"/>
-              </a:spcAft>
-            </a:pPr>
-            <a:r>
-              <a:rPr sz="1250" b="1">
-                <a:solidFill>
-                  <a:srgbClr val="E8EBF2"/>
-                </a:solidFill>
-                <a:latin typeface="微软雅黑"/>
-              </a:rPr>
-              <a:t>③ 主题文案</a:t>
-            </a:r>
-          </a:p>
-          <a:p>
-            <a:pPr algn="l">
-              <a:lnSpc>
-                <a:spcPct val="125000"/>
-              </a:lnSpc>
-              <a:spcAft>
-                <a:spcPts val="200"/>
-              </a:spcAft>
-            </a:pPr>
-            <a:r>
-              <a:rPr sz="1150" b="0">
-                <a:solidFill>
-                  <a:srgbClr val="98A2B8"/>
-                </a:solidFill>
-                <a:latin typeface="微软雅黑"/>
-              </a:rPr>
-              <a:t>每套皮肤配一句人话描述（如「你只会看到它的眼睛」），把「参数」翻译成「想象」，提升点击意愿。</a:t>
-            </a:r>
-          </a:p>
-          <a:p>
-            <a:pPr algn="l">
-              <a:lnSpc>
-                <a:spcPct val="125000"/>
-              </a:lnSpc>
-              <a:spcAft>
-                <a:spcPts val="200"/>
-              </a:spcAft>
-            </a:pPr>
-            <a:r>
-              <a:rPr sz="800" b="0">
-                <a:solidFill>
-                  <a:srgbClr val="98A2B8"/>
-                </a:solidFill>
-                <a:latin typeface="微软雅黑"/>
-              </a:rPr>
-              <a:t/>
-            </a:r>
-          </a:p>
-          <a:p>
-            <a:pPr algn="l">
-              <a:lnSpc>
-                <a:spcPct val="125000"/>
-              </a:lnSpc>
-              <a:spcAft>
-                <a:spcPts val="200"/>
-              </a:spcAft>
-            </a:pPr>
-            <a:r>
-              <a:rPr sz="1250" b="1">
-                <a:solidFill>
-                  <a:srgbClr val="E8EBF2"/>
-                </a:solidFill>
-                <a:latin typeface="微软雅黑"/>
-              </a:rPr>
-              <a:t>④ 明确的装备状态</a:t>
-            </a:r>
-          </a:p>
-          <a:p>
-            <a:pPr algn="l">
-              <a:lnSpc>
-                <a:spcPct val="125000"/>
-              </a:lnSpc>
-              <a:spcAft>
-                <a:spcPts val="200"/>
-              </a:spcAft>
-            </a:pPr>
-            <a:r>
-              <a:rPr sz="1150" b="0">
-                <a:solidFill>
-                  <a:srgbClr val="98A2B8"/>
-                </a:solidFill>
-                <a:latin typeface="微软雅黑"/>
-              </a:rPr>
-              <a:t>「✓ 使用中 / 点击装备 / 💎 价格」三态清晰，并给出「钻石不足，还差 N 颗」的精确提示，减少无效点击。</a:t>
+              <a:rPr sz="1050" b="0">
+                <a:solidFill>
+                  <a:srgbClr val="6B7488"/>
+                </a:solidFill>
+                <a:latin typeface="微软雅黑"/>
+              </a:rPr>
+              <a:t>玩家数 / 开局数 / 复活数 / 购买数均为按事件去重的真实累计值；比率类指标仅作趋势参考。</a:t>
             </a:r>
           </a:p>
         </p:txBody>
@@ -5106,7 +6148,7 @@
                 </a:solidFill>
                 <a:latin typeface="微软雅黑"/>
               </a:rPr>
-              <a:t>04 / 商业化落地</a:t>
+              <a:t>03 / 创意策划案</a:t>
             </a:r>
           </a:p>
         </p:txBody>
@@ -5148,7 +6190,7 @@
                 </a:solidFill>
                 <a:latin typeface="微软雅黑"/>
               </a:rPr>
-              <a:t>定价重构：从「无梯度」到「四档阶梯」</a:t>
+              <a:t>商店界面：让玩家在买之前就看到「动起来的样子」</a:t>
             </a:r>
           </a:p>
         </p:txBody>
@@ -5190,30 +6232,34 @@
                 </a:solidFill>
                 <a:latin typeface="微软雅黑"/>
               </a:rPr>
-              <a:t>核心逻辑：价格严格对齐动效密度——多花一档的钱，确实多买到一层动态</a:t>
-            </a:r>
-          </a:p>
-        </p:txBody>
-      </p:sp>
-      <p:sp>
-        <p:nvSpPr>
-          <p:cNvPr id="7" name="Rectangle 6"/>
+              <a:t>每张卡片用独立 canvas 实时渲染真实皮肤，而不是一张静态截图</a:t>
+            </a:r>
+          </a:p>
+        </p:txBody>
+      </p:sp>
+      <p:sp>
+        <p:nvSpPr>
+          <p:cNvPr id="7" name="Rounded Rectangle 6"/>
           <p:cNvSpPr/>
           <p:nvPr/>
         </p:nvSpPr>
         <p:spPr>
           <a:xfrm>
-            <a:off x="841248" y="1828800"/>
-            <a:ext cx="10515600" cy="384048"/>
-          </a:xfrm>
-          <a:prstGeom prst="rect">
-            <a:avLst/>
+            <a:off x="841248" y="1783080"/>
+            <a:ext cx="4114800" cy="4297680"/>
+          </a:xfrm>
+          <a:prstGeom prst="roundRect">
+            <a:avLst>
+              <a:gd name="adj" fmla="val 3000"/>
+            </a:avLst>
           </a:prstGeom>
           <a:solidFill>
             <a:srgbClr val="1C2130"/>
           </a:solidFill>
-          <a:ln>
-            <a:noFill/>
+          <a:ln w="9525">
+            <a:solidFill>
+              <a:srgbClr val="2A3144"/>
+            </a:solidFill>
           </a:ln>
           <a:effectLst/>
         </p:spPr>
@@ -5239,24 +6285,48 @@
           </a:p>
         </p:txBody>
       </p:sp>
-      <p:sp>
-        <p:nvSpPr>
-          <p:cNvPr id="8" name="TextBox 7"/>
-          <p:cNvSpPr txBox="1"/>
-          <p:nvPr/>
-        </p:nvSpPr>
-        <p:spPr>
-          <a:xfrm>
-            <a:off x="1005840" y="1828800"/>
-            <a:ext cx="1097280" cy="384048"/>
-          </a:xfrm>
-          <a:prstGeom prst="rect">
-            <a:avLst/>
-          </a:prstGeom>
-          <a:noFill/>
-        </p:spPr>
-        <p:txBody>
-          <a:bodyPr wrap="square" anchor="ctr" lIns="0" rIns="0" tIns="0" bIns="0">
+      <p:pic>
+        <p:nvPicPr>
+          <p:cNvPr id="8" name="Picture 7" descr="skins-shop.png"/>
+          <p:cNvPicPr>
+            <a:picLocks noChangeAspect="1"/>
+          </p:cNvPicPr>
+          <p:nvPr/>
+        </p:nvPicPr>
+        <p:blipFill>
+          <a:blip r:embed="rId2"/>
+          <a:stretch>
+            <a:fillRect/>
+          </a:stretch>
+        </p:blipFill>
+        <p:spPr>
+          <a:xfrm>
+            <a:off x="1249861" y="1874519"/>
+            <a:ext cx="3297574" cy="4114800"/>
+          </a:xfrm>
+          <a:prstGeom prst="rect">
+            <a:avLst/>
+          </a:prstGeom>
+        </p:spPr>
+      </p:pic>
+      <p:sp>
+        <p:nvSpPr>
+          <p:cNvPr id="9" name="TextBox 8"/>
+          <p:cNvSpPr txBox="1"/>
+          <p:nvPr/>
+        </p:nvSpPr>
+        <p:spPr>
+          <a:xfrm>
+            <a:off x="5394960" y="1828800"/>
+            <a:ext cx="5943600" cy="365760"/>
+          </a:xfrm>
+          <a:prstGeom prst="rect">
+            <a:avLst/>
+          </a:prstGeom>
+          <a:noFill/>
+        </p:spPr>
+        <p:txBody>
+          <a:bodyPr wrap="square" anchor="t" lIns="0" rIns="0" tIns="0" bIns="0">
             <a:spAutoFit/>
           </a:bodyPr>
           <a:lstStyle/>
@@ -5270,55 +6340,13 @@
               </a:spcAft>
             </a:pPr>
             <a:r>
-              <a:rPr sz="1050" b="1">
-                <a:solidFill>
-                  <a:srgbClr val="6B7488"/>
-                </a:solidFill>
-                <a:latin typeface="微软雅黑"/>
-              </a:rPr>
-              <a:t>稀有度</a:t>
-            </a:r>
-          </a:p>
-        </p:txBody>
-      </p:sp>
-      <p:sp>
-        <p:nvSpPr>
-          <p:cNvPr id="9" name="TextBox 8"/>
-          <p:cNvSpPr txBox="1"/>
-          <p:nvPr/>
-        </p:nvSpPr>
-        <p:spPr>
-          <a:xfrm>
-            <a:off x="2103120" y="1828800"/>
-            <a:ext cx="3017520" cy="384048"/>
-          </a:xfrm>
-          <a:prstGeom prst="rect">
-            <a:avLst/>
-          </a:prstGeom>
-          <a:noFill/>
-        </p:spPr>
-        <p:txBody>
-          <a:bodyPr wrap="square" anchor="ctr" lIns="0" rIns="0" tIns="0" bIns="0">
-            <a:spAutoFit/>
-          </a:bodyPr>
-          <a:lstStyle/>
-          <a:p>
-            <a:pPr algn="l">
-              <a:lnSpc>
-                <a:spcPct val="100000"/>
-              </a:lnSpc>
-              <a:spcAft>
-                <a:spcPts val="0"/>
-              </a:spcAft>
-            </a:pPr>
-            <a:r>
-              <a:rPr sz="1050" b="1">
-                <a:solidFill>
-                  <a:srgbClr val="6B7488"/>
-                </a:solidFill>
-                <a:latin typeface="微软雅黑"/>
-              </a:rPr>
-              <a:t>皮肤</a:t>
+              <a:rPr sz="1400" b="1">
+                <a:solidFill>
+                  <a:srgbClr val="FF6B8A"/>
+                </a:solidFill>
+                <a:latin typeface="微软雅黑"/>
+              </a:rPr>
+              <a:t>这次改造做了四件事</a:t>
             </a:r>
           </a:p>
         </p:txBody>
@@ -5331,1283 +6359,226 @@
         </p:nvSpPr>
         <p:spPr>
           <a:xfrm>
-            <a:off x="5120640" y="1828800"/>
-            <a:ext cx="1554480" cy="384048"/>
-          </a:xfrm>
-          <a:prstGeom prst="rect">
-            <a:avLst/>
-          </a:prstGeom>
-          <a:noFill/>
-        </p:spPr>
-        <p:txBody>
-          <a:bodyPr wrap="square" anchor="ctr" lIns="0" rIns="0" tIns="0" bIns="0">
-            <a:spAutoFit/>
-          </a:bodyPr>
-          <a:lstStyle/>
-          <a:p>
-            <a:pPr algn="l">
-              <a:lnSpc>
-                <a:spcPct val="100000"/>
-              </a:lnSpc>
-              <a:spcAft>
-                <a:spcPts val="0"/>
-              </a:spcAft>
-            </a:pPr>
-            <a:r>
-              <a:rPr sz="1050" b="1">
-                <a:solidFill>
-                  <a:srgbClr val="6B7488"/>
-                </a:solidFill>
-                <a:latin typeface="微软雅黑"/>
-              </a:rPr>
-              <a:t>价格</a:t>
-            </a:r>
-          </a:p>
-        </p:txBody>
-      </p:sp>
-      <p:sp>
-        <p:nvSpPr>
-          <p:cNvPr id="11" name="TextBox 10"/>
-          <p:cNvSpPr txBox="1"/>
-          <p:nvPr/>
-        </p:nvSpPr>
-        <p:spPr>
-          <a:xfrm>
-            <a:off x="6675120" y="1828800"/>
-            <a:ext cx="2286000" cy="384048"/>
-          </a:xfrm>
-          <a:prstGeom prst="rect">
-            <a:avLst/>
-          </a:prstGeom>
-          <a:noFill/>
-        </p:spPr>
-        <p:txBody>
-          <a:bodyPr wrap="square" anchor="ctr" lIns="0" rIns="0" tIns="0" bIns="0">
-            <a:spAutoFit/>
-          </a:bodyPr>
-          <a:lstStyle/>
-          <a:p>
-            <a:pPr algn="l">
-              <a:lnSpc>
-                <a:spcPct val="100000"/>
-              </a:lnSpc>
-              <a:spcAft>
-                <a:spcPts val="0"/>
-              </a:spcAft>
-            </a:pPr>
-            <a:r>
-              <a:rPr sz="1050" b="1">
-                <a:solidFill>
-                  <a:srgbClr val="6B7488"/>
-                </a:solidFill>
-                <a:latin typeface="微软雅黑"/>
-              </a:rPr>
-              <a:t>动效密度</a:t>
-            </a:r>
-          </a:p>
-        </p:txBody>
-      </p:sp>
-      <p:sp>
-        <p:nvSpPr>
-          <p:cNvPr id="12" name="TextBox 11"/>
-          <p:cNvSpPr txBox="1"/>
-          <p:nvPr/>
-        </p:nvSpPr>
-        <p:spPr>
-          <a:xfrm>
-            <a:off x="8961120" y="1828800"/>
-            <a:ext cx="2560320" cy="384048"/>
-          </a:xfrm>
-          <a:prstGeom prst="rect">
-            <a:avLst/>
-          </a:prstGeom>
-          <a:noFill/>
-        </p:spPr>
-        <p:txBody>
-          <a:bodyPr wrap="square" anchor="ctr" lIns="0" rIns="0" tIns="0" bIns="0">
-            <a:spAutoFit/>
-          </a:bodyPr>
-          <a:lstStyle/>
-          <a:p>
-            <a:pPr algn="l">
-              <a:lnSpc>
-                <a:spcPct val="100000"/>
-              </a:lnSpc>
-              <a:spcAft>
-                <a:spcPts val="0"/>
-              </a:spcAft>
-            </a:pPr>
-            <a:r>
-              <a:rPr sz="1050" b="1">
-                <a:solidFill>
-                  <a:srgbClr val="6B7488"/>
-                </a:solidFill>
-                <a:latin typeface="微软雅黑"/>
-              </a:rPr>
-              <a:t>定价意图</a:t>
-            </a:r>
-          </a:p>
-        </p:txBody>
-      </p:sp>
-      <p:sp>
-        <p:nvSpPr>
-          <p:cNvPr id="13" name="Rectangle 12"/>
-          <p:cNvSpPr/>
-          <p:nvPr/>
-        </p:nvSpPr>
-        <p:spPr>
-          <a:xfrm>
-            <a:off x="841248" y="2212848"/>
-            <a:ext cx="10515600" cy="658368"/>
-          </a:xfrm>
-          <a:prstGeom prst="rect">
-            <a:avLst/>
-          </a:prstGeom>
-          <a:solidFill>
-            <a:srgbClr val="161A26"/>
-          </a:solidFill>
-          <a:ln>
-            <a:noFill/>
-          </a:ln>
-          <a:effectLst/>
-        </p:spPr>
-        <p:style>
-          <a:lnRef idx="1">
-            <a:schemeClr val="accent1"/>
-          </a:lnRef>
-          <a:fillRef idx="3">
-            <a:schemeClr val="accent1"/>
-          </a:fillRef>
-          <a:effectRef idx="2">
-            <a:schemeClr val="accent1"/>
-          </a:effectRef>
-          <a:fontRef idx="minor">
-            <a:schemeClr val="lt1"/>
-          </a:fontRef>
-        </p:style>
-        <p:txBody>
-          <a:bodyPr rtlCol="0" anchor="ctr"/>
-          <a:lstStyle/>
-          <a:p>
-            <a:pPr algn="ctr"/>
-          </a:p>
-        </p:txBody>
-      </p:sp>
-      <p:sp>
-        <p:nvSpPr>
-          <p:cNvPr id="14" name="TextBox 13"/>
-          <p:cNvSpPr txBox="1"/>
-          <p:nvPr/>
-        </p:nvSpPr>
-        <p:spPr>
-          <a:xfrm>
-            <a:off x="1005840" y="2212848"/>
-            <a:ext cx="1097280" cy="658368"/>
-          </a:xfrm>
-          <a:prstGeom prst="rect">
-            <a:avLst/>
-          </a:prstGeom>
-          <a:noFill/>
-        </p:spPr>
-        <p:txBody>
-          <a:bodyPr wrap="square" anchor="ctr" lIns="0" rIns="0" tIns="0" bIns="0">
-            <a:spAutoFit/>
-          </a:bodyPr>
-          <a:lstStyle/>
-          <a:p>
-            <a:pPr algn="l">
-              <a:lnSpc>
-                <a:spcPct val="100000"/>
-              </a:lnSpc>
-              <a:spcAft>
-                <a:spcPts val="0"/>
-              </a:spcAft>
-            </a:pPr>
-            <a:r>
-              <a:rPr sz="1050" b="1">
+            <a:off x="5394960" y="2240280"/>
+            <a:ext cx="5943600" cy="3840480"/>
+          </a:xfrm>
+          <a:prstGeom prst="rect">
+            <a:avLst/>
+          </a:prstGeom>
+          <a:noFill/>
+        </p:spPr>
+        <p:txBody>
+          <a:bodyPr wrap="square" anchor="t" lIns="0" rIns="0" tIns="0" bIns="0">
+            <a:spAutoFit/>
+          </a:bodyPr>
+          <a:lstStyle/>
+          <a:p>
+            <a:pPr algn="l">
+              <a:lnSpc>
+                <a:spcPct val="125000"/>
+              </a:lnSpc>
+              <a:spcAft>
+                <a:spcPts val="200"/>
+              </a:spcAft>
+            </a:pPr>
+            <a:r>
+              <a:rPr sz="1250" b="1">
                 <a:solidFill>
                   <a:srgbClr val="E8EBF2"/>
                 </a:solidFill>
                 <a:latin typeface="微软雅黑"/>
               </a:rPr>
-              <a:t>普通</a:t>
-            </a:r>
-          </a:p>
-        </p:txBody>
-      </p:sp>
-      <p:sp>
-        <p:nvSpPr>
-          <p:cNvPr id="15" name="TextBox 14"/>
-          <p:cNvSpPr txBox="1"/>
-          <p:nvPr/>
-        </p:nvSpPr>
-        <p:spPr>
-          <a:xfrm>
-            <a:off x="2103120" y="2212848"/>
-            <a:ext cx="3017520" cy="658368"/>
-          </a:xfrm>
-          <a:prstGeom prst="rect">
-            <a:avLst/>
-          </a:prstGeom>
-          <a:noFill/>
-        </p:spPr>
-        <p:txBody>
-          <a:bodyPr wrap="square" anchor="ctr" lIns="0" rIns="0" tIns="0" bIns="0">
-            <a:spAutoFit/>
-          </a:bodyPr>
-          <a:lstStyle/>
-          <a:p>
-            <a:pPr algn="l">
-              <a:lnSpc>
-                <a:spcPct val="100000"/>
-              </a:lnSpc>
-              <a:spcAft>
-                <a:spcPts val="0"/>
-              </a:spcAft>
-            </a:pPr>
-            <a:r>
-              <a:rPr sz="1050" b="0">
+              <a:t>① 实时动效预览</a:t>
+            </a:r>
+          </a:p>
+          <a:p>
+            <a:pPr algn="l">
+              <a:lnSpc>
+                <a:spcPct val="125000"/>
+              </a:lnSpc>
+              <a:spcAft>
+                <a:spcPts val="200"/>
+              </a:spcAft>
+            </a:pPr>
+            <a:r>
+              <a:rPr sz="1150" b="0">
                 <a:solidFill>
                   <a:srgbClr val="98A2B8"/>
                 </a:solidFill>
                 <a:latin typeface="微软雅黑"/>
               </a:rPr>
-              <a:t>制式战士</a:t>
-            </a:r>
-          </a:p>
-        </p:txBody>
-      </p:sp>
-      <p:sp>
-        <p:nvSpPr>
-          <p:cNvPr id="16" name="TextBox 15"/>
-          <p:cNvSpPr txBox="1"/>
-          <p:nvPr/>
-        </p:nvSpPr>
-        <p:spPr>
-          <a:xfrm>
-            <a:off x="5120640" y="2212848"/>
-            <a:ext cx="1554480" cy="658368"/>
-          </a:xfrm>
-          <a:prstGeom prst="rect">
-            <a:avLst/>
-          </a:prstGeom>
-          <a:noFill/>
-        </p:spPr>
-        <p:txBody>
-          <a:bodyPr wrap="square" anchor="ctr" lIns="0" rIns="0" tIns="0" bIns="0">
-            <a:spAutoFit/>
-          </a:bodyPr>
-          <a:lstStyle/>
-          <a:p>
-            <a:pPr algn="l">
-              <a:lnSpc>
-                <a:spcPct val="100000"/>
-              </a:lnSpc>
-              <a:spcAft>
-                <a:spcPts val="0"/>
-              </a:spcAft>
-            </a:pPr>
-            <a:r>
-              <a:rPr sz="1050" b="0">
+              <a:t>每张卡片挂一个独立 canvas，跑同一套渲染逻辑。静态格子立刻变成「活的」，玩家买前就能预判效果。</a:t>
+            </a:r>
+          </a:p>
+          <a:p>
+            <a:pPr algn="l">
+              <a:lnSpc>
+                <a:spcPct val="125000"/>
+              </a:lnSpc>
+              <a:spcAft>
+                <a:spcPts val="200"/>
+              </a:spcAft>
+            </a:pPr>
+            <a:r>
+              <a:rPr sz="800" b="0">
                 <a:solidFill>
                   <a:srgbClr val="98A2B8"/>
                 </a:solidFill>
                 <a:latin typeface="微软雅黑"/>
               </a:rPr>
-              <a:t>免费</a:t>
-            </a:r>
-          </a:p>
-        </p:txBody>
-      </p:sp>
-      <p:sp>
-        <p:nvSpPr>
-          <p:cNvPr id="17" name="TextBox 16"/>
-          <p:cNvSpPr txBox="1"/>
-          <p:nvPr/>
-        </p:nvSpPr>
-        <p:spPr>
-          <a:xfrm>
-            <a:off x="6675120" y="2212848"/>
-            <a:ext cx="2286000" cy="658368"/>
-          </a:xfrm>
-          <a:prstGeom prst="rect">
-            <a:avLst/>
-          </a:prstGeom>
-          <a:noFill/>
-        </p:spPr>
-        <p:txBody>
-          <a:bodyPr wrap="square" anchor="ctr" lIns="0" rIns="0" tIns="0" bIns="0">
-            <a:spAutoFit/>
-          </a:bodyPr>
-          <a:lstStyle/>
-          <a:p>
-            <a:pPr algn="l">
-              <a:lnSpc>
-                <a:spcPct val="100000"/>
-              </a:lnSpc>
-              <a:spcAft>
-                <a:spcPts val="0"/>
-              </a:spcAft>
-            </a:pPr>
-            <a:r>
-              <a:rPr sz="1050" b="0">
+              <a:t/>
+            </a:r>
+          </a:p>
+          <a:p>
+            <a:pPr algn="l">
+              <a:lnSpc>
+                <a:spcPct val="125000"/>
+              </a:lnSpc>
+              <a:spcAft>
+                <a:spcPts val="200"/>
+              </a:spcAft>
+            </a:pPr>
+            <a:r>
+              <a:rPr sz="1250" b="1">
+                <a:solidFill>
+                  <a:srgbClr val="E8EBF2"/>
+                </a:solidFill>
+                <a:latin typeface="微软雅黑"/>
+              </a:rPr>
+              <a:t>② 稀有度视觉化</a:t>
+            </a:r>
+          </a:p>
+          <a:p>
+            <a:pPr algn="l">
+              <a:lnSpc>
+                <a:spcPct val="125000"/>
+              </a:lnSpc>
+              <a:spcAft>
+                <a:spcPts val="200"/>
+              </a:spcAft>
+            </a:pPr>
+            <a:r>
+              <a:rPr sz="1150" b="0">
                 <a:solidFill>
                   <a:srgbClr val="98A2B8"/>
                 </a:solidFill>
                 <a:latin typeface="微软雅黑"/>
               </a:rPr>
-              <a:t>静态</a:t>
-            </a:r>
-          </a:p>
-        </p:txBody>
-      </p:sp>
-      <p:sp>
-        <p:nvSpPr>
-          <p:cNvPr id="18" name="TextBox 17"/>
-          <p:cNvSpPr txBox="1"/>
-          <p:nvPr/>
-        </p:nvSpPr>
-        <p:spPr>
-          <a:xfrm>
-            <a:off x="8961120" y="2212848"/>
-            <a:ext cx="2560320" cy="658368"/>
-          </a:xfrm>
-          <a:prstGeom prst="rect">
-            <a:avLst/>
-          </a:prstGeom>
-          <a:noFill/>
-        </p:spPr>
-        <p:txBody>
-          <a:bodyPr wrap="square" anchor="ctr" lIns="0" rIns="0" tIns="0" bIns="0">
-            <a:spAutoFit/>
-          </a:bodyPr>
-          <a:lstStyle/>
-          <a:p>
-            <a:pPr algn="l">
-              <a:lnSpc>
-                <a:spcPct val="100000"/>
-              </a:lnSpc>
-              <a:spcAft>
-                <a:spcPts val="0"/>
-              </a:spcAft>
-            </a:pPr>
-            <a:r>
-              <a:rPr sz="1050" b="0">
+              <a:t>稀有度不只写在名字里：卡片顶部有稀有度色条、角标、以及史诗/传说专属的底纹晕光，形成「稀有物品」的价值暗示。</a:t>
+            </a:r>
+          </a:p>
+          <a:p>
+            <a:pPr algn="l">
+              <a:lnSpc>
+                <a:spcPct val="125000"/>
+              </a:lnSpc>
+              <a:spcAft>
+                <a:spcPts val="200"/>
+              </a:spcAft>
+            </a:pPr>
+            <a:r>
+              <a:rPr sz="800" b="0">
                 <a:solidFill>
                   <a:srgbClr val="98A2B8"/>
                 </a:solidFill>
                 <a:latin typeface="微软雅黑"/>
               </a:rPr>
-              <a:t>基准锚点，让所有付费皮肤显得「有理由贵」</a:t>
-            </a:r>
-          </a:p>
-        </p:txBody>
-      </p:sp>
-      <p:sp>
-        <p:nvSpPr>
-          <p:cNvPr id="19" name="Rectangle 18"/>
-          <p:cNvSpPr/>
-          <p:nvPr/>
-        </p:nvSpPr>
-        <p:spPr>
-          <a:xfrm>
-            <a:off x="841248" y="2871216"/>
-            <a:ext cx="10515600" cy="658368"/>
-          </a:xfrm>
-          <a:prstGeom prst="rect">
-            <a:avLst/>
-          </a:prstGeom>
-          <a:solidFill>
-            <a:srgbClr val="0A0A0F"/>
-          </a:solidFill>
-          <a:ln>
-            <a:noFill/>
-          </a:ln>
-          <a:effectLst/>
-        </p:spPr>
-        <p:style>
-          <a:lnRef idx="1">
-            <a:schemeClr val="accent1"/>
-          </a:lnRef>
-          <a:fillRef idx="3">
-            <a:schemeClr val="accent1"/>
-          </a:fillRef>
-          <a:effectRef idx="2">
-            <a:schemeClr val="accent1"/>
-          </a:effectRef>
-          <a:fontRef idx="minor">
-            <a:schemeClr val="lt1"/>
-          </a:fontRef>
-        </p:style>
-        <p:txBody>
-          <a:bodyPr rtlCol="0" anchor="ctr"/>
-          <a:lstStyle/>
-          <a:p>
-            <a:pPr algn="ctr"/>
-          </a:p>
-        </p:txBody>
-      </p:sp>
-      <p:sp>
-        <p:nvSpPr>
-          <p:cNvPr id="20" name="TextBox 19"/>
-          <p:cNvSpPr txBox="1"/>
-          <p:nvPr/>
-        </p:nvSpPr>
-        <p:spPr>
-          <a:xfrm>
-            <a:off x="1005840" y="2871216"/>
-            <a:ext cx="1097280" cy="658368"/>
-          </a:xfrm>
-          <a:prstGeom prst="rect">
-            <a:avLst/>
-          </a:prstGeom>
-          <a:noFill/>
-        </p:spPr>
-        <p:txBody>
-          <a:bodyPr wrap="square" anchor="ctr" lIns="0" rIns="0" tIns="0" bIns="0">
-            <a:spAutoFit/>
-          </a:bodyPr>
-          <a:lstStyle/>
-          <a:p>
-            <a:pPr algn="l">
-              <a:lnSpc>
-                <a:spcPct val="100000"/>
-              </a:lnSpc>
-              <a:spcAft>
-                <a:spcPts val="0"/>
-              </a:spcAft>
-            </a:pPr>
-            <a:r>
-              <a:rPr sz="1050" b="1">
+              <a:t/>
+            </a:r>
+          </a:p>
+          <a:p>
+            <a:pPr algn="l">
+              <a:lnSpc>
+                <a:spcPct val="125000"/>
+              </a:lnSpc>
+              <a:spcAft>
+                <a:spcPts val="200"/>
+              </a:spcAft>
+            </a:pPr>
+            <a:r>
+              <a:rPr sz="1250" b="1">
                 <a:solidFill>
                   <a:srgbClr val="E8EBF2"/>
                 </a:solidFill>
                 <a:latin typeface="微软雅黑"/>
               </a:rPr>
-              <a:t>稀有</a:t>
-            </a:r>
-          </a:p>
-        </p:txBody>
-      </p:sp>
-      <p:sp>
-        <p:nvSpPr>
-          <p:cNvPr id="21" name="TextBox 20"/>
-          <p:cNvSpPr txBox="1"/>
-          <p:nvPr/>
-        </p:nvSpPr>
-        <p:spPr>
-          <a:xfrm>
-            <a:off x="2103120" y="2871216"/>
-            <a:ext cx="3017520" cy="658368"/>
-          </a:xfrm>
-          <a:prstGeom prst="rect">
-            <a:avLst/>
-          </a:prstGeom>
-          <a:noFill/>
-        </p:spPr>
-        <p:txBody>
-          <a:bodyPr wrap="square" anchor="ctr" lIns="0" rIns="0" tIns="0" bIns="0">
-            <a:spAutoFit/>
-          </a:bodyPr>
-          <a:lstStyle/>
-          <a:p>
-            <a:pPr algn="l">
-              <a:lnSpc>
-                <a:spcPct val="100000"/>
-              </a:lnSpc>
-              <a:spcAft>
-                <a:spcPts val="0"/>
-              </a:spcAft>
-            </a:pPr>
-            <a:r>
-              <a:rPr sz="1050" b="0">
+              <a:t>③ 主题文案</a:t>
+            </a:r>
+          </a:p>
+          <a:p>
+            <a:pPr algn="l">
+              <a:lnSpc>
+                <a:spcPct val="125000"/>
+              </a:lnSpc>
+              <a:spcAft>
+                <a:spcPts val="200"/>
+              </a:spcAft>
+            </a:pPr>
+            <a:r>
+              <a:rPr sz="1150" b="0">
                 <a:solidFill>
                   <a:srgbClr val="98A2B8"/>
                 </a:solidFill>
                 <a:latin typeface="微软雅黑"/>
               </a:rPr>
-              <a:t>烈焰使者 / 暗影刺客</a:t>
-            </a:r>
-          </a:p>
-        </p:txBody>
-      </p:sp>
-      <p:sp>
-        <p:nvSpPr>
-          <p:cNvPr id="22" name="TextBox 21"/>
-          <p:cNvSpPr txBox="1"/>
-          <p:nvPr/>
-        </p:nvSpPr>
-        <p:spPr>
-          <a:xfrm>
-            <a:off x="5120640" y="2871216"/>
-            <a:ext cx="1554480" cy="658368"/>
-          </a:xfrm>
-          <a:prstGeom prst="rect">
-            <a:avLst/>
-          </a:prstGeom>
-          <a:noFill/>
-        </p:spPr>
-        <p:txBody>
-          <a:bodyPr wrap="square" anchor="ctr" lIns="0" rIns="0" tIns="0" bIns="0">
-            <a:spAutoFit/>
-          </a:bodyPr>
-          <a:lstStyle/>
-          <a:p>
-            <a:pPr algn="l">
-              <a:lnSpc>
-                <a:spcPct val="100000"/>
-              </a:lnSpc>
-              <a:spcAft>
-                <a:spcPts val="0"/>
-              </a:spcAft>
-            </a:pPr>
-            <a:r>
-              <a:rPr sz="1050" b="0">
+              <a:t>每套皮肤配一句人话描述（如「你只会看到它的眼睛」），把「参数」翻译成「想象」，提升点击意愿。</a:t>
+            </a:r>
+          </a:p>
+          <a:p>
+            <a:pPr algn="l">
+              <a:lnSpc>
+                <a:spcPct val="125000"/>
+              </a:lnSpc>
+              <a:spcAft>
+                <a:spcPts val="200"/>
+              </a:spcAft>
+            </a:pPr>
+            <a:r>
+              <a:rPr sz="800" b="0">
                 <a:solidFill>
                   <a:srgbClr val="98A2B8"/>
                 </a:solidFill>
                 <a:latin typeface="微软雅黑"/>
               </a:rPr>
-              <a:t>60 💎</a:t>
-            </a:r>
-          </a:p>
-        </p:txBody>
-      </p:sp>
-      <p:sp>
-        <p:nvSpPr>
-          <p:cNvPr id="23" name="TextBox 22"/>
-          <p:cNvSpPr txBox="1"/>
-          <p:nvPr/>
-        </p:nvSpPr>
-        <p:spPr>
-          <a:xfrm>
-            <a:off x="6675120" y="2871216"/>
-            <a:ext cx="2286000" cy="658368"/>
-          </a:xfrm>
-          <a:prstGeom prst="rect">
-            <a:avLst/>
-          </a:prstGeom>
-          <a:noFill/>
-        </p:spPr>
-        <p:txBody>
-          <a:bodyPr wrap="square" anchor="ctr" lIns="0" rIns="0" tIns="0" bIns="0">
-            <a:spAutoFit/>
-          </a:bodyPr>
-          <a:lstStyle/>
-          <a:p>
-            <a:pPr algn="l">
-              <a:lnSpc>
-                <a:spcPct val="100000"/>
-              </a:lnSpc>
-              <a:spcAft>
-                <a:spcPts val="0"/>
-              </a:spcAft>
-            </a:pPr>
-            <a:r>
-              <a:rPr sz="1050" b="0">
+              <a:t/>
+            </a:r>
+          </a:p>
+          <a:p>
+            <a:pPr algn="l">
+              <a:lnSpc>
+                <a:spcPct val="125000"/>
+              </a:lnSpc>
+              <a:spcAft>
+                <a:spcPts val="200"/>
+              </a:spcAft>
+            </a:pPr>
+            <a:r>
+              <a:rPr sz="1250" b="1">
+                <a:solidFill>
+                  <a:srgbClr val="E8EBF2"/>
+                </a:solidFill>
+                <a:latin typeface="微软雅黑"/>
+              </a:rPr>
+              <a:t>④ 明确的装备状态</a:t>
+            </a:r>
+          </a:p>
+          <a:p>
+            <a:pPr algn="l">
+              <a:lnSpc>
+                <a:spcPct val="125000"/>
+              </a:lnSpc>
+              <a:spcAft>
+                <a:spcPts val="200"/>
+              </a:spcAft>
+            </a:pPr>
+            <a:r>
+              <a:rPr sz="1150" b="0">
                 <a:solidFill>
                   <a:srgbClr val="98A2B8"/>
                 </a:solidFill>
                 <a:latin typeface="微软雅黑"/>
               </a:rPr>
-              <a:t>1 项动效</a:t>
-            </a:r>
-          </a:p>
-        </p:txBody>
-      </p:sp>
-      <p:sp>
-        <p:nvSpPr>
-          <p:cNvPr id="24" name="TextBox 23"/>
-          <p:cNvSpPr txBox="1"/>
-          <p:nvPr/>
-        </p:nvSpPr>
-        <p:spPr>
-          <a:xfrm>
-            <a:off x="8961120" y="2871216"/>
-            <a:ext cx="2560320" cy="658368"/>
-          </a:xfrm>
-          <a:prstGeom prst="rect">
-            <a:avLst/>
-          </a:prstGeom>
-          <a:noFill/>
-        </p:spPr>
-        <p:txBody>
-          <a:bodyPr wrap="square" anchor="ctr" lIns="0" rIns="0" tIns="0" bIns="0">
-            <a:spAutoFit/>
-          </a:bodyPr>
-          <a:lstStyle/>
-          <a:p>
-            <a:pPr algn="l">
-              <a:lnSpc>
-                <a:spcPct val="100000"/>
-              </a:lnSpc>
-              <a:spcAft>
-                <a:spcPts val="0"/>
-              </a:spcAft>
-            </a:pPr>
-            <a:r>
-              <a:rPr sz="1050" b="0">
-                <a:solidFill>
-                  <a:srgbClr val="98A2B8"/>
-                </a:solidFill>
-                <a:latin typeface="微软雅黑"/>
-              </a:rPr>
-              <a:t>首充档：小额即可获得的第一个「升级感」</a:t>
-            </a:r>
-          </a:p>
-        </p:txBody>
-      </p:sp>
-      <p:sp>
-        <p:nvSpPr>
-          <p:cNvPr id="25" name="Rectangle 24"/>
-          <p:cNvSpPr/>
-          <p:nvPr/>
-        </p:nvSpPr>
-        <p:spPr>
-          <a:xfrm>
-            <a:off x="841248" y="3529584"/>
-            <a:ext cx="10515600" cy="658368"/>
-          </a:xfrm>
-          <a:prstGeom prst="rect">
-            <a:avLst/>
-          </a:prstGeom>
-          <a:solidFill>
-            <a:srgbClr val="161A26"/>
-          </a:solidFill>
-          <a:ln>
-            <a:noFill/>
-          </a:ln>
-          <a:effectLst/>
-        </p:spPr>
-        <p:style>
-          <a:lnRef idx="1">
-            <a:schemeClr val="accent1"/>
-          </a:lnRef>
-          <a:fillRef idx="3">
-            <a:schemeClr val="accent1"/>
-          </a:fillRef>
-          <a:effectRef idx="2">
-            <a:schemeClr val="accent1"/>
-          </a:effectRef>
-          <a:fontRef idx="minor">
-            <a:schemeClr val="lt1"/>
-          </a:fontRef>
-        </p:style>
-        <p:txBody>
-          <a:bodyPr rtlCol="0" anchor="ctr"/>
-          <a:lstStyle/>
-          <a:p>
-            <a:pPr algn="ctr"/>
-          </a:p>
-        </p:txBody>
-      </p:sp>
-      <p:sp>
-        <p:nvSpPr>
-          <p:cNvPr id="26" name="TextBox 25"/>
-          <p:cNvSpPr txBox="1"/>
-          <p:nvPr/>
-        </p:nvSpPr>
-        <p:spPr>
-          <a:xfrm>
-            <a:off x="1005840" y="3529584"/>
-            <a:ext cx="1097280" cy="658368"/>
-          </a:xfrm>
-          <a:prstGeom prst="rect">
-            <a:avLst/>
-          </a:prstGeom>
-          <a:noFill/>
-        </p:spPr>
-        <p:txBody>
-          <a:bodyPr wrap="square" anchor="ctr" lIns="0" rIns="0" tIns="0" bIns="0">
-            <a:spAutoFit/>
-          </a:bodyPr>
-          <a:lstStyle/>
-          <a:p>
-            <a:pPr algn="l">
-              <a:lnSpc>
-                <a:spcPct val="100000"/>
-              </a:lnSpc>
-              <a:spcAft>
-                <a:spcPts val="0"/>
-              </a:spcAft>
-            </a:pPr>
-            <a:r>
-              <a:rPr sz="1050" b="1">
-                <a:solidFill>
-                  <a:srgbClr val="E8EBF2"/>
-                </a:solidFill>
-                <a:latin typeface="微软雅黑"/>
-              </a:rPr>
-              <a:t>史诗</a:t>
-            </a:r>
-          </a:p>
-        </p:txBody>
-      </p:sp>
-      <p:sp>
-        <p:nvSpPr>
-          <p:cNvPr id="27" name="TextBox 26"/>
-          <p:cNvSpPr txBox="1"/>
-          <p:nvPr/>
-        </p:nvSpPr>
-        <p:spPr>
-          <a:xfrm>
-            <a:off x="2103120" y="3529584"/>
-            <a:ext cx="3017520" cy="658368"/>
-          </a:xfrm>
-          <a:prstGeom prst="rect">
-            <a:avLst/>
-          </a:prstGeom>
-          <a:noFill/>
-        </p:spPr>
-        <p:txBody>
-          <a:bodyPr wrap="square" anchor="ctr" lIns="0" rIns="0" tIns="0" bIns="0">
-            <a:spAutoFit/>
-          </a:bodyPr>
-          <a:lstStyle/>
-          <a:p>
-            <a:pPr algn="l">
-              <a:lnSpc>
-                <a:spcPct val="100000"/>
-              </a:lnSpc>
-              <a:spcAft>
-                <a:spcPts val="0"/>
-              </a:spcAft>
-            </a:pPr>
-            <a:r>
-              <a:rPr sz="1050" b="0">
-                <a:solidFill>
-                  <a:srgbClr val="98A2B8"/>
-                </a:solidFill>
-                <a:latin typeface="微软雅黑"/>
-              </a:rPr>
-              <a:t>霓虹战士 / 黄金骑士</a:t>
-            </a:r>
-          </a:p>
-        </p:txBody>
-      </p:sp>
-      <p:sp>
-        <p:nvSpPr>
-          <p:cNvPr id="28" name="TextBox 27"/>
-          <p:cNvSpPr txBox="1"/>
-          <p:nvPr/>
-        </p:nvSpPr>
-        <p:spPr>
-          <a:xfrm>
-            <a:off x="5120640" y="3529584"/>
-            <a:ext cx="1554480" cy="658368"/>
-          </a:xfrm>
-          <a:prstGeom prst="rect">
-            <a:avLst/>
-          </a:prstGeom>
-          <a:noFill/>
-        </p:spPr>
-        <p:txBody>
-          <a:bodyPr wrap="square" anchor="ctr" lIns="0" rIns="0" tIns="0" bIns="0">
-            <a:spAutoFit/>
-          </a:bodyPr>
-          <a:lstStyle/>
-          <a:p>
-            <a:pPr algn="l">
-              <a:lnSpc>
-                <a:spcPct val="100000"/>
-              </a:lnSpc>
-              <a:spcAft>
-                <a:spcPts val="0"/>
-              </a:spcAft>
-            </a:pPr>
-            <a:r>
-              <a:rPr sz="1050" b="0">
-                <a:solidFill>
-                  <a:srgbClr val="98A2B8"/>
-                </a:solidFill>
-                <a:latin typeface="微软雅黑"/>
-              </a:rPr>
-              <a:t>90–120 💎</a:t>
-            </a:r>
-          </a:p>
-        </p:txBody>
-      </p:sp>
-      <p:sp>
-        <p:nvSpPr>
-          <p:cNvPr id="29" name="TextBox 28"/>
-          <p:cNvSpPr txBox="1"/>
-          <p:nvPr/>
-        </p:nvSpPr>
-        <p:spPr>
-          <a:xfrm>
-            <a:off x="6675120" y="3529584"/>
-            <a:ext cx="2286000" cy="658368"/>
-          </a:xfrm>
-          <a:prstGeom prst="rect">
-            <a:avLst/>
-          </a:prstGeom>
-          <a:noFill/>
-        </p:spPr>
-        <p:txBody>
-          <a:bodyPr wrap="square" anchor="ctr" lIns="0" rIns="0" tIns="0" bIns="0">
-            <a:spAutoFit/>
-          </a:bodyPr>
-          <a:lstStyle/>
-          <a:p>
-            <a:pPr algn="l">
-              <a:lnSpc>
-                <a:spcPct val="100000"/>
-              </a:lnSpc>
-              <a:spcAft>
-                <a:spcPts val="0"/>
-              </a:spcAft>
-            </a:pPr>
-            <a:r>
-              <a:rPr sz="1050" b="0">
-                <a:solidFill>
-                  <a:srgbClr val="98A2B8"/>
-                </a:solidFill>
-                <a:latin typeface="微软雅黑"/>
-              </a:rPr>
-              <a:t>2–3 项动效</a:t>
-            </a:r>
-          </a:p>
-        </p:txBody>
-      </p:sp>
-      <p:sp>
-        <p:nvSpPr>
-          <p:cNvPr id="30" name="TextBox 29"/>
-          <p:cNvSpPr txBox="1"/>
-          <p:nvPr/>
-        </p:nvSpPr>
-        <p:spPr>
-          <a:xfrm>
-            <a:off x="8961120" y="3529584"/>
-            <a:ext cx="2560320" cy="658368"/>
-          </a:xfrm>
-          <a:prstGeom prst="rect">
-            <a:avLst/>
-          </a:prstGeom>
-          <a:noFill/>
-        </p:spPr>
-        <p:txBody>
-          <a:bodyPr wrap="square" anchor="ctr" lIns="0" rIns="0" tIns="0" bIns="0">
-            <a:spAutoFit/>
-          </a:bodyPr>
-          <a:lstStyle/>
-          <a:p>
-            <a:pPr algn="l">
-              <a:lnSpc>
-                <a:spcPct val="100000"/>
-              </a:lnSpc>
-              <a:spcAft>
-                <a:spcPts val="0"/>
-              </a:spcAft>
-            </a:pPr>
-            <a:r>
-              <a:rPr sz="1050" b="0">
-                <a:solidFill>
-                  <a:srgbClr val="98A2B8"/>
-                </a:solidFill>
-                <a:latin typeface="微软雅黑"/>
-              </a:rPr>
-              <a:t>主力档：品质明显跃升，承接大部分付费</a:t>
-            </a:r>
-          </a:p>
-        </p:txBody>
-      </p:sp>
-      <p:sp>
-        <p:nvSpPr>
-          <p:cNvPr id="31" name="Rectangle 30"/>
-          <p:cNvSpPr/>
-          <p:nvPr/>
-        </p:nvSpPr>
-        <p:spPr>
-          <a:xfrm>
-            <a:off x="841248" y="4187952"/>
-            <a:ext cx="10515600" cy="658368"/>
-          </a:xfrm>
-          <a:prstGeom prst="rect">
-            <a:avLst/>
-          </a:prstGeom>
-          <a:solidFill>
-            <a:srgbClr val="0A0A0F"/>
-          </a:solidFill>
-          <a:ln>
-            <a:noFill/>
-          </a:ln>
-          <a:effectLst/>
-        </p:spPr>
-        <p:style>
-          <a:lnRef idx="1">
-            <a:schemeClr val="accent1"/>
-          </a:lnRef>
-          <a:fillRef idx="3">
-            <a:schemeClr val="accent1"/>
-          </a:fillRef>
-          <a:effectRef idx="2">
-            <a:schemeClr val="accent1"/>
-          </a:effectRef>
-          <a:fontRef idx="minor">
-            <a:schemeClr val="lt1"/>
-          </a:fontRef>
-        </p:style>
-        <p:txBody>
-          <a:bodyPr rtlCol="0" anchor="ctr"/>
-          <a:lstStyle/>
-          <a:p>
-            <a:pPr algn="ctr"/>
-          </a:p>
-        </p:txBody>
-      </p:sp>
-      <p:sp>
-        <p:nvSpPr>
-          <p:cNvPr id="32" name="TextBox 31"/>
-          <p:cNvSpPr txBox="1"/>
-          <p:nvPr/>
-        </p:nvSpPr>
-        <p:spPr>
-          <a:xfrm>
-            <a:off x="1005840" y="4187952"/>
-            <a:ext cx="1097280" cy="658368"/>
-          </a:xfrm>
-          <a:prstGeom prst="rect">
-            <a:avLst/>
-          </a:prstGeom>
-          <a:noFill/>
-        </p:spPr>
-        <p:txBody>
-          <a:bodyPr wrap="square" anchor="ctr" lIns="0" rIns="0" tIns="0" bIns="0">
-            <a:spAutoFit/>
-          </a:bodyPr>
-          <a:lstStyle/>
-          <a:p>
-            <a:pPr algn="l">
-              <a:lnSpc>
-                <a:spcPct val="100000"/>
-              </a:lnSpc>
-              <a:spcAft>
-                <a:spcPts val="0"/>
-              </a:spcAft>
-            </a:pPr>
-            <a:r>
-              <a:rPr sz="1050" b="1">
-                <a:solidFill>
-                  <a:srgbClr val="E8EBF2"/>
-                </a:solidFill>
-                <a:latin typeface="微软雅黑"/>
-              </a:rPr>
-              <a:t>传说</a:t>
-            </a:r>
-          </a:p>
-        </p:txBody>
-      </p:sp>
-      <p:sp>
-        <p:nvSpPr>
-          <p:cNvPr id="33" name="TextBox 32"/>
-          <p:cNvSpPr txBox="1"/>
-          <p:nvPr/>
-        </p:nvSpPr>
-        <p:spPr>
-          <a:xfrm>
-            <a:off x="2103120" y="4187952"/>
-            <a:ext cx="3017520" cy="658368"/>
-          </a:xfrm>
-          <a:prstGeom prst="rect">
-            <a:avLst/>
-          </a:prstGeom>
-          <a:noFill/>
-        </p:spPr>
-        <p:txBody>
-          <a:bodyPr wrap="square" anchor="ctr" lIns="0" rIns="0" tIns="0" bIns="0">
-            <a:spAutoFit/>
-          </a:bodyPr>
-          <a:lstStyle/>
-          <a:p>
-            <a:pPr algn="l">
-              <a:lnSpc>
-                <a:spcPct val="100000"/>
-              </a:lnSpc>
-              <a:spcAft>
-                <a:spcPts val="0"/>
-              </a:spcAft>
-            </a:pPr>
-            <a:r>
-              <a:rPr sz="1050" b="0">
-                <a:solidFill>
-                  <a:srgbClr val="98A2B8"/>
-                </a:solidFill>
-                <a:latin typeface="微软雅黑"/>
-              </a:rPr>
-              <a:t>虚空领主</a:t>
-            </a:r>
-          </a:p>
-        </p:txBody>
-      </p:sp>
-      <p:sp>
-        <p:nvSpPr>
-          <p:cNvPr id="34" name="TextBox 33"/>
-          <p:cNvSpPr txBox="1"/>
-          <p:nvPr/>
-        </p:nvSpPr>
-        <p:spPr>
-          <a:xfrm>
-            <a:off x="5120640" y="4187952"/>
-            <a:ext cx="1554480" cy="658368"/>
-          </a:xfrm>
-          <a:prstGeom prst="rect">
-            <a:avLst/>
-          </a:prstGeom>
-          <a:noFill/>
-        </p:spPr>
-        <p:txBody>
-          <a:bodyPr wrap="square" anchor="ctr" lIns="0" rIns="0" tIns="0" bIns="0">
-            <a:spAutoFit/>
-          </a:bodyPr>
-          <a:lstStyle/>
-          <a:p>
-            <a:pPr algn="l">
-              <a:lnSpc>
-                <a:spcPct val="100000"/>
-              </a:lnSpc>
-              <a:spcAft>
-                <a:spcPts val="0"/>
-              </a:spcAft>
-            </a:pPr>
-            <a:r>
-              <a:rPr sz="1050" b="0">
-                <a:solidFill>
-                  <a:srgbClr val="98A2B8"/>
-                </a:solidFill>
-                <a:latin typeface="微软雅黑"/>
-              </a:rPr>
-              <a:t>200 💎</a:t>
-            </a:r>
-          </a:p>
-        </p:txBody>
-      </p:sp>
-      <p:sp>
-        <p:nvSpPr>
-          <p:cNvPr id="35" name="TextBox 34"/>
-          <p:cNvSpPr txBox="1"/>
-          <p:nvPr/>
-        </p:nvSpPr>
-        <p:spPr>
-          <a:xfrm>
-            <a:off x="6675120" y="4187952"/>
-            <a:ext cx="2286000" cy="658368"/>
-          </a:xfrm>
-          <a:prstGeom prst="rect">
-            <a:avLst/>
-          </a:prstGeom>
-          <a:noFill/>
-        </p:spPr>
-        <p:txBody>
-          <a:bodyPr wrap="square" anchor="ctr" lIns="0" rIns="0" tIns="0" bIns="0">
-            <a:spAutoFit/>
-          </a:bodyPr>
-          <a:lstStyle/>
-          <a:p>
-            <a:pPr algn="l">
-              <a:lnSpc>
-                <a:spcPct val="100000"/>
-              </a:lnSpc>
-              <a:spcAft>
-                <a:spcPts val="0"/>
-              </a:spcAft>
-            </a:pPr>
-            <a:r>
-              <a:rPr sz="1050" b="0">
-                <a:solidFill>
-                  <a:srgbClr val="98A2B8"/>
-                </a:solidFill>
-                <a:latin typeface="微软雅黑"/>
-              </a:rPr>
-              <a:t>全套动效 + 最大视觉半径</a:t>
-            </a:r>
-          </a:p>
-        </p:txBody>
-      </p:sp>
-      <p:sp>
-        <p:nvSpPr>
-          <p:cNvPr id="36" name="TextBox 35"/>
-          <p:cNvSpPr txBox="1"/>
-          <p:nvPr/>
-        </p:nvSpPr>
-        <p:spPr>
-          <a:xfrm>
-            <a:off x="8961120" y="4187952"/>
-            <a:ext cx="2560320" cy="658368"/>
-          </a:xfrm>
-          <a:prstGeom prst="rect">
-            <a:avLst/>
-          </a:prstGeom>
-          <a:noFill/>
-        </p:spPr>
-        <p:txBody>
-          <a:bodyPr wrap="square" anchor="ctr" lIns="0" rIns="0" tIns="0" bIns="0">
-            <a:spAutoFit/>
-          </a:bodyPr>
-          <a:lstStyle/>
-          <a:p>
-            <a:pPr algn="l">
-              <a:lnSpc>
-                <a:spcPct val="100000"/>
-              </a:lnSpc>
-              <a:spcAft>
-                <a:spcPts val="0"/>
-              </a:spcAft>
-            </a:pPr>
-            <a:r>
-              <a:rPr sz="1050" b="0">
-                <a:solidFill>
-                  <a:srgbClr val="98A2B8"/>
-                </a:solidFill>
-                <a:latin typeface="微软雅黑"/>
-              </a:rPr>
-              <a:t>向往型顶点：制造「看到别人拥有」的落差</a:t>
-            </a:r>
-          </a:p>
-        </p:txBody>
-      </p:sp>
-      <p:sp>
-        <p:nvSpPr>
-          <p:cNvPr id="37" name="Rounded Rectangle 36"/>
-          <p:cNvSpPr/>
-          <p:nvPr/>
-        </p:nvSpPr>
-        <p:spPr>
-          <a:xfrm>
-            <a:off x="841248" y="4892040"/>
-            <a:ext cx="10515600" cy="1417320"/>
-          </a:xfrm>
-          <a:prstGeom prst="roundRect">
-            <a:avLst>
-              <a:gd name="adj" fmla="val 5000"/>
-            </a:avLst>
-          </a:prstGeom>
-          <a:solidFill>
-            <a:srgbClr val="161A26"/>
-          </a:solidFill>
-          <a:ln w="9525">
-            <a:solidFill>
-              <a:srgbClr val="F0C040"/>
-            </a:solidFill>
-          </a:ln>
-          <a:effectLst/>
-        </p:spPr>
-        <p:style>
-          <a:lnRef idx="1">
-            <a:schemeClr val="accent1"/>
-          </a:lnRef>
-          <a:fillRef idx="3">
-            <a:schemeClr val="accent1"/>
-          </a:fillRef>
-          <a:effectRef idx="2">
-            <a:schemeClr val="accent1"/>
-          </a:effectRef>
-          <a:fontRef idx="minor">
-            <a:schemeClr val="lt1"/>
-          </a:fontRef>
-        </p:style>
-        <p:txBody>
-          <a:bodyPr rtlCol="0" anchor="ctr"/>
-          <a:lstStyle/>
-          <a:p>
-            <a:pPr algn="ctr"/>
-          </a:p>
-        </p:txBody>
-      </p:sp>
-      <p:sp>
-        <p:nvSpPr>
-          <p:cNvPr id="38" name="TextBox 37"/>
-          <p:cNvSpPr txBox="1"/>
-          <p:nvPr/>
-        </p:nvSpPr>
-        <p:spPr>
-          <a:xfrm>
-            <a:off x="1143000" y="5074920"/>
-            <a:ext cx="9966960" cy="1143000"/>
-          </a:xfrm>
-          <a:prstGeom prst="rect">
-            <a:avLst/>
-          </a:prstGeom>
-          <a:noFill/>
-        </p:spPr>
-        <p:txBody>
-          <a:bodyPr wrap="square" anchor="t" lIns="0" rIns="0" tIns="0" bIns="0">
-            <a:spAutoFit/>
-          </a:bodyPr>
-          <a:lstStyle/>
-          <a:p>
-            <a:pPr algn="l">
-              <a:lnSpc>
-                <a:spcPct val="130000"/>
-              </a:lnSpc>
-              <a:spcAft>
-                <a:spcPts val="200"/>
-              </a:spcAft>
-            </a:pPr>
-            <a:r>
-              <a:rPr sz="1300" b="1">
-                <a:solidFill>
-                  <a:srgbClr val="F0C040"/>
-                </a:solidFill>
-                <a:latin typeface="微软雅黑"/>
-              </a:rPr>
-              <a:t>为什么这样定价</a:t>
-            </a:r>
-          </a:p>
-          <a:p>
-            <a:pPr algn="l">
-              <a:lnSpc>
-                <a:spcPct val="130000"/>
-              </a:lnSpc>
-              <a:spcAft>
-                <a:spcPts val="200"/>
-              </a:spcAft>
-            </a:pPr>
-            <a:r>
-              <a:rPr sz="1150" b="0">
-                <a:solidFill>
-                  <a:srgbClr val="98A2B8"/>
-                </a:solidFill>
-                <a:latin typeface="微软雅黑"/>
-              </a:rPr>
-              <a:t>原方案 50/50/75/100/150 的梯度太平缓，且与视觉质量无关，玩家无法判断「贵在哪」。</a:t>
-            </a:r>
-          </a:p>
-          <a:p>
-            <a:pPr algn="l">
-              <a:lnSpc>
-                <a:spcPct val="130000"/>
-              </a:lnSpc>
-              <a:spcAft>
-                <a:spcPts val="200"/>
-              </a:spcAft>
-            </a:pPr>
-            <a:r>
-              <a:rPr sz="1150" b="0">
-                <a:solidFill>
-                  <a:srgbClr val="98A2B8"/>
-                </a:solidFill>
-                <a:latin typeface="微软雅黑"/>
-              </a:rPr>
-              <a:t>重构后，价格严格对齐动效密度——这让加价变得可解释，也给了玩家升级的理由。</a:t>
-            </a:r>
-          </a:p>
-          <a:p>
-            <a:pPr algn="l">
-              <a:lnSpc>
-                <a:spcPct val="130000"/>
-              </a:lnSpc>
-              <a:spcAft>
-                <a:spcPts val="200"/>
-              </a:spcAft>
-            </a:pPr>
-            <a:r>
-              <a:rPr sz="1150" b="1">
-                <a:solidFill>
-                  <a:srgbClr val="FF6B8A"/>
-                </a:solidFill>
-                <a:latin typeface="微软雅黑"/>
-              </a:rPr>
-              <a:t>→ 这既是定价策略，也是定价诚信：如果高稀有皮肤和低稀有在体验上没区别，高价就是在收智商税，短期能赚、长期摧毁信任。</a:t>
+              <a:t>「✓ 使用中 / 点击装备 / 💎 价格」三态清晰，并给出「钻石不足，还差 N 颗」的精确提示，减少无效点击。</a:t>
             </a:r>
           </a:p>
         </p:txBody>
@@ -6797,21 +6768,1333 @@
                 </a:solidFill>
                 <a:latin typeface="微软雅黑"/>
               </a:rPr>
-              <a:t>技术实现与实机验证</a:t>
-            </a:r>
-          </a:p>
-        </p:txBody>
-      </p:sp>
-      <p:sp>
-        <p:nvSpPr>
-          <p:cNvPr id="6" name="Rounded Rectangle 5"/>
+              <a:t>定价重构：从「无梯度」到「四档阶梯」</a:t>
+            </a:r>
+          </a:p>
+        </p:txBody>
+      </p:sp>
+      <p:sp>
+        <p:nvSpPr>
+          <p:cNvPr id="6" name="TextBox 5"/>
+          <p:cNvSpPr txBox="1"/>
+          <p:nvPr/>
+        </p:nvSpPr>
+        <p:spPr>
+          <a:xfrm>
+            <a:off x="841248" y="1243584"/>
+            <a:ext cx="10607040" cy="457200"/>
+          </a:xfrm>
+          <a:prstGeom prst="rect">
+            <a:avLst/>
+          </a:prstGeom>
+          <a:noFill/>
+        </p:spPr>
+        <p:txBody>
+          <a:bodyPr wrap="square" anchor="t" lIns="0" rIns="0" tIns="0" bIns="0">
+            <a:spAutoFit/>
+          </a:bodyPr>
+          <a:lstStyle/>
+          <a:p>
+            <a:pPr algn="l">
+              <a:lnSpc>
+                <a:spcPct val="122000"/>
+              </a:lnSpc>
+              <a:spcAft>
+                <a:spcPts val="0"/>
+              </a:spcAft>
+            </a:pPr>
+            <a:r>
+              <a:rPr sz="1250" b="0">
+                <a:solidFill>
+                  <a:srgbClr val="98A2B8"/>
+                </a:solidFill>
+                <a:latin typeface="微软雅黑"/>
+              </a:rPr>
+              <a:t>核心逻辑：价格严格对齐动效密度——多花一档的钱，确实多买到一层动态</a:t>
+            </a:r>
+          </a:p>
+        </p:txBody>
+      </p:sp>
+      <p:sp>
+        <p:nvSpPr>
+          <p:cNvPr id="7" name="Rectangle 6"/>
           <p:cNvSpPr/>
           <p:nvPr/>
         </p:nvSpPr>
         <p:spPr>
           <a:xfrm>
-            <a:off x="841248" y="1737360"/>
-            <a:ext cx="5120640" cy="4480560"/>
+            <a:off x="841248" y="1828800"/>
+            <a:ext cx="10515600" cy="384048"/>
+          </a:xfrm>
+          <a:prstGeom prst="rect">
+            <a:avLst/>
+          </a:prstGeom>
+          <a:solidFill>
+            <a:srgbClr val="1C2130"/>
+          </a:solidFill>
+          <a:ln>
+            <a:noFill/>
+          </a:ln>
+          <a:effectLst/>
+        </p:spPr>
+        <p:style>
+          <a:lnRef idx="1">
+            <a:schemeClr val="accent1"/>
+          </a:lnRef>
+          <a:fillRef idx="3">
+            <a:schemeClr val="accent1"/>
+          </a:fillRef>
+          <a:effectRef idx="2">
+            <a:schemeClr val="accent1"/>
+          </a:effectRef>
+          <a:fontRef idx="minor">
+            <a:schemeClr val="lt1"/>
+          </a:fontRef>
+        </p:style>
+        <p:txBody>
+          <a:bodyPr rtlCol="0" anchor="ctr"/>
+          <a:lstStyle/>
+          <a:p>
+            <a:pPr algn="ctr"/>
+          </a:p>
+        </p:txBody>
+      </p:sp>
+      <p:sp>
+        <p:nvSpPr>
+          <p:cNvPr id="8" name="TextBox 7"/>
+          <p:cNvSpPr txBox="1"/>
+          <p:nvPr/>
+        </p:nvSpPr>
+        <p:spPr>
+          <a:xfrm>
+            <a:off x="1005840" y="1828800"/>
+            <a:ext cx="1097280" cy="384048"/>
+          </a:xfrm>
+          <a:prstGeom prst="rect">
+            <a:avLst/>
+          </a:prstGeom>
+          <a:noFill/>
+        </p:spPr>
+        <p:txBody>
+          <a:bodyPr wrap="square" anchor="ctr" lIns="0" rIns="0" tIns="0" bIns="0">
+            <a:spAutoFit/>
+          </a:bodyPr>
+          <a:lstStyle/>
+          <a:p>
+            <a:pPr algn="l">
+              <a:lnSpc>
+                <a:spcPct val="100000"/>
+              </a:lnSpc>
+              <a:spcAft>
+                <a:spcPts val="0"/>
+              </a:spcAft>
+            </a:pPr>
+            <a:r>
+              <a:rPr sz="1050" b="1">
+                <a:solidFill>
+                  <a:srgbClr val="6B7488"/>
+                </a:solidFill>
+                <a:latin typeface="微软雅黑"/>
+              </a:rPr>
+              <a:t>稀有度</a:t>
+            </a:r>
+          </a:p>
+        </p:txBody>
+      </p:sp>
+      <p:sp>
+        <p:nvSpPr>
+          <p:cNvPr id="9" name="TextBox 8"/>
+          <p:cNvSpPr txBox="1"/>
+          <p:nvPr/>
+        </p:nvSpPr>
+        <p:spPr>
+          <a:xfrm>
+            <a:off x="2103120" y="1828800"/>
+            <a:ext cx="3017520" cy="384048"/>
+          </a:xfrm>
+          <a:prstGeom prst="rect">
+            <a:avLst/>
+          </a:prstGeom>
+          <a:noFill/>
+        </p:spPr>
+        <p:txBody>
+          <a:bodyPr wrap="square" anchor="ctr" lIns="0" rIns="0" tIns="0" bIns="0">
+            <a:spAutoFit/>
+          </a:bodyPr>
+          <a:lstStyle/>
+          <a:p>
+            <a:pPr algn="l">
+              <a:lnSpc>
+                <a:spcPct val="100000"/>
+              </a:lnSpc>
+              <a:spcAft>
+                <a:spcPts val="0"/>
+              </a:spcAft>
+            </a:pPr>
+            <a:r>
+              <a:rPr sz="1050" b="1">
+                <a:solidFill>
+                  <a:srgbClr val="6B7488"/>
+                </a:solidFill>
+                <a:latin typeface="微软雅黑"/>
+              </a:rPr>
+              <a:t>皮肤</a:t>
+            </a:r>
+          </a:p>
+        </p:txBody>
+      </p:sp>
+      <p:sp>
+        <p:nvSpPr>
+          <p:cNvPr id="10" name="TextBox 9"/>
+          <p:cNvSpPr txBox="1"/>
+          <p:nvPr/>
+        </p:nvSpPr>
+        <p:spPr>
+          <a:xfrm>
+            <a:off x="5120640" y="1828800"/>
+            <a:ext cx="1554480" cy="384048"/>
+          </a:xfrm>
+          <a:prstGeom prst="rect">
+            <a:avLst/>
+          </a:prstGeom>
+          <a:noFill/>
+        </p:spPr>
+        <p:txBody>
+          <a:bodyPr wrap="square" anchor="ctr" lIns="0" rIns="0" tIns="0" bIns="0">
+            <a:spAutoFit/>
+          </a:bodyPr>
+          <a:lstStyle/>
+          <a:p>
+            <a:pPr algn="l">
+              <a:lnSpc>
+                <a:spcPct val="100000"/>
+              </a:lnSpc>
+              <a:spcAft>
+                <a:spcPts val="0"/>
+              </a:spcAft>
+            </a:pPr>
+            <a:r>
+              <a:rPr sz="1050" b="1">
+                <a:solidFill>
+                  <a:srgbClr val="6B7488"/>
+                </a:solidFill>
+                <a:latin typeface="微软雅黑"/>
+              </a:rPr>
+              <a:t>价格</a:t>
+            </a:r>
+          </a:p>
+        </p:txBody>
+      </p:sp>
+      <p:sp>
+        <p:nvSpPr>
+          <p:cNvPr id="11" name="TextBox 10"/>
+          <p:cNvSpPr txBox="1"/>
+          <p:nvPr/>
+        </p:nvSpPr>
+        <p:spPr>
+          <a:xfrm>
+            <a:off x="6675120" y="1828800"/>
+            <a:ext cx="2286000" cy="384048"/>
+          </a:xfrm>
+          <a:prstGeom prst="rect">
+            <a:avLst/>
+          </a:prstGeom>
+          <a:noFill/>
+        </p:spPr>
+        <p:txBody>
+          <a:bodyPr wrap="square" anchor="ctr" lIns="0" rIns="0" tIns="0" bIns="0">
+            <a:spAutoFit/>
+          </a:bodyPr>
+          <a:lstStyle/>
+          <a:p>
+            <a:pPr algn="l">
+              <a:lnSpc>
+                <a:spcPct val="100000"/>
+              </a:lnSpc>
+              <a:spcAft>
+                <a:spcPts val="0"/>
+              </a:spcAft>
+            </a:pPr>
+            <a:r>
+              <a:rPr sz="1050" b="1">
+                <a:solidFill>
+                  <a:srgbClr val="6B7488"/>
+                </a:solidFill>
+                <a:latin typeface="微软雅黑"/>
+              </a:rPr>
+              <a:t>动效密度</a:t>
+            </a:r>
+          </a:p>
+        </p:txBody>
+      </p:sp>
+      <p:sp>
+        <p:nvSpPr>
+          <p:cNvPr id="12" name="TextBox 11"/>
+          <p:cNvSpPr txBox="1"/>
+          <p:nvPr/>
+        </p:nvSpPr>
+        <p:spPr>
+          <a:xfrm>
+            <a:off x="8961120" y="1828800"/>
+            <a:ext cx="2560320" cy="384048"/>
+          </a:xfrm>
+          <a:prstGeom prst="rect">
+            <a:avLst/>
+          </a:prstGeom>
+          <a:noFill/>
+        </p:spPr>
+        <p:txBody>
+          <a:bodyPr wrap="square" anchor="ctr" lIns="0" rIns="0" tIns="0" bIns="0">
+            <a:spAutoFit/>
+          </a:bodyPr>
+          <a:lstStyle/>
+          <a:p>
+            <a:pPr algn="l">
+              <a:lnSpc>
+                <a:spcPct val="100000"/>
+              </a:lnSpc>
+              <a:spcAft>
+                <a:spcPts val="0"/>
+              </a:spcAft>
+            </a:pPr>
+            <a:r>
+              <a:rPr sz="1050" b="1">
+                <a:solidFill>
+                  <a:srgbClr val="6B7488"/>
+                </a:solidFill>
+                <a:latin typeface="微软雅黑"/>
+              </a:rPr>
+              <a:t>定价意图</a:t>
+            </a:r>
+          </a:p>
+        </p:txBody>
+      </p:sp>
+      <p:sp>
+        <p:nvSpPr>
+          <p:cNvPr id="13" name="Rectangle 12"/>
+          <p:cNvSpPr/>
+          <p:nvPr/>
+        </p:nvSpPr>
+        <p:spPr>
+          <a:xfrm>
+            <a:off x="841248" y="2212848"/>
+            <a:ext cx="10515600" cy="658368"/>
+          </a:xfrm>
+          <a:prstGeom prst="rect">
+            <a:avLst/>
+          </a:prstGeom>
+          <a:solidFill>
+            <a:srgbClr val="161A26"/>
+          </a:solidFill>
+          <a:ln>
+            <a:noFill/>
+          </a:ln>
+          <a:effectLst/>
+        </p:spPr>
+        <p:style>
+          <a:lnRef idx="1">
+            <a:schemeClr val="accent1"/>
+          </a:lnRef>
+          <a:fillRef idx="3">
+            <a:schemeClr val="accent1"/>
+          </a:fillRef>
+          <a:effectRef idx="2">
+            <a:schemeClr val="accent1"/>
+          </a:effectRef>
+          <a:fontRef idx="minor">
+            <a:schemeClr val="lt1"/>
+          </a:fontRef>
+        </p:style>
+        <p:txBody>
+          <a:bodyPr rtlCol="0" anchor="ctr"/>
+          <a:lstStyle/>
+          <a:p>
+            <a:pPr algn="ctr"/>
+          </a:p>
+        </p:txBody>
+      </p:sp>
+      <p:sp>
+        <p:nvSpPr>
+          <p:cNvPr id="14" name="TextBox 13"/>
+          <p:cNvSpPr txBox="1"/>
+          <p:nvPr/>
+        </p:nvSpPr>
+        <p:spPr>
+          <a:xfrm>
+            <a:off x="1005840" y="2212848"/>
+            <a:ext cx="1097280" cy="658368"/>
+          </a:xfrm>
+          <a:prstGeom prst="rect">
+            <a:avLst/>
+          </a:prstGeom>
+          <a:noFill/>
+        </p:spPr>
+        <p:txBody>
+          <a:bodyPr wrap="square" anchor="ctr" lIns="0" rIns="0" tIns="0" bIns="0">
+            <a:spAutoFit/>
+          </a:bodyPr>
+          <a:lstStyle/>
+          <a:p>
+            <a:pPr algn="l">
+              <a:lnSpc>
+                <a:spcPct val="100000"/>
+              </a:lnSpc>
+              <a:spcAft>
+                <a:spcPts val="0"/>
+              </a:spcAft>
+            </a:pPr>
+            <a:r>
+              <a:rPr sz="1050" b="1">
+                <a:solidFill>
+                  <a:srgbClr val="E8EBF2"/>
+                </a:solidFill>
+                <a:latin typeface="微软雅黑"/>
+              </a:rPr>
+              <a:t>普通</a:t>
+            </a:r>
+          </a:p>
+        </p:txBody>
+      </p:sp>
+      <p:sp>
+        <p:nvSpPr>
+          <p:cNvPr id="15" name="TextBox 14"/>
+          <p:cNvSpPr txBox="1"/>
+          <p:nvPr/>
+        </p:nvSpPr>
+        <p:spPr>
+          <a:xfrm>
+            <a:off x="2103120" y="2212848"/>
+            <a:ext cx="3017520" cy="658368"/>
+          </a:xfrm>
+          <a:prstGeom prst="rect">
+            <a:avLst/>
+          </a:prstGeom>
+          <a:noFill/>
+        </p:spPr>
+        <p:txBody>
+          <a:bodyPr wrap="square" anchor="ctr" lIns="0" rIns="0" tIns="0" bIns="0">
+            <a:spAutoFit/>
+          </a:bodyPr>
+          <a:lstStyle/>
+          <a:p>
+            <a:pPr algn="l">
+              <a:lnSpc>
+                <a:spcPct val="100000"/>
+              </a:lnSpc>
+              <a:spcAft>
+                <a:spcPts val="0"/>
+              </a:spcAft>
+            </a:pPr>
+            <a:r>
+              <a:rPr sz="1050" b="0">
+                <a:solidFill>
+                  <a:srgbClr val="98A2B8"/>
+                </a:solidFill>
+                <a:latin typeface="微软雅黑"/>
+              </a:rPr>
+              <a:t>制式战士</a:t>
+            </a:r>
+          </a:p>
+        </p:txBody>
+      </p:sp>
+      <p:sp>
+        <p:nvSpPr>
+          <p:cNvPr id="16" name="TextBox 15"/>
+          <p:cNvSpPr txBox="1"/>
+          <p:nvPr/>
+        </p:nvSpPr>
+        <p:spPr>
+          <a:xfrm>
+            <a:off x="5120640" y="2212848"/>
+            <a:ext cx="1554480" cy="658368"/>
+          </a:xfrm>
+          <a:prstGeom prst="rect">
+            <a:avLst/>
+          </a:prstGeom>
+          <a:noFill/>
+        </p:spPr>
+        <p:txBody>
+          <a:bodyPr wrap="square" anchor="ctr" lIns="0" rIns="0" tIns="0" bIns="0">
+            <a:spAutoFit/>
+          </a:bodyPr>
+          <a:lstStyle/>
+          <a:p>
+            <a:pPr algn="l">
+              <a:lnSpc>
+                <a:spcPct val="100000"/>
+              </a:lnSpc>
+              <a:spcAft>
+                <a:spcPts val="0"/>
+              </a:spcAft>
+            </a:pPr>
+            <a:r>
+              <a:rPr sz="1050" b="0">
+                <a:solidFill>
+                  <a:srgbClr val="98A2B8"/>
+                </a:solidFill>
+                <a:latin typeface="微软雅黑"/>
+              </a:rPr>
+              <a:t>免费</a:t>
+            </a:r>
+          </a:p>
+        </p:txBody>
+      </p:sp>
+      <p:sp>
+        <p:nvSpPr>
+          <p:cNvPr id="17" name="TextBox 16"/>
+          <p:cNvSpPr txBox="1"/>
+          <p:nvPr/>
+        </p:nvSpPr>
+        <p:spPr>
+          <a:xfrm>
+            <a:off x="6675120" y="2212848"/>
+            <a:ext cx="2286000" cy="658368"/>
+          </a:xfrm>
+          <a:prstGeom prst="rect">
+            <a:avLst/>
+          </a:prstGeom>
+          <a:noFill/>
+        </p:spPr>
+        <p:txBody>
+          <a:bodyPr wrap="square" anchor="ctr" lIns="0" rIns="0" tIns="0" bIns="0">
+            <a:spAutoFit/>
+          </a:bodyPr>
+          <a:lstStyle/>
+          <a:p>
+            <a:pPr algn="l">
+              <a:lnSpc>
+                <a:spcPct val="100000"/>
+              </a:lnSpc>
+              <a:spcAft>
+                <a:spcPts val="0"/>
+              </a:spcAft>
+            </a:pPr>
+            <a:r>
+              <a:rPr sz="1050" b="0">
+                <a:solidFill>
+                  <a:srgbClr val="98A2B8"/>
+                </a:solidFill>
+                <a:latin typeface="微软雅黑"/>
+              </a:rPr>
+              <a:t>静态</a:t>
+            </a:r>
+          </a:p>
+        </p:txBody>
+      </p:sp>
+      <p:sp>
+        <p:nvSpPr>
+          <p:cNvPr id="18" name="TextBox 17"/>
+          <p:cNvSpPr txBox="1"/>
+          <p:nvPr/>
+        </p:nvSpPr>
+        <p:spPr>
+          <a:xfrm>
+            <a:off x="8961120" y="2212848"/>
+            <a:ext cx="2560320" cy="658368"/>
+          </a:xfrm>
+          <a:prstGeom prst="rect">
+            <a:avLst/>
+          </a:prstGeom>
+          <a:noFill/>
+        </p:spPr>
+        <p:txBody>
+          <a:bodyPr wrap="square" anchor="ctr" lIns="0" rIns="0" tIns="0" bIns="0">
+            <a:spAutoFit/>
+          </a:bodyPr>
+          <a:lstStyle/>
+          <a:p>
+            <a:pPr algn="l">
+              <a:lnSpc>
+                <a:spcPct val="100000"/>
+              </a:lnSpc>
+              <a:spcAft>
+                <a:spcPts val="0"/>
+              </a:spcAft>
+            </a:pPr>
+            <a:r>
+              <a:rPr sz="1050" b="0">
+                <a:solidFill>
+                  <a:srgbClr val="98A2B8"/>
+                </a:solidFill>
+                <a:latin typeface="微软雅黑"/>
+              </a:rPr>
+              <a:t>基准锚点，让所有付费皮肤显得「有理由贵」</a:t>
+            </a:r>
+          </a:p>
+        </p:txBody>
+      </p:sp>
+      <p:sp>
+        <p:nvSpPr>
+          <p:cNvPr id="19" name="Rectangle 18"/>
+          <p:cNvSpPr/>
+          <p:nvPr/>
+        </p:nvSpPr>
+        <p:spPr>
+          <a:xfrm>
+            <a:off x="841248" y="2871216"/>
+            <a:ext cx="10515600" cy="658368"/>
+          </a:xfrm>
+          <a:prstGeom prst="rect">
+            <a:avLst/>
+          </a:prstGeom>
+          <a:solidFill>
+            <a:srgbClr val="0A0A0F"/>
+          </a:solidFill>
+          <a:ln>
+            <a:noFill/>
+          </a:ln>
+          <a:effectLst/>
+        </p:spPr>
+        <p:style>
+          <a:lnRef idx="1">
+            <a:schemeClr val="accent1"/>
+          </a:lnRef>
+          <a:fillRef idx="3">
+            <a:schemeClr val="accent1"/>
+          </a:fillRef>
+          <a:effectRef idx="2">
+            <a:schemeClr val="accent1"/>
+          </a:effectRef>
+          <a:fontRef idx="minor">
+            <a:schemeClr val="lt1"/>
+          </a:fontRef>
+        </p:style>
+        <p:txBody>
+          <a:bodyPr rtlCol="0" anchor="ctr"/>
+          <a:lstStyle/>
+          <a:p>
+            <a:pPr algn="ctr"/>
+          </a:p>
+        </p:txBody>
+      </p:sp>
+      <p:sp>
+        <p:nvSpPr>
+          <p:cNvPr id="20" name="TextBox 19"/>
+          <p:cNvSpPr txBox="1"/>
+          <p:nvPr/>
+        </p:nvSpPr>
+        <p:spPr>
+          <a:xfrm>
+            <a:off x="1005840" y="2871216"/>
+            <a:ext cx="1097280" cy="658368"/>
+          </a:xfrm>
+          <a:prstGeom prst="rect">
+            <a:avLst/>
+          </a:prstGeom>
+          <a:noFill/>
+        </p:spPr>
+        <p:txBody>
+          <a:bodyPr wrap="square" anchor="ctr" lIns="0" rIns="0" tIns="0" bIns="0">
+            <a:spAutoFit/>
+          </a:bodyPr>
+          <a:lstStyle/>
+          <a:p>
+            <a:pPr algn="l">
+              <a:lnSpc>
+                <a:spcPct val="100000"/>
+              </a:lnSpc>
+              <a:spcAft>
+                <a:spcPts val="0"/>
+              </a:spcAft>
+            </a:pPr>
+            <a:r>
+              <a:rPr sz="1050" b="1">
+                <a:solidFill>
+                  <a:srgbClr val="E8EBF2"/>
+                </a:solidFill>
+                <a:latin typeface="微软雅黑"/>
+              </a:rPr>
+              <a:t>稀有</a:t>
+            </a:r>
+          </a:p>
+        </p:txBody>
+      </p:sp>
+      <p:sp>
+        <p:nvSpPr>
+          <p:cNvPr id="21" name="TextBox 20"/>
+          <p:cNvSpPr txBox="1"/>
+          <p:nvPr/>
+        </p:nvSpPr>
+        <p:spPr>
+          <a:xfrm>
+            <a:off x="2103120" y="2871216"/>
+            <a:ext cx="3017520" cy="658368"/>
+          </a:xfrm>
+          <a:prstGeom prst="rect">
+            <a:avLst/>
+          </a:prstGeom>
+          <a:noFill/>
+        </p:spPr>
+        <p:txBody>
+          <a:bodyPr wrap="square" anchor="ctr" lIns="0" rIns="0" tIns="0" bIns="0">
+            <a:spAutoFit/>
+          </a:bodyPr>
+          <a:lstStyle/>
+          <a:p>
+            <a:pPr algn="l">
+              <a:lnSpc>
+                <a:spcPct val="100000"/>
+              </a:lnSpc>
+              <a:spcAft>
+                <a:spcPts val="0"/>
+              </a:spcAft>
+            </a:pPr>
+            <a:r>
+              <a:rPr sz="1050" b="0">
+                <a:solidFill>
+                  <a:srgbClr val="98A2B8"/>
+                </a:solidFill>
+                <a:latin typeface="微软雅黑"/>
+              </a:rPr>
+              <a:t>烈焰使者 / 暗影刺客</a:t>
+            </a:r>
+          </a:p>
+        </p:txBody>
+      </p:sp>
+      <p:sp>
+        <p:nvSpPr>
+          <p:cNvPr id="22" name="TextBox 21"/>
+          <p:cNvSpPr txBox="1"/>
+          <p:nvPr/>
+        </p:nvSpPr>
+        <p:spPr>
+          <a:xfrm>
+            <a:off x="5120640" y="2871216"/>
+            <a:ext cx="1554480" cy="658368"/>
+          </a:xfrm>
+          <a:prstGeom prst="rect">
+            <a:avLst/>
+          </a:prstGeom>
+          <a:noFill/>
+        </p:spPr>
+        <p:txBody>
+          <a:bodyPr wrap="square" anchor="ctr" lIns="0" rIns="0" tIns="0" bIns="0">
+            <a:spAutoFit/>
+          </a:bodyPr>
+          <a:lstStyle/>
+          <a:p>
+            <a:pPr algn="l">
+              <a:lnSpc>
+                <a:spcPct val="100000"/>
+              </a:lnSpc>
+              <a:spcAft>
+                <a:spcPts val="0"/>
+              </a:spcAft>
+            </a:pPr>
+            <a:r>
+              <a:rPr sz="1050" b="0">
+                <a:solidFill>
+                  <a:srgbClr val="98A2B8"/>
+                </a:solidFill>
+                <a:latin typeface="微软雅黑"/>
+              </a:rPr>
+              <a:t>60 💎</a:t>
+            </a:r>
+          </a:p>
+        </p:txBody>
+      </p:sp>
+      <p:sp>
+        <p:nvSpPr>
+          <p:cNvPr id="23" name="TextBox 22"/>
+          <p:cNvSpPr txBox="1"/>
+          <p:nvPr/>
+        </p:nvSpPr>
+        <p:spPr>
+          <a:xfrm>
+            <a:off x="6675120" y="2871216"/>
+            <a:ext cx="2286000" cy="658368"/>
+          </a:xfrm>
+          <a:prstGeom prst="rect">
+            <a:avLst/>
+          </a:prstGeom>
+          <a:noFill/>
+        </p:spPr>
+        <p:txBody>
+          <a:bodyPr wrap="square" anchor="ctr" lIns="0" rIns="0" tIns="0" bIns="0">
+            <a:spAutoFit/>
+          </a:bodyPr>
+          <a:lstStyle/>
+          <a:p>
+            <a:pPr algn="l">
+              <a:lnSpc>
+                <a:spcPct val="100000"/>
+              </a:lnSpc>
+              <a:spcAft>
+                <a:spcPts val="0"/>
+              </a:spcAft>
+            </a:pPr>
+            <a:r>
+              <a:rPr sz="1050" b="0">
+                <a:solidFill>
+                  <a:srgbClr val="98A2B8"/>
+                </a:solidFill>
+                <a:latin typeface="微软雅黑"/>
+              </a:rPr>
+              <a:t>1 项动效</a:t>
+            </a:r>
+          </a:p>
+        </p:txBody>
+      </p:sp>
+      <p:sp>
+        <p:nvSpPr>
+          <p:cNvPr id="24" name="TextBox 23"/>
+          <p:cNvSpPr txBox="1"/>
+          <p:nvPr/>
+        </p:nvSpPr>
+        <p:spPr>
+          <a:xfrm>
+            <a:off x="8961120" y="2871216"/>
+            <a:ext cx="2560320" cy="658368"/>
+          </a:xfrm>
+          <a:prstGeom prst="rect">
+            <a:avLst/>
+          </a:prstGeom>
+          <a:noFill/>
+        </p:spPr>
+        <p:txBody>
+          <a:bodyPr wrap="square" anchor="ctr" lIns="0" rIns="0" tIns="0" bIns="0">
+            <a:spAutoFit/>
+          </a:bodyPr>
+          <a:lstStyle/>
+          <a:p>
+            <a:pPr algn="l">
+              <a:lnSpc>
+                <a:spcPct val="100000"/>
+              </a:lnSpc>
+              <a:spcAft>
+                <a:spcPts val="0"/>
+              </a:spcAft>
+            </a:pPr>
+            <a:r>
+              <a:rPr sz="1050" b="0">
+                <a:solidFill>
+                  <a:srgbClr val="98A2B8"/>
+                </a:solidFill>
+                <a:latin typeface="微软雅黑"/>
+              </a:rPr>
+              <a:t>首充档：小额即可获得的第一个「升级感」</a:t>
+            </a:r>
+          </a:p>
+        </p:txBody>
+      </p:sp>
+      <p:sp>
+        <p:nvSpPr>
+          <p:cNvPr id="25" name="Rectangle 24"/>
+          <p:cNvSpPr/>
+          <p:nvPr/>
+        </p:nvSpPr>
+        <p:spPr>
+          <a:xfrm>
+            <a:off x="841248" y="3529584"/>
+            <a:ext cx="10515600" cy="658368"/>
+          </a:xfrm>
+          <a:prstGeom prst="rect">
+            <a:avLst/>
+          </a:prstGeom>
+          <a:solidFill>
+            <a:srgbClr val="161A26"/>
+          </a:solidFill>
+          <a:ln>
+            <a:noFill/>
+          </a:ln>
+          <a:effectLst/>
+        </p:spPr>
+        <p:style>
+          <a:lnRef idx="1">
+            <a:schemeClr val="accent1"/>
+          </a:lnRef>
+          <a:fillRef idx="3">
+            <a:schemeClr val="accent1"/>
+          </a:fillRef>
+          <a:effectRef idx="2">
+            <a:schemeClr val="accent1"/>
+          </a:effectRef>
+          <a:fontRef idx="minor">
+            <a:schemeClr val="lt1"/>
+          </a:fontRef>
+        </p:style>
+        <p:txBody>
+          <a:bodyPr rtlCol="0" anchor="ctr"/>
+          <a:lstStyle/>
+          <a:p>
+            <a:pPr algn="ctr"/>
+          </a:p>
+        </p:txBody>
+      </p:sp>
+      <p:sp>
+        <p:nvSpPr>
+          <p:cNvPr id="26" name="TextBox 25"/>
+          <p:cNvSpPr txBox="1"/>
+          <p:nvPr/>
+        </p:nvSpPr>
+        <p:spPr>
+          <a:xfrm>
+            <a:off x="1005840" y="3529584"/>
+            <a:ext cx="1097280" cy="658368"/>
+          </a:xfrm>
+          <a:prstGeom prst="rect">
+            <a:avLst/>
+          </a:prstGeom>
+          <a:noFill/>
+        </p:spPr>
+        <p:txBody>
+          <a:bodyPr wrap="square" anchor="ctr" lIns="0" rIns="0" tIns="0" bIns="0">
+            <a:spAutoFit/>
+          </a:bodyPr>
+          <a:lstStyle/>
+          <a:p>
+            <a:pPr algn="l">
+              <a:lnSpc>
+                <a:spcPct val="100000"/>
+              </a:lnSpc>
+              <a:spcAft>
+                <a:spcPts val="0"/>
+              </a:spcAft>
+            </a:pPr>
+            <a:r>
+              <a:rPr sz="1050" b="1">
+                <a:solidFill>
+                  <a:srgbClr val="E8EBF2"/>
+                </a:solidFill>
+                <a:latin typeface="微软雅黑"/>
+              </a:rPr>
+              <a:t>史诗</a:t>
+            </a:r>
+          </a:p>
+        </p:txBody>
+      </p:sp>
+      <p:sp>
+        <p:nvSpPr>
+          <p:cNvPr id="27" name="TextBox 26"/>
+          <p:cNvSpPr txBox="1"/>
+          <p:nvPr/>
+        </p:nvSpPr>
+        <p:spPr>
+          <a:xfrm>
+            <a:off x="2103120" y="3529584"/>
+            <a:ext cx="3017520" cy="658368"/>
+          </a:xfrm>
+          <a:prstGeom prst="rect">
+            <a:avLst/>
+          </a:prstGeom>
+          <a:noFill/>
+        </p:spPr>
+        <p:txBody>
+          <a:bodyPr wrap="square" anchor="ctr" lIns="0" rIns="0" tIns="0" bIns="0">
+            <a:spAutoFit/>
+          </a:bodyPr>
+          <a:lstStyle/>
+          <a:p>
+            <a:pPr algn="l">
+              <a:lnSpc>
+                <a:spcPct val="100000"/>
+              </a:lnSpc>
+              <a:spcAft>
+                <a:spcPts val="0"/>
+              </a:spcAft>
+            </a:pPr>
+            <a:r>
+              <a:rPr sz="1050" b="0">
+                <a:solidFill>
+                  <a:srgbClr val="98A2B8"/>
+                </a:solidFill>
+                <a:latin typeface="微软雅黑"/>
+              </a:rPr>
+              <a:t>霓虹战士 / 黄金骑士</a:t>
+            </a:r>
+          </a:p>
+        </p:txBody>
+      </p:sp>
+      <p:sp>
+        <p:nvSpPr>
+          <p:cNvPr id="28" name="TextBox 27"/>
+          <p:cNvSpPr txBox="1"/>
+          <p:nvPr/>
+        </p:nvSpPr>
+        <p:spPr>
+          <a:xfrm>
+            <a:off x="5120640" y="3529584"/>
+            <a:ext cx="1554480" cy="658368"/>
+          </a:xfrm>
+          <a:prstGeom prst="rect">
+            <a:avLst/>
+          </a:prstGeom>
+          <a:noFill/>
+        </p:spPr>
+        <p:txBody>
+          <a:bodyPr wrap="square" anchor="ctr" lIns="0" rIns="0" tIns="0" bIns="0">
+            <a:spAutoFit/>
+          </a:bodyPr>
+          <a:lstStyle/>
+          <a:p>
+            <a:pPr algn="l">
+              <a:lnSpc>
+                <a:spcPct val="100000"/>
+              </a:lnSpc>
+              <a:spcAft>
+                <a:spcPts val="0"/>
+              </a:spcAft>
+            </a:pPr>
+            <a:r>
+              <a:rPr sz="1050" b="0">
+                <a:solidFill>
+                  <a:srgbClr val="98A2B8"/>
+                </a:solidFill>
+                <a:latin typeface="微软雅黑"/>
+              </a:rPr>
+              <a:t>90–120 💎</a:t>
+            </a:r>
+          </a:p>
+        </p:txBody>
+      </p:sp>
+      <p:sp>
+        <p:nvSpPr>
+          <p:cNvPr id="29" name="TextBox 28"/>
+          <p:cNvSpPr txBox="1"/>
+          <p:nvPr/>
+        </p:nvSpPr>
+        <p:spPr>
+          <a:xfrm>
+            <a:off x="6675120" y="3529584"/>
+            <a:ext cx="2286000" cy="658368"/>
+          </a:xfrm>
+          <a:prstGeom prst="rect">
+            <a:avLst/>
+          </a:prstGeom>
+          <a:noFill/>
+        </p:spPr>
+        <p:txBody>
+          <a:bodyPr wrap="square" anchor="ctr" lIns="0" rIns="0" tIns="0" bIns="0">
+            <a:spAutoFit/>
+          </a:bodyPr>
+          <a:lstStyle/>
+          <a:p>
+            <a:pPr algn="l">
+              <a:lnSpc>
+                <a:spcPct val="100000"/>
+              </a:lnSpc>
+              <a:spcAft>
+                <a:spcPts val="0"/>
+              </a:spcAft>
+            </a:pPr>
+            <a:r>
+              <a:rPr sz="1050" b="0">
+                <a:solidFill>
+                  <a:srgbClr val="98A2B8"/>
+                </a:solidFill>
+                <a:latin typeface="微软雅黑"/>
+              </a:rPr>
+              <a:t>2–3 项动效</a:t>
+            </a:r>
+          </a:p>
+        </p:txBody>
+      </p:sp>
+      <p:sp>
+        <p:nvSpPr>
+          <p:cNvPr id="30" name="TextBox 29"/>
+          <p:cNvSpPr txBox="1"/>
+          <p:nvPr/>
+        </p:nvSpPr>
+        <p:spPr>
+          <a:xfrm>
+            <a:off x="8961120" y="3529584"/>
+            <a:ext cx="2560320" cy="658368"/>
+          </a:xfrm>
+          <a:prstGeom prst="rect">
+            <a:avLst/>
+          </a:prstGeom>
+          <a:noFill/>
+        </p:spPr>
+        <p:txBody>
+          <a:bodyPr wrap="square" anchor="ctr" lIns="0" rIns="0" tIns="0" bIns="0">
+            <a:spAutoFit/>
+          </a:bodyPr>
+          <a:lstStyle/>
+          <a:p>
+            <a:pPr algn="l">
+              <a:lnSpc>
+                <a:spcPct val="100000"/>
+              </a:lnSpc>
+              <a:spcAft>
+                <a:spcPts val="0"/>
+              </a:spcAft>
+            </a:pPr>
+            <a:r>
+              <a:rPr sz="1050" b="0">
+                <a:solidFill>
+                  <a:srgbClr val="98A2B8"/>
+                </a:solidFill>
+                <a:latin typeface="微软雅黑"/>
+              </a:rPr>
+              <a:t>主力档：品质明显跃升，承接大部分付费</a:t>
+            </a:r>
+          </a:p>
+        </p:txBody>
+      </p:sp>
+      <p:sp>
+        <p:nvSpPr>
+          <p:cNvPr id="31" name="Rectangle 30"/>
+          <p:cNvSpPr/>
+          <p:nvPr/>
+        </p:nvSpPr>
+        <p:spPr>
+          <a:xfrm>
+            <a:off x="841248" y="4187952"/>
+            <a:ext cx="10515600" cy="658368"/>
+          </a:xfrm>
+          <a:prstGeom prst="rect">
+            <a:avLst/>
+          </a:prstGeom>
+          <a:solidFill>
+            <a:srgbClr val="0A0A0F"/>
+          </a:solidFill>
+          <a:ln>
+            <a:noFill/>
+          </a:ln>
+          <a:effectLst/>
+        </p:spPr>
+        <p:style>
+          <a:lnRef idx="1">
+            <a:schemeClr val="accent1"/>
+          </a:lnRef>
+          <a:fillRef idx="3">
+            <a:schemeClr val="accent1"/>
+          </a:fillRef>
+          <a:effectRef idx="2">
+            <a:schemeClr val="accent1"/>
+          </a:effectRef>
+          <a:fontRef idx="minor">
+            <a:schemeClr val="lt1"/>
+          </a:fontRef>
+        </p:style>
+        <p:txBody>
+          <a:bodyPr rtlCol="0" anchor="ctr"/>
+          <a:lstStyle/>
+          <a:p>
+            <a:pPr algn="ctr"/>
+          </a:p>
+        </p:txBody>
+      </p:sp>
+      <p:sp>
+        <p:nvSpPr>
+          <p:cNvPr id="32" name="TextBox 31"/>
+          <p:cNvSpPr txBox="1"/>
+          <p:nvPr/>
+        </p:nvSpPr>
+        <p:spPr>
+          <a:xfrm>
+            <a:off x="1005840" y="4187952"/>
+            <a:ext cx="1097280" cy="658368"/>
+          </a:xfrm>
+          <a:prstGeom prst="rect">
+            <a:avLst/>
+          </a:prstGeom>
+          <a:noFill/>
+        </p:spPr>
+        <p:txBody>
+          <a:bodyPr wrap="square" anchor="ctr" lIns="0" rIns="0" tIns="0" bIns="0">
+            <a:spAutoFit/>
+          </a:bodyPr>
+          <a:lstStyle/>
+          <a:p>
+            <a:pPr algn="l">
+              <a:lnSpc>
+                <a:spcPct val="100000"/>
+              </a:lnSpc>
+              <a:spcAft>
+                <a:spcPts val="0"/>
+              </a:spcAft>
+            </a:pPr>
+            <a:r>
+              <a:rPr sz="1050" b="1">
+                <a:solidFill>
+                  <a:srgbClr val="E8EBF2"/>
+                </a:solidFill>
+                <a:latin typeface="微软雅黑"/>
+              </a:rPr>
+              <a:t>传说</a:t>
+            </a:r>
+          </a:p>
+        </p:txBody>
+      </p:sp>
+      <p:sp>
+        <p:nvSpPr>
+          <p:cNvPr id="33" name="TextBox 32"/>
+          <p:cNvSpPr txBox="1"/>
+          <p:nvPr/>
+        </p:nvSpPr>
+        <p:spPr>
+          <a:xfrm>
+            <a:off x="2103120" y="4187952"/>
+            <a:ext cx="3017520" cy="658368"/>
+          </a:xfrm>
+          <a:prstGeom prst="rect">
+            <a:avLst/>
+          </a:prstGeom>
+          <a:noFill/>
+        </p:spPr>
+        <p:txBody>
+          <a:bodyPr wrap="square" anchor="ctr" lIns="0" rIns="0" tIns="0" bIns="0">
+            <a:spAutoFit/>
+          </a:bodyPr>
+          <a:lstStyle/>
+          <a:p>
+            <a:pPr algn="l">
+              <a:lnSpc>
+                <a:spcPct val="100000"/>
+              </a:lnSpc>
+              <a:spcAft>
+                <a:spcPts val="0"/>
+              </a:spcAft>
+            </a:pPr>
+            <a:r>
+              <a:rPr sz="1050" b="0">
+                <a:solidFill>
+                  <a:srgbClr val="98A2B8"/>
+                </a:solidFill>
+                <a:latin typeface="微软雅黑"/>
+              </a:rPr>
+              <a:t>虚空领主</a:t>
+            </a:r>
+          </a:p>
+        </p:txBody>
+      </p:sp>
+      <p:sp>
+        <p:nvSpPr>
+          <p:cNvPr id="34" name="TextBox 33"/>
+          <p:cNvSpPr txBox="1"/>
+          <p:nvPr/>
+        </p:nvSpPr>
+        <p:spPr>
+          <a:xfrm>
+            <a:off x="5120640" y="4187952"/>
+            <a:ext cx="1554480" cy="658368"/>
+          </a:xfrm>
+          <a:prstGeom prst="rect">
+            <a:avLst/>
+          </a:prstGeom>
+          <a:noFill/>
+        </p:spPr>
+        <p:txBody>
+          <a:bodyPr wrap="square" anchor="ctr" lIns="0" rIns="0" tIns="0" bIns="0">
+            <a:spAutoFit/>
+          </a:bodyPr>
+          <a:lstStyle/>
+          <a:p>
+            <a:pPr algn="l">
+              <a:lnSpc>
+                <a:spcPct val="100000"/>
+              </a:lnSpc>
+              <a:spcAft>
+                <a:spcPts val="0"/>
+              </a:spcAft>
+            </a:pPr>
+            <a:r>
+              <a:rPr sz="1050" b="0">
+                <a:solidFill>
+                  <a:srgbClr val="98A2B8"/>
+                </a:solidFill>
+                <a:latin typeface="微软雅黑"/>
+              </a:rPr>
+              <a:t>200 💎</a:t>
+            </a:r>
+          </a:p>
+        </p:txBody>
+      </p:sp>
+      <p:sp>
+        <p:nvSpPr>
+          <p:cNvPr id="35" name="TextBox 34"/>
+          <p:cNvSpPr txBox="1"/>
+          <p:nvPr/>
+        </p:nvSpPr>
+        <p:spPr>
+          <a:xfrm>
+            <a:off x="6675120" y="4187952"/>
+            <a:ext cx="2286000" cy="658368"/>
+          </a:xfrm>
+          <a:prstGeom prst="rect">
+            <a:avLst/>
+          </a:prstGeom>
+          <a:noFill/>
+        </p:spPr>
+        <p:txBody>
+          <a:bodyPr wrap="square" anchor="ctr" lIns="0" rIns="0" tIns="0" bIns="0">
+            <a:spAutoFit/>
+          </a:bodyPr>
+          <a:lstStyle/>
+          <a:p>
+            <a:pPr algn="l">
+              <a:lnSpc>
+                <a:spcPct val="100000"/>
+              </a:lnSpc>
+              <a:spcAft>
+                <a:spcPts val="0"/>
+              </a:spcAft>
+            </a:pPr>
+            <a:r>
+              <a:rPr sz="1050" b="0">
+                <a:solidFill>
+                  <a:srgbClr val="98A2B8"/>
+                </a:solidFill>
+                <a:latin typeface="微软雅黑"/>
+              </a:rPr>
+              <a:t>全套动效 + 最大视觉半径</a:t>
+            </a:r>
+          </a:p>
+        </p:txBody>
+      </p:sp>
+      <p:sp>
+        <p:nvSpPr>
+          <p:cNvPr id="36" name="TextBox 35"/>
+          <p:cNvSpPr txBox="1"/>
+          <p:nvPr/>
+        </p:nvSpPr>
+        <p:spPr>
+          <a:xfrm>
+            <a:off x="8961120" y="4187952"/>
+            <a:ext cx="2560320" cy="658368"/>
+          </a:xfrm>
+          <a:prstGeom prst="rect">
+            <a:avLst/>
+          </a:prstGeom>
+          <a:noFill/>
+        </p:spPr>
+        <p:txBody>
+          <a:bodyPr wrap="square" anchor="ctr" lIns="0" rIns="0" tIns="0" bIns="0">
+            <a:spAutoFit/>
+          </a:bodyPr>
+          <a:lstStyle/>
+          <a:p>
+            <a:pPr algn="l">
+              <a:lnSpc>
+                <a:spcPct val="100000"/>
+              </a:lnSpc>
+              <a:spcAft>
+                <a:spcPts val="0"/>
+              </a:spcAft>
+            </a:pPr>
+            <a:r>
+              <a:rPr sz="1050" b="0">
+                <a:solidFill>
+                  <a:srgbClr val="98A2B8"/>
+                </a:solidFill>
+                <a:latin typeface="微软雅黑"/>
+              </a:rPr>
+              <a:t>向往型顶点：制造「看到别人拥有」的落差</a:t>
+            </a:r>
+          </a:p>
+        </p:txBody>
+      </p:sp>
+      <p:sp>
+        <p:nvSpPr>
+          <p:cNvPr id="37" name="Rounded Rectangle 36"/>
+          <p:cNvSpPr/>
+          <p:nvPr/>
+        </p:nvSpPr>
+        <p:spPr>
+          <a:xfrm>
+            <a:off x="841248" y="4892040"/>
+            <a:ext cx="10515600" cy="1417320"/>
           </a:xfrm>
           <a:prstGeom prst="roundRect">
             <a:avLst>
@@ -6823,7 +8106,7 @@
           </a:solidFill>
           <a:ln w="9525">
             <a:solidFill>
-              <a:srgbClr val="2A3144"/>
+              <a:srgbClr val="F0C040"/>
             </a:solidFill>
           </a:ln>
           <a:effectLst/>
@@ -6852,14 +8135,14 @@
       </p:sp>
       <p:sp>
         <p:nvSpPr>
-          <p:cNvPr id="7" name="TextBox 6"/>
-          <p:cNvSpPr txBox="1"/>
-          <p:nvPr/>
-        </p:nvSpPr>
-        <p:spPr>
-          <a:xfrm>
-            <a:off x="1115568" y="1920240"/>
-            <a:ext cx="4572000" cy="320040"/>
+          <p:cNvPr id="38" name="TextBox 37"/>
+          <p:cNvSpPr txBox="1"/>
+          <p:nvPr/>
+        </p:nvSpPr>
+        <p:spPr>
+          <a:xfrm>
+            <a:off x="1143000" y="5074920"/>
+            <a:ext cx="9966960" cy="1143000"/>
           </a:xfrm>
           <a:prstGeom prst="rect">
             <a:avLst/>
@@ -6874,631 +8157,77 @@
           <a:p>
             <a:pPr algn="l">
               <a:lnSpc>
-                <a:spcPct val="100000"/>
-              </a:lnSpc>
-              <a:spcAft>
-                <a:spcPts val="0"/>
-              </a:spcAft>
-            </a:pPr>
-            <a:r>
-              <a:rPr sz="1500" b="1">
-                <a:solidFill>
-                  <a:srgbClr val="E8EBF2"/>
-                </a:solidFill>
-                <a:latin typeface="微软雅黑"/>
-              </a:rPr>
-              <a:t>技术实现要点</a:t>
-            </a:r>
-          </a:p>
-        </p:txBody>
-      </p:sp>
-      <p:sp>
-        <p:nvSpPr>
-          <p:cNvPr id="8" name="TextBox 7"/>
-          <p:cNvSpPr txBox="1"/>
-          <p:nvPr/>
-        </p:nvSpPr>
-        <p:spPr>
-          <a:xfrm>
-            <a:off x="1115568" y="2377440"/>
-            <a:ext cx="4572000" cy="3657600"/>
-          </a:xfrm>
-          <a:prstGeom prst="rect">
-            <a:avLst/>
-          </a:prstGeom>
-          <a:noFill/>
-        </p:spPr>
-        <p:txBody>
-          <a:bodyPr wrap="square" anchor="t" lIns="0" rIns="0" tIns="0" bIns="0">
-            <a:spAutoFit/>
-          </a:bodyPr>
-          <a:lstStyle/>
-          <a:p>
-            <a:pPr algn="l">
-              <a:lnSpc>
-                <a:spcPct val="125000"/>
+                <a:spcPct val="130000"/>
               </a:lnSpc>
               <a:spcAft>
                 <a:spcPts val="200"/>
               </a:spcAft>
             </a:pPr>
             <a:r>
-              <a:rPr sz="1200" b="1">
+              <a:rPr sz="1300" b="1">
+                <a:solidFill>
+                  <a:srgbClr val="F0C040"/>
+                </a:solidFill>
+                <a:latin typeface="微软雅黑"/>
+              </a:rPr>
+              <a:t>为什么这样定价</a:t>
+            </a:r>
+          </a:p>
+          <a:p>
+            <a:pPr algn="l">
+              <a:lnSpc>
+                <a:spcPct val="130000"/>
+              </a:lnSpc>
+              <a:spcAft>
+                <a:spcPts val="200"/>
+              </a:spcAft>
+            </a:pPr>
+            <a:r>
+              <a:rPr sz="1150" b="0">
+                <a:solidFill>
+                  <a:srgbClr val="98A2B8"/>
+                </a:solidFill>
+                <a:latin typeface="微软雅黑"/>
+              </a:rPr>
+              <a:t>原方案 50/50/75/100/150 的梯度太平缓，且与视觉质量无关，玩家无法判断「贵在哪」。</a:t>
+            </a:r>
+          </a:p>
+          <a:p>
+            <a:pPr algn="l">
+              <a:lnSpc>
+                <a:spcPct val="130000"/>
+              </a:lnSpc>
+              <a:spcAft>
+                <a:spcPts val="200"/>
+              </a:spcAft>
+            </a:pPr>
+            <a:r>
+              <a:rPr sz="1150" b="0">
+                <a:solidFill>
+                  <a:srgbClr val="98A2B8"/>
+                </a:solidFill>
+                <a:latin typeface="微软雅黑"/>
+              </a:rPr>
+              <a:t>重构后，价格严格对齐动效密度——这让加价变得可解释，也给了玩家升级的理由。</a:t>
+            </a:r>
+          </a:p>
+          <a:p>
+            <a:pPr algn="l">
+              <a:lnSpc>
+                <a:spcPct val="130000"/>
+              </a:lnSpc>
+              <a:spcAft>
+                <a:spcPts val="200"/>
+              </a:spcAft>
+            </a:pPr>
+            <a:r>
+              <a:rPr sz="1150" b="1">
                 <a:solidFill>
                   <a:srgbClr val="FF6B8A"/>
                 </a:solidFill>
                 <a:latin typeface="微软雅黑"/>
               </a:rPr>
-              <a:t>零美术资源</a:t>
-            </a:r>
-          </a:p>
-          <a:p>
-            <a:pPr algn="l">
-              <a:lnSpc>
-                <a:spcPct val="125000"/>
-              </a:lnSpc>
-              <a:spcAft>
-                <a:spcPts val="200"/>
-              </a:spcAft>
-            </a:pPr>
-            <a:r>
-              <a:rPr sz="1100" b="0">
-                <a:solidFill>
-                  <a:srgbClr val="98A2B8"/>
-                </a:solidFill>
-                <a:latin typeface="微软雅黑"/>
-              </a:rPr>
-              <a:t>全部用 Canvas 2D 程序化绘制。项目没有图片资源管线，程序化是唯一可行路径，且天然适配任意分辨率与移动端。</a:t>
-            </a:r>
-          </a:p>
-          <a:p>
-            <a:pPr algn="l">
-              <a:lnSpc>
-                <a:spcPct val="125000"/>
-              </a:lnSpc>
-              <a:spcAft>
-                <a:spcPts val="200"/>
-              </a:spcAft>
-            </a:pPr>
-            <a:r>
-              <a:rPr sz="700" b="0">
-                <a:solidFill>
-                  <a:srgbClr val="98A2B8"/>
-                </a:solidFill>
-                <a:latin typeface="微软雅黑"/>
-              </a:rPr>
-              <a:t/>
-            </a:r>
-          </a:p>
-          <a:p>
-            <a:pPr algn="l">
-              <a:lnSpc>
-                <a:spcPct val="125000"/>
-              </a:lnSpc>
-              <a:spcAft>
-                <a:spcPts val="200"/>
-              </a:spcAft>
-            </a:pPr>
-            <a:r>
-              <a:rPr sz="1200" b="1">
-                <a:solidFill>
-                  <a:srgbClr val="FF6B8A"/>
-                </a:solidFill>
-                <a:latin typeface="微软雅黑"/>
-              </a:rPr>
-              <a:t>渐变对象缓存</a:t>
-            </a:r>
-          </a:p>
-          <a:p>
-            <a:pPr algn="l">
-              <a:lnSpc>
-                <a:spcPct val="125000"/>
-              </a:lnSpc>
-              <a:spcAft>
-                <a:spcPts val="200"/>
-              </a:spcAft>
-            </a:pPr>
-            <a:r>
-              <a:rPr sz="1100" b="0">
-                <a:solidFill>
-                  <a:srgbClr val="98A2B8"/>
-                </a:solidFill>
-                <a:latin typeface="微软雅黑"/>
-              </a:rPr>
-              <a:t>每帧 createRadialGradient 会触发 GC 抖动，改为按皮肤 key 缓存。</a:t>
-            </a:r>
-          </a:p>
-          <a:p>
-            <a:pPr algn="l">
-              <a:lnSpc>
-                <a:spcPct val="125000"/>
-              </a:lnSpc>
-              <a:spcAft>
-                <a:spcPts val="200"/>
-              </a:spcAft>
-            </a:pPr>
-            <a:r>
-              <a:rPr sz="700" b="0">
-                <a:solidFill>
-                  <a:srgbClr val="98A2B8"/>
-                </a:solidFill>
-                <a:latin typeface="微软雅黑"/>
-              </a:rPr>
-              <a:t/>
-            </a:r>
-          </a:p>
-          <a:p>
-            <a:pPr algn="l">
-              <a:lnSpc>
-                <a:spcPct val="125000"/>
-              </a:lnSpc>
-              <a:spcAft>
-                <a:spcPts val="200"/>
-              </a:spcAft>
-            </a:pPr>
-            <a:r>
-              <a:rPr sz="1200" b="1">
-                <a:solidFill>
-                  <a:srgbClr val="FF6B8A"/>
-                </a:solidFill>
-                <a:latin typeface="微软雅黑"/>
-              </a:rPr>
-              <a:t>移动端降级</a:t>
-            </a:r>
-          </a:p>
-          <a:p>
-            <a:pPr algn="l">
-              <a:lnSpc>
-                <a:spcPct val="125000"/>
-              </a:lnSpc>
-              <a:spcAft>
-                <a:spcPts val="200"/>
-              </a:spcAft>
-            </a:pPr>
-            <a:r>
-              <a:rPr sz="1100" b="0">
-                <a:solidFill>
-                  <a:srgbClr val="98A2B8"/>
-                </a:solidFill>
-                <a:latin typeface="微软雅黑"/>
-              </a:rPr>
-              <a:t>小屏自动关闭最贵的 shadowBlur 发光，只保留基础分层。</a:t>
-            </a:r>
-          </a:p>
-          <a:p>
-            <a:pPr algn="l">
-              <a:lnSpc>
-                <a:spcPct val="125000"/>
-              </a:lnSpc>
-              <a:spcAft>
-                <a:spcPts val="200"/>
-              </a:spcAft>
-            </a:pPr>
-            <a:r>
-              <a:rPr sz="700" b="0">
-                <a:solidFill>
-                  <a:srgbClr val="98A2B8"/>
-                </a:solidFill>
-                <a:latin typeface="微软雅黑"/>
-              </a:rPr>
-              <a:t/>
-            </a:r>
-          </a:p>
-          <a:p>
-            <a:pPr algn="l">
-              <a:lnSpc>
-                <a:spcPct val="125000"/>
-              </a:lnSpc>
-              <a:spcAft>
-                <a:spcPts val="200"/>
-              </a:spcAft>
-            </a:pPr>
-            <a:r>
-              <a:rPr sz="1200" b="1">
-                <a:solidFill>
-                  <a:srgbClr val="FF6B8A"/>
-                </a:solidFill>
-                <a:latin typeface="微软雅黑"/>
-              </a:rPr>
-              <a:t>状态不泄漏</a:t>
-            </a:r>
-          </a:p>
-          <a:p>
-            <a:pPr algn="l">
-              <a:lnSpc>
-                <a:spcPct val="125000"/>
-              </a:lnSpc>
-              <a:spcAft>
-                <a:spcPts val="200"/>
-              </a:spcAft>
-            </a:pPr>
-            <a:r>
-              <a:rPr sz="1100" b="0">
-                <a:solidFill>
-                  <a:srgbClr val="98A2B8"/>
-                </a:solidFill>
-                <a:latin typeface="微软雅黑"/>
-              </a:rPr>
-              <a:t>整体 save/restore 包裹，globalCompositeOperation 改后必还原，避免污染后续绘制。</a:t>
-            </a:r>
-          </a:p>
-          <a:p>
-            <a:pPr algn="l">
-              <a:lnSpc>
-                <a:spcPct val="125000"/>
-              </a:lnSpc>
-              <a:spcAft>
-                <a:spcPts val="200"/>
-              </a:spcAft>
-            </a:pPr>
-            <a:r>
-              <a:rPr sz="700" b="0">
-                <a:solidFill>
-                  <a:srgbClr val="98A2B8"/>
-                </a:solidFill>
-                <a:latin typeface="微软雅黑"/>
-              </a:rPr>
-              <a:t/>
-            </a:r>
-          </a:p>
-          <a:p>
-            <a:pPr algn="l">
-              <a:lnSpc>
-                <a:spcPct val="125000"/>
-              </a:lnSpc>
-              <a:spcAft>
-                <a:spcPts val="200"/>
-              </a:spcAft>
-            </a:pPr>
-            <a:r>
-              <a:rPr sz="1200" b="1">
-                <a:solidFill>
-                  <a:srgbClr val="FF6B8A"/>
-                </a:solidFill>
-                <a:latin typeface="微软雅黑"/>
-              </a:rPr>
-              <a:t>可读性底衬</a:t>
-            </a:r>
-          </a:p>
-          <a:p>
-            <a:pPr algn="l">
-              <a:lnSpc>
-                <a:spcPct val="125000"/>
-              </a:lnSpc>
-              <a:spcAft>
-                <a:spcPts val="200"/>
-              </a:spcAft>
-            </a:pPr>
-            <a:r>
-              <a:rPr sz="1100" b="0">
-                <a:solidFill>
-                  <a:srgbClr val="98A2B8"/>
-                </a:solidFill>
-                <a:latin typeface="微软雅黑"/>
-              </a:rPr>
-              <a:t>皮肤下层加半透明深色垫底，解决「敌人围攻时玩家被淹没」。</a:t>
-            </a:r>
-          </a:p>
-        </p:txBody>
-      </p:sp>
-      <p:sp>
-        <p:nvSpPr>
-          <p:cNvPr id="9" name="Rounded Rectangle 8"/>
-          <p:cNvSpPr/>
-          <p:nvPr/>
-        </p:nvSpPr>
-        <p:spPr>
-          <a:xfrm>
-            <a:off x="6236208" y="1737360"/>
-            <a:ext cx="5120640" cy="4480560"/>
-          </a:xfrm>
-          <a:prstGeom prst="roundRect">
-            <a:avLst>
-              <a:gd name="adj" fmla="val 5000"/>
-            </a:avLst>
-          </a:prstGeom>
-          <a:solidFill>
-            <a:srgbClr val="161A26"/>
-          </a:solidFill>
-          <a:ln w="9525">
-            <a:solidFill>
-              <a:srgbClr val="34D399"/>
-            </a:solidFill>
-          </a:ln>
-          <a:effectLst/>
-        </p:spPr>
-        <p:style>
-          <a:lnRef idx="1">
-            <a:schemeClr val="accent1"/>
-          </a:lnRef>
-          <a:fillRef idx="3">
-            <a:schemeClr val="accent1"/>
-          </a:fillRef>
-          <a:effectRef idx="2">
-            <a:schemeClr val="accent1"/>
-          </a:effectRef>
-          <a:fontRef idx="minor">
-            <a:schemeClr val="lt1"/>
-          </a:fontRef>
-        </p:style>
-        <p:txBody>
-          <a:bodyPr rtlCol="0" anchor="ctr"/>
-          <a:lstStyle/>
-          <a:p>
-            <a:pPr algn="ctr"/>
-          </a:p>
-        </p:txBody>
-      </p:sp>
-      <p:sp>
-        <p:nvSpPr>
-          <p:cNvPr id="10" name="TextBox 9"/>
-          <p:cNvSpPr txBox="1"/>
-          <p:nvPr/>
-        </p:nvSpPr>
-        <p:spPr>
-          <a:xfrm>
-            <a:off x="6510528" y="1920240"/>
-            <a:ext cx="4572000" cy="320040"/>
-          </a:xfrm>
-          <a:prstGeom prst="rect">
-            <a:avLst/>
-          </a:prstGeom>
-          <a:noFill/>
-        </p:spPr>
-        <p:txBody>
-          <a:bodyPr wrap="square" anchor="t" lIns="0" rIns="0" tIns="0" bIns="0">
-            <a:spAutoFit/>
-          </a:bodyPr>
-          <a:lstStyle/>
-          <a:p>
-            <a:pPr algn="l">
-              <a:lnSpc>
-                <a:spcPct val="100000"/>
-              </a:lnSpc>
-              <a:spcAft>
-                <a:spcPts val="0"/>
-              </a:spcAft>
-            </a:pPr>
-            <a:r>
-              <a:rPr sz="1500" b="1">
-                <a:solidFill>
-                  <a:srgbClr val="34D399"/>
-                </a:solidFill>
-                <a:latin typeface="微软雅黑"/>
-              </a:rPr>
-              <a:t>实机验证结果</a:t>
-            </a:r>
-          </a:p>
-        </p:txBody>
-      </p:sp>
-      <p:sp>
-        <p:nvSpPr>
-          <p:cNvPr id="11" name="TextBox 10"/>
-          <p:cNvSpPr txBox="1"/>
-          <p:nvPr/>
-        </p:nvSpPr>
-        <p:spPr>
-          <a:xfrm>
-            <a:off x="6510528" y="2377440"/>
-            <a:ext cx="4572000" cy="3657600"/>
-          </a:xfrm>
-          <a:prstGeom prst="rect">
-            <a:avLst/>
-          </a:prstGeom>
-          <a:noFill/>
-        </p:spPr>
-        <p:txBody>
-          <a:bodyPr wrap="square" anchor="t" lIns="0" rIns="0" tIns="0" bIns="0">
-            <a:spAutoFit/>
-          </a:bodyPr>
-          <a:lstStyle/>
-          <a:p>
-            <a:pPr algn="l">
-              <a:lnSpc>
-                <a:spcPct val="125000"/>
-              </a:lnSpc>
-              <a:spcAft>
-                <a:spcPts val="200"/>
-              </a:spcAft>
-            </a:pPr>
-            <a:r>
-              <a:rPr sz="1200" b="1">
-                <a:solidFill>
-                  <a:srgbClr val="34D399"/>
-                </a:solidFill>
-                <a:latin typeface="微软雅黑"/>
-              </a:rPr>
-              <a:t>六套皮肤全部渲染正确</a:t>
-            </a:r>
-          </a:p>
-          <a:p>
-            <a:pPr algn="l">
-              <a:lnSpc>
-                <a:spcPct val="125000"/>
-              </a:lnSpc>
-              <a:spcAft>
-                <a:spcPts val="200"/>
-              </a:spcAft>
-            </a:pPr>
-            <a:r>
-              <a:rPr sz="1100" b="0">
-                <a:solidFill>
-                  <a:srgbClr val="98A2B8"/>
-                </a:solidFill>
-                <a:latin typeface="微软雅黑"/>
-              </a:rPr>
-              <a:t>逐一读取玩家中心像素验证，中心色分别为蓝/橙/紫/绿/金/紫罗兰，与设计一致，无一套渲染空白。</a:t>
-            </a:r>
-          </a:p>
-          <a:p>
-            <a:pPr algn="l">
-              <a:lnSpc>
-                <a:spcPct val="125000"/>
-              </a:lnSpc>
-              <a:spcAft>
-                <a:spcPts val="200"/>
-              </a:spcAft>
-            </a:pPr>
-            <a:r>
-              <a:rPr sz="700" b="0">
-                <a:solidFill>
-                  <a:srgbClr val="98A2B8"/>
-                </a:solidFill>
-                <a:latin typeface="微软雅黑"/>
-              </a:rPr>
-              <a:t/>
-            </a:r>
-          </a:p>
-          <a:p>
-            <a:pPr algn="l">
-              <a:lnSpc>
-                <a:spcPct val="125000"/>
-              </a:lnSpc>
-              <a:spcAft>
-                <a:spcPts val="200"/>
-              </a:spcAft>
-            </a:pPr>
-            <a:r>
-              <a:rPr sz="1200" b="1">
-                <a:solidFill>
-                  <a:srgbClr val="34D399"/>
-                </a:solidFill>
-                <a:latin typeface="微软雅黑"/>
-              </a:rPr>
-              <a:t>可读性修复生效</a:t>
-            </a:r>
-          </a:p>
-          <a:p>
-            <a:pPr algn="l">
-              <a:lnSpc>
-                <a:spcPct val="125000"/>
-              </a:lnSpc>
-              <a:spcAft>
-                <a:spcPts val="200"/>
-              </a:spcAft>
-            </a:pPr>
-            <a:r>
-              <a:rPr sz="1100" b="0">
-                <a:solidFill>
-                  <a:srgbClr val="98A2B8"/>
-                </a:solidFill>
-                <a:latin typeface="微软雅黑"/>
-              </a:rPr>
-              <a:t>引入底衬后，敌人贴身围攻时玩家中心区域的敌方红色像素由「淹没」降至 0。</a:t>
-            </a:r>
-          </a:p>
-          <a:p>
-            <a:pPr algn="l">
-              <a:lnSpc>
-                <a:spcPct val="125000"/>
-              </a:lnSpc>
-              <a:spcAft>
-                <a:spcPts val="200"/>
-              </a:spcAft>
-            </a:pPr>
-            <a:r>
-              <a:rPr sz="700" b="0">
-                <a:solidFill>
-                  <a:srgbClr val="98A2B8"/>
-                </a:solidFill>
-                <a:latin typeface="微软雅黑"/>
-              </a:rPr>
-              <a:t/>
-            </a:r>
-          </a:p>
-          <a:p>
-            <a:pPr algn="l">
-              <a:lnSpc>
-                <a:spcPct val="125000"/>
-              </a:lnSpc>
-              <a:spcAft>
-                <a:spcPts val="200"/>
-              </a:spcAft>
-            </a:pPr>
-            <a:r>
-              <a:rPr sz="1200" b="1">
-                <a:solidFill>
-                  <a:srgbClr val="34D399"/>
-                </a:solidFill>
-                <a:latin typeface="微软雅黑"/>
-              </a:rPr>
-              <a:t>帧率达标</a:t>
-            </a:r>
-          </a:p>
-          <a:p>
-            <a:pPr algn="l">
-              <a:lnSpc>
-                <a:spcPct val="125000"/>
-              </a:lnSpc>
-              <a:spcAft>
-                <a:spcPts val="200"/>
-              </a:spcAft>
-            </a:pPr>
-            <a:r>
-              <a:rPr sz="1100" b="0">
-                <a:solidFill>
-                  <a:srgbClr val="98A2B8"/>
-                </a:solidFill>
-                <a:latin typeface="微软雅黑"/>
-              </a:rPr>
-              <a:t>最重的「虚空领主」在无头浏览器纯 CPU 渲染下实测 58–60 FPS，真机 GPU 更宽裕。</a:t>
-            </a:r>
-          </a:p>
-          <a:p>
-            <a:pPr algn="l">
-              <a:lnSpc>
-                <a:spcPct val="125000"/>
-              </a:lnSpc>
-              <a:spcAft>
-                <a:spcPts val="200"/>
-              </a:spcAft>
-            </a:pPr>
-            <a:r>
-              <a:rPr sz="700" b="0">
-                <a:solidFill>
-                  <a:srgbClr val="98A2B8"/>
-                </a:solidFill>
-                <a:latin typeface="微软雅黑"/>
-              </a:rPr>
-              <a:t/>
-            </a:r>
-          </a:p>
-          <a:p>
-            <a:pPr algn="l">
-              <a:lnSpc>
-                <a:spcPct val="125000"/>
-              </a:lnSpc>
-              <a:spcAft>
-                <a:spcPts val="200"/>
-              </a:spcAft>
-            </a:pPr>
-            <a:r>
-              <a:rPr sz="1200" b="1">
-                <a:solidFill>
-                  <a:srgbClr val="34D399"/>
-                </a:solidFill>
-                <a:latin typeface="微软雅黑"/>
-              </a:rPr>
-              <a:t>旧存档兼容</a:t>
-            </a:r>
-          </a:p>
-          <a:p>
-            <a:pPr algn="l">
-              <a:lnSpc>
-                <a:spcPct val="125000"/>
-              </a:lnSpc>
-              <a:spcAft>
-                <a:spcPts val="200"/>
-              </a:spcAft>
-            </a:pPr>
-            <a:r>
-              <a:rPr sz="1100" b="0">
-                <a:solidFill>
-                  <a:srgbClr val="98A2B8"/>
-                </a:solidFill>
-                <a:latin typeface="微软雅黑"/>
-              </a:rPr>
-              <a:t>增加字段回填逻辑，老玩家的皮肤存档不会因数据结构升级而失效。</a:t>
+              <a:t>→ 这既是定价策略，也是定价诚信：如果高稀有皮肤和低稀有在体验上没区别，高价就是在收智商税，短期能赚、长期摧毁信任。</a:t>
             </a:r>
           </a:p>
         </p:txBody>
@@ -7646,7 +8375,7 @@
                 </a:solidFill>
                 <a:latin typeface="微软雅黑"/>
               </a:rPr>
-              <a:t>05 / 我的观点 · 观点一</a:t>
+              <a:t>04 / 商业化落地</a:t>
             </a:r>
           </a:p>
         </p:txBody>
@@ -7688,67 +8417,25 @@
                 </a:solidFill>
                 <a:latin typeface="微软雅黑"/>
               </a:rPr>
-              <a:t>我的观点</a:t>
-            </a:r>
-          </a:p>
-        </p:txBody>
-      </p:sp>
-      <p:sp>
-        <p:nvSpPr>
-          <p:cNvPr id="6" name="TextBox 5"/>
-          <p:cNvSpPr txBox="1"/>
-          <p:nvPr/>
-        </p:nvSpPr>
-        <p:spPr>
-          <a:xfrm>
-            <a:off x="841248" y="1243584"/>
-            <a:ext cx="10607040" cy="457200"/>
-          </a:xfrm>
-          <a:prstGeom prst="rect">
-            <a:avLst/>
-          </a:prstGeom>
-          <a:noFill/>
-        </p:spPr>
-        <p:txBody>
-          <a:bodyPr wrap="square" anchor="t" lIns="0" rIns="0" tIns="0" bIns="0">
-            <a:spAutoFit/>
-          </a:bodyPr>
-          <a:lstStyle/>
-          <a:p>
-            <a:pPr algn="l">
-              <a:lnSpc>
-                <a:spcPct val="122000"/>
-              </a:lnSpc>
-              <a:spcAft>
-                <a:spcPts val="0"/>
-              </a:spcAft>
-            </a:pPr>
-            <a:r>
-              <a:rPr sz="1250" b="0">
-                <a:solidFill>
-                  <a:srgbClr val="98A2B8"/>
-                </a:solidFill>
-                <a:latin typeface="微软雅黑"/>
-              </a:rPr>
-              <a:t>什么样的皮肤设计能吸引用户、增加粘性</a:t>
-            </a:r>
-          </a:p>
-        </p:txBody>
-      </p:sp>
-      <p:sp>
-        <p:nvSpPr>
-          <p:cNvPr id="7" name="Rounded Rectangle 6"/>
+              <a:t>技术实现与实机验证</a:t>
+            </a:r>
+          </a:p>
+        </p:txBody>
+      </p:sp>
+      <p:sp>
+        <p:nvSpPr>
+          <p:cNvPr id="6" name="Rounded Rectangle 5"/>
           <p:cNvSpPr/>
           <p:nvPr/>
         </p:nvSpPr>
         <p:spPr>
           <a:xfrm>
-            <a:off x="841248" y="1783080"/>
-            <a:ext cx="10515600" cy="4434840"/>
+            <a:off x="841248" y="1737360"/>
+            <a:ext cx="5120640" cy="4480560"/>
           </a:xfrm>
           <a:prstGeom prst="roundRect">
             <a:avLst>
-              <a:gd name="adj" fmla="val 4000"/>
+              <a:gd name="adj" fmla="val 5000"/>
             </a:avLst>
           </a:prstGeom>
           <a:solidFill>
@@ -7785,23 +8472,358 @@
       </p:sp>
       <p:sp>
         <p:nvSpPr>
-          <p:cNvPr id="8" name="Rectangle 7"/>
+          <p:cNvPr id="7" name="TextBox 6"/>
+          <p:cNvSpPr txBox="1"/>
+          <p:nvPr/>
+        </p:nvSpPr>
+        <p:spPr>
+          <a:xfrm>
+            <a:off x="1115568" y="1920240"/>
+            <a:ext cx="4572000" cy="320040"/>
+          </a:xfrm>
+          <a:prstGeom prst="rect">
+            <a:avLst/>
+          </a:prstGeom>
+          <a:noFill/>
+        </p:spPr>
+        <p:txBody>
+          <a:bodyPr wrap="square" anchor="t" lIns="0" rIns="0" tIns="0" bIns="0">
+            <a:spAutoFit/>
+          </a:bodyPr>
+          <a:lstStyle/>
+          <a:p>
+            <a:pPr algn="l">
+              <a:lnSpc>
+                <a:spcPct val="100000"/>
+              </a:lnSpc>
+              <a:spcAft>
+                <a:spcPts val="0"/>
+              </a:spcAft>
+            </a:pPr>
+            <a:r>
+              <a:rPr sz="1500" b="1">
+                <a:solidFill>
+                  <a:srgbClr val="E8EBF2"/>
+                </a:solidFill>
+                <a:latin typeface="微软雅黑"/>
+              </a:rPr>
+              <a:t>技术实现要点</a:t>
+            </a:r>
+          </a:p>
+        </p:txBody>
+      </p:sp>
+      <p:sp>
+        <p:nvSpPr>
+          <p:cNvPr id="8" name="TextBox 7"/>
+          <p:cNvSpPr txBox="1"/>
+          <p:nvPr/>
+        </p:nvSpPr>
+        <p:spPr>
+          <a:xfrm>
+            <a:off x="1115568" y="2377440"/>
+            <a:ext cx="4572000" cy="3657600"/>
+          </a:xfrm>
+          <a:prstGeom prst="rect">
+            <a:avLst/>
+          </a:prstGeom>
+          <a:noFill/>
+        </p:spPr>
+        <p:txBody>
+          <a:bodyPr wrap="square" anchor="t" lIns="0" rIns="0" tIns="0" bIns="0">
+            <a:spAutoFit/>
+          </a:bodyPr>
+          <a:lstStyle/>
+          <a:p>
+            <a:pPr algn="l">
+              <a:lnSpc>
+                <a:spcPct val="125000"/>
+              </a:lnSpc>
+              <a:spcAft>
+                <a:spcPts val="200"/>
+              </a:spcAft>
+            </a:pPr>
+            <a:r>
+              <a:rPr sz="1200" b="1">
+                <a:solidFill>
+                  <a:srgbClr val="FF6B8A"/>
+                </a:solidFill>
+                <a:latin typeface="微软雅黑"/>
+              </a:rPr>
+              <a:t>零美术资源</a:t>
+            </a:r>
+          </a:p>
+          <a:p>
+            <a:pPr algn="l">
+              <a:lnSpc>
+                <a:spcPct val="125000"/>
+              </a:lnSpc>
+              <a:spcAft>
+                <a:spcPts val="200"/>
+              </a:spcAft>
+            </a:pPr>
+            <a:r>
+              <a:rPr sz="1100" b="0">
+                <a:solidFill>
+                  <a:srgbClr val="98A2B8"/>
+                </a:solidFill>
+                <a:latin typeface="微软雅黑"/>
+              </a:rPr>
+              <a:t>全部用 Canvas 2D 程序化绘制。项目没有图片资源管线，程序化是唯一可行路径，且天然适配任意分辨率与移动端。</a:t>
+            </a:r>
+          </a:p>
+          <a:p>
+            <a:pPr algn="l">
+              <a:lnSpc>
+                <a:spcPct val="125000"/>
+              </a:lnSpc>
+              <a:spcAft>
+                <a:spcPts val="200"/>
+              </a:spcAft>
+            </a:pPr>
+            <a:r>
+              <a:rPr sz="700" b="0">
+                <a:solidFill>
+                  <a:srgbClr val="98A2B8"/>
+                </a:solidFill>
+                <a:latin typeface="微软雅黑"/>
+              </a:rPr>
+              <a:t/>
+            </a:r>
+          </a:p>
+          <a:p>
+            <a:pPr algn="l">
+              <a:lnSpc>
+                <a:spcPct val="125000"/>
+              </a:lnSpc>
+              <a:spcAft>
+                <a:spcPts val="200"/>
+              </a:spcAft>
+            </a:pPr>
+            <a:r>
+              <a:rPr sz="1200" b="1">
+                <a:solidFill>
+                  <a:srgbClr val="FF6B8A"/>
+                </a:solidFill>
+                <a:latin typeface="微软雅黑"/>
+              </a:rPr>
+              <a:t>渐变对象缓存</a:t>
+            </a:r>
+          </a:p>
+          <a:p>
+            <a:pPr algn="l">
+              <a:lnSpc>
+                <a:spcPct val="125000"/>
+              </a:lnSpc>
+              <a:spcAft>
+                <a:spcPts val="200"/>
+              </a:spcAft>
+            </a:pPr>
+            <a:r>
+              <a:rPr sz="1100" b="0">
+                <a:solidFill>
+                  <a:srgbClr val="98A2B8"/>
+                </a:solidFill>
+                <a:latin typeface="微软雅黑"/>
+              </a:rPr>
+              <a:t>每帧 createRadialGradient 会触发 GC 抖动，改为按皮肤 key 缓存。</a:t>
+            </a:r>
+          </a:p>
+          <a:p>
+            <a:pPr algn="l">
+              <a:lnSpc>
+                <a:spcPct val="125000"/>
+              </a:lnSpc>
+              <a:spcAft>
+                <a:spcPts val="200"/>
+              </a:spcAft>
+            </a:pPr>
+            <a:r>
+              <a:rPr sz="700" b="0">
+                <a:solidFill>
+                  <a:srgbClr val="98A2B8"/>
+                </a:solidFill>
+                <a:latin typeface="微软雅黑"/>
+              </a:rPr>
+              <a:t/>
+            </a:r>
+          </a:p>
+          <a:p>
+            <a:pPr algn="l">
+              <a:lnSpc>
+                <a:spcPct val="125000"/>
+              </a:lnSpc>
+              <a:spcAft>
+                <a:spcPts val="200"/>
+              </a:spcAft>
+            </a:pPr>
+            <a:r>
+              <a:rPr sz="1200" b="1">
+                <a:solidFill>
+                  <a:srgbClr val="FF6B8A"/>
+                </a:solidFill>
+                <a:latin typeface="微软雅黑"/>
+              </a:rPr>
+              <a:t>移动端降级</a:t>
+            </a:r>
+          </a:p>
+          <a:p>
+            <a:pPr algn="l">
+              <a:lnSpc>
+                <a:spcPct val="125000"/>
+              </a:lnSpc>
+              <a:spcAft>
+                <a:spcPts val="200"/>
+              </a:spcAft>
+            </a:pPr>
+            <a:r>
+              <a:rPr sz="1100" b="0">
+                <a:solidFill>
+                  <a:srgbClr val="98A2B8"/>
+                </a:solidFill>
+                <a:latin typeface="微软雅黑"/>
+              </a:rPr>
+              <a:t>小屏自动关闭最贵的 shadowBlur 发光，只保留基础分层。</a:t>
+            </a:r>
+          </a:p>
+          <a:p>
+            <a:pPr algn="l">
+              <a:lnSpc>
+                <a:spcPct val="125000"/>
+              </a:lnSpc>
+              <a:spcAft>
+                <a:spcPts val="200"/>
+              </a:spcAft>
+            </a:pPr>
+            <a:r>
+              <a:rPr sz="700" b="0">
+                <a:solidFill>
+                  <a:srgbClr val="98A2B8"/>
+                </a:solidFill>
+                <a:latin typeface="微软雅黑"/>
+              </a:rPr>
+              <a:t/>
+            </a:r>
+          </a:p>
+          <a:p>
+            <a:pPr algn="l">
+              <a:lnSpc>
+                <a:spcPct val="125000"/>
+              </a:lnSpc>
+              <a:spcAft>
+                <a:spcPts val="200"/>
+              </a:spcAft>
+            </a:pPr>
+            <a:r>
+              <a:rPr sz="1200" b="1">
+                <a:solidFill>
+                  <a:srgbClr val="FF6B8A"/>
+                </a:solidFill>
+                <a:latin typeface="微软雅黑"/>
+              </a:rPr>
+              <a:t>状态不泄漏</a:t>
+            </a:r>
+          </a:p>
+          <a:p>
+            <a:pPr algn="l">
+              <a:lnSpc>
+                <a:spcPct val="125000"/>
+              </a:lnSpc>
+              <a:spcAft>
+                <a:spcPts val="200"/>
+              </a:spcAft>
+            </a:pPr>
+            <a:r>
+              <a:rPr sz="1100" b="0">
+                <a:solidFill>
+                  <a:srgbClr val="98A2B8"/>
+                </a:solidFill>
+                <a:latin typeface="微软雅黑"/>
+              </a:rPr>
+              <a:t>整体 save/restore 包裹，globalCompositeOperation 改后必还原，避免污染后续绘制。</a:t>
+            </a:r>
+          </a:p>
+          <a:p>
+            <a:pPr algn="l">
+              <a:lnSpc>
+                <a:spcPct val="125000"/>
+              </a:lnSpc>
+              <a:spcAft>
+                <a:spcPts val="200"/>
+              </a:spcAft>
+            </a:pPr>
+            <a:r>
+              <a:rPr sz="700" b="0">
+                <a:solidFill>
+                  <a:srgbClr val="98A2B8"/>
+                </a:solidFill>
+                <a:latin typeface="微软雅黑"/>
+              </a:rPr>
+              <a:t/>
+            </a:r>
+          </a:p>
+          <a:p>
+            <a:pPr algn="l">
+              <a:lnSpc>
+                <a:spcPct val="125000"/>
+              </a:lnSpc>
+              <a:spcAft>
+                <a:spcPts val="200"/>
+              </a:spcAft>
+            </a:pPr>
+            <a:r>
+              <a:rPr sz="1200" b="1">
+                <a:solidFill>
+                  <a:srgbClr val="FF6B8A"/>
+                </a:solidFill>
+                <a:latin typeface="微软雅黑"/>
+              </a:rPr>
+              <a:t>可读性底衬</a:t>
+            </a:r>
+          </a:p>
+          <a:p>
+            <a:pPr algn="l">
+              <a:lnSpc>
+                <a:spcPct val="125000"/>
+              </a:lnSpc>
+              <a:spcAft>
+                <a:spcPts val="200"/>
+              </a:spcAft>
+            </a:pPr>
+            <a:r>
+              <a:rPr sz="1100" b="0">
+                <a:solidFill>
+                  <a:srgbClr val="98A2B8"/>
+                </a:solidFill>
+                <a:latin typeface="微软雅黑"/>
+              </a:rPr>
+              <a:t>皮肤下层加半透明深色垫底，解决「敌人围攻时玩家被淹没」。</a:t>
+            </a:r>
+          </a:p>
+        </p:txBody>
+      </p:sp>
+      <p:sp>
+        <p:nvSpPr>
+          <p:cNvPr id="9" name="Rounded Rectangle 8"/>
           <p:cNvSpPr/>
           <p:nvPr/>
         </p:nvSpPr>
         <p:spPr>
           <a:xfrm>
-            <a:off x="841248" y="1783080"/>
-            <a:ext cx="45720" cy="4434840"/>
-          </a:xfrm>
-          <a:prstGeom prst="rect">
-            <a:avLst/>
+            <a:off x="6236208" y="1737360"/>
+            <a:ext cx="5120640" cy="4480560"/>
+          </a:xfrm>
+          <a:prstGeom prst="roundRect">
+            <a:avLst>
+              <a:gd name="adj" fmla="val 5000"/>
+            </a:avLst>
           </a:prstGeom>
           <a:solidFill>
-            <a:srgbClr val="E94560"/>
+            <a:srgbClr val="161A26"/>
           </a:solidFill>
-          <a:ln>
-            <a:noFill/>
+          <a:ln w="9525">
+            <a:solidFill>
+              <a:srgbClr val="34D399"/>
+            </a:solidFill>
           </a:ln>
           <a:effectLst/>
         </p:spPr>
@@ -7829,14 +8851,14 @@
       </p:sp>
       <p:sp>
         <p:nvSpPr>
-          <p:cNvPr id="9" name="TextBox 8"/>
-          <p:cNvSpPr txBox="1"/>
-          <p:nvPr/>
-        </p:nvSpPr>
-        <p:spPr>
-          <a:xfrm>
-            <a:off x="1234440" y="1965960"/>
-            <a:ext cx="9784080" cy="320040"/>
+          <p:cNvPr id="10" name="TextBox 9"/>
+          <p:cNvSpPr txBox="1"/>
+          <p:nvPr/>
+        </p:nvSpPr>
+        <p:spPr>
+          <a:xfrm>
+            <a:off x="6510528" y="1920240"/>
+            <a:ext cx="4572000" cy="320040"/>
           </a:xfrm>
           <a:prstGeom prst="rect">
             <a:avLst/>
@@ -7858,27 +8880,27 @@
               </a:spcAft>
             </a:pPr>
             <a:r>
-              <a:rPr sz="1250" b="1">
-                <a:solidFill>
-                  <a:srgbClr val="FF6B8A"/>
-                </a:solidFill>
-                <a:latin typeface="微软雅黑"/>
-              </a:rPr>
-              <a:t>皮肤卖的不是美术，是「可被看见的自我」</a:t>
-            </a:r>
-          </a:p>
-        </p:txBody>
-      </p:sp>
-      <p:sp>
-        <p:nvSpPr>
-          <p:cNvPr id="10" name="TextBox 9"/>
-          <p:cNvSpPr txBox="1"/>
-          <p:nvPr/>
-        </p:nvSpPr>
-        <p:spPr>
-          <a:xfrm>
-            <a:off x="1234440" y="2331720"/>
-            <a:ext cx="9784080" cy="457200"/>
+              <a:rPr sz="1500" b="1">
+                <a:solidFill>
+                  <a:srgbClr val="34D399"/>
+                </a:solidFill>
+                <a:latin typeface="微软雅黑"/>
+              </a:rPr>
+              <a:t>实机验证结果</a:t>
+            </a:r>
+          </a:p>
+        </p:txBody>
+      </p:sp>
+      <p:sp>
+        <p:nvSpPr>
+          <p:cNvPr id="11" name="TextBox 10"/>
+          <p:cNvSpPr txBox="1"/>
+          <p:nvPr/>
+        </p:nvSpPr>
+        <p:spPr>
+          <a:xfrm>
+            <a:off x="6510528" y="2377440"/>
+            <a:ext cx="4572000" cy="3657600"/>
           </a:xfrm>
           <a:prstGeom prst="rect">
             <a:avLst/>
@@ -7893,94 +8915,52 @@
           <a:p>
             <a:pPr algn="l">
               <a:lnSpc>
-                <a:spcPct val="100000"/>
-              </a:lnSpc>
-              <a:spcAft>
-                <a:spcPts val="0"/>
-              </a:spcAft>
-            </a:pPr>
-            <a:r>
-              <a:rPr sz="2200" b="1">
-                <a:solidFill>
-                  <a:srgbClr val="E8EBF2"/>
-                </a:solidFill>
-                <a:latin typeface="微软雅黑"/>
-              </a:rPr>
-              <a:t>可见性决定价值，而不是精细度</a:t>
-            </a:r>
-          </a:p>
-        </p:txBody>
-      </p:sp>
-      <p:sp>
-        <p:nvSpPr>
-          <p:cNvPr id="11" name="TextBox 10"/>
-          <p:cNvSpPr txBox="1"/>
-          <p:nvPr/>
-        </p:nvSpPr>
-        <p:spPr>
-          <a:xfrm>
-            <a:off x="1234440" y="2926080"/>
-            <a:ext cx="9784080" cy="3108960"/>
-          </a:xfrm>
-          <a:prstGeom prst="rect">
-            <a:avLst/>
-          </a:prstGeom>
-          <a:noFill/>
-        </p:spPr>
-        <p:txBody>
-          <a:bodyPr wrap="square" anchor="t" lIns="0" rIns="0" tIns="0" bIns="0">
-            <a:spAutoFit/>
-          </a:bodyPr>
-          <a:lstStyle/>
-          <a:p>
-            <a:pPr algn="l">
-              <a:lnSpc>
-                <a:spcPct val="133000"/>
-              </a:lnSpc>
-              <a:spcAft>
-                <a:spcPts val="400"/>
+                <a:spcPct val="125000"/>
+              </a:lnSpc>
+              <a:spcAft>
+                <a:spcPts val="200"/>
               </a:spcAft>
             </a:pPr>
             <a:r>
               <a:rPr sz="1200" b="1">
                 <a:solidFill>
-                  <a:srgbClr val="60A5FA"/>
-                </a:solidFill>
-                <a:latin typeface="微软雅黑"/>
-              </a:rPr>
-              <a:t>论据</a:t>
-            </a:r>
-          </a:p>
-          <a:p>
-            <a:pPr algn="l">
-              <a:lnSpc>
-                <a:spcPct val="133000"/>
-              </a:lnSpc>
-              <a:spcAft>
-                <a:spcPts val="400"/>
-              </a:spcAft>
-            </a:pPr>
-            <a:r>
-              <a:rPr sz="1200" b="0">
+                  <a:srgbClr val="34D399"/>
+                </a:solidFill>
+                <a:latin typeface="微软雅黑"/>
+              </a:rPr>
+              <a:t>六套皮肤全部渲染正确</a:t>
+            </a:r>
+          </a:p>
+          <a:p>
+            <a:pPr algn="l">
+              <a:lnSpc>
+                <a:spcPct val="125000"/>
+              </a:lnSpc>
+              <a:spcAft>
+                <a:spcPts val="200"/>
+              </a:spcAft>
+            </a:pPr>
+            <a:r>
+              <a:rPr sz="1100" b="0">
                 <a:solidFill>
                   <a:srgbClr val="98A2B8"/>
                 </a:solidFill>
                 <a:latin typeface="微软雅黑"/>
               </a:rPr>
-              <a:t>CS2 的 AWP | Dragon Lore 能拍到数万美元，不是因为它画得比别的枪细致十倍，而是因为它稀有、可交易、且能被别人看到。VALORANT 把最贵的皮肤做了「击杀横幅」——因为击杀瞬间是全场注意力最集中的时刻，是炫耀半径最大的设计点位。</a:t>
-            </a:r>
-          </a:p>
-          <a:p>
-            <a:pPr algn="l">
-              <a:lnSpc>
-                <a:spcPct val="133000"/>
-              </a:lnSpc>
-              <a:spcAft>
-                <a:spcPts val="400"/>
-              </a:spcAft>
-            </a:pPr>
-            <a:r>
-              <a:rPr sz="900" b="0">
+              <a:t>逐一读取玩家中心像素验证，中心色分别为蓝/橙/紫/绿/金/紫罗兰，与设计一致，无一套渲染空白。</a:t>
+            </a:r>
+          </a:p>
+          <a:p>
+            <a:pPr algn="l">
+              <a:lnSpc>
+                <a:spcPct val="125000"/>
+              </a:lnSpc>
+              <a:spcAft>
+                <a:spcPts val="200"/>
+              </a:spcAft>
+            </a:pPr>
+            <a:r>
+              <a:rPr sz="700" b="0">
                 <a:solidFill>
                   <a:srgbClr val="98A2B8"/>
                 </a:solidFill>
@@ -7992,52 +8972,52 @@
           <a:p>
             <a:pPr algn="l">
               <a:lnSpc>
-                <a:spcPct val="133000"/>
-              </a:lnSpc>
-              <a:spcAft>
-                <a:spcPts val="400"/>
+                <a:spcPct val="125000"/>
+              </a:lnSpc>
+              <a:spcAft>
+                <a:spcPts val="200"/>
               </a:spcAft>
             </a:pPr>
             <a:r>
               <a:rPr sz="1200" b="1">
                 <a:solidFill>
-                  <a:srgbClr val="60A5FA"/>
-                </a:solidFill>
-                <a:latin typeface="微软雅黑"/>
-              </a:rPr>
-              <a:t>推论</a:t>
-            </a:r>
-          </a:p>
-          <a:p>
-            <a:pPr algn="l">
-              <a:lnSpc>
-                <a:spcPct val="133000"/>
-              </a:lnSpc>
-              <a:spcAft>
-                <a:spcPts val="400"/>
-              </a:spcAft>
-            </a:pPr>
-            <a:r>
-              <a:rPr sz="1200" b="0">
+                  <a:srgbClr val="34D399"/>
+                </a:solidFill>
+                <a:latin typeface="微软雅黑"/>
+              </a:rPr>
+              <a:t>可读性修复生效</a:t>
+            </a:r>
+          </a:p>
+          <a:p>
+            <a:pPr algn="l">
+              <a:lnSpc>
+                <a:spcPct val="125000"/>
+              </a:lnSpc>
+              <a:spcAft>
+                <a:spcPts val="200"/>
+              </a:spcAft>
+            </a:pPr>
+            <a:r>
+              <a:rPr sz="1100" b="0">
                 <a:solidFill>
                   <a:srgbClr val="98A2B8"/>
                 </a:solidFill>
                 <a:latin typeface="微软雅黑"/>
               </a:rPr>
-              <a:t>设计皮肤前要先问「谁会看到它」。对俯视角游戏，别人看到你的方式只有一处：你的角色在战场上长什么样。所以我优先投入的是「角色剪影的辨识度」，而不是细节堆砌。反过来，一款皮肤做得再精致，但混战中认不出来，它的社交价值就是零。</a:t>
-            </a:r>
-          </a:p>
-          <a:p>
-            <a:pPr algn="l">
-              <a:lnSpc>
-                <a:spcPct val="133000"/>
-              </a:lnSpc>
-              <a:spcAft>
-                <a:spcPts val="400"/>
-              </a:spcAft>
-            </a:pPr>
-            <a:r>
-              <a:rPr sz="900" b="0">
+              <a:t>引入底衬后，敌人贴身围攻时玩家中心区域的敌方红色像素由「淹没」降至 0。</a:t>
+            </a:r>
+          </a:p>
+          <a:p>
+            <a:pPr algn="l">
+              <a:lnSpc>
+                <a:spcPct val="125000"/>
+              </a:lnSpc>
+              <a:spcAft>
+                <a:spcPts val="200"/>
+              </a:spcAft>
+            </a:pPr>
+            <a:r>
+              <a:rPr sz="700" b="0">
                 <a:solidFill>
                   <a:srgbClr val="98A2B8"/>
                 </a:solidFill>
@@ -8049,10 +9029,10 @@
           <a:p>
             <a:pPr algn="l">
               <a:lnSpc>
-                <a:spcPct val="133000"/>
-              </a:lnSpc>
-              <a:spcAft>
-                <a:spcPts val="400"/>
+                <a:spcPct val="125000"/>
+              </a:lnSpc>
+              <a:spcAft>
+                <a:spcPts val="200"/>
               </a:spcAft>
             </a:pPr>
             <a:r>
@@ -8062,7 +9042,83 @@
                 </a:solidFill>
                 <a:latin typeface="微软雅黑"/>
               </a:rPr>
-              <a:t>→ 落地：把「剪影优先」作为第一原则，专门为解决可读性写了底衬层，而不是先加光效。</a:t>
+              <a:t>帧率达标</a:t>
+            </a:r>
+          </a:p>
+          <a:p>
+            <a:pPr algn="l">
+              <a:lnSpc>
+                <a:spcPct val="125000"/>
+              </a:lnSpc>
+              <a:spcAft>
+                <a:spcPts val="200"/>
+              </a:spcAft>
+            </a:pPr>
+            <a:r>
+              <a:rPr sz="1100" b="0">
+                <a:solidFill>
+                  <a:srgbClr val="98A2B8"/>
+                </a:solidFill>
+                <a:latin typeface="微软雅黑"/>
+              </a:rPr>
+              <a:t>最重的「虚空领主」在无头浏览器纯 CPU 渲染下实测 58–60 FPS，真机 GPU 更宽裕。</a:t>
+            </a:r>
+          </a:p>
+          <a:p>
+            <a:pPr algn="l">
+              <a:lnSpc>
+                <a:spcPct val="125000"/>
+              </a:lnSpc>
+              <a:spcAft>
+                <a:spcPts val="200"/>
+              </a:spcAft>
+            </a:pPr>
+            <a:r>
+              <a:rPr sz="700" b="0">
+                <a:solidFill>
+                  <a:srgbClr val="98A2B8"/>
+                </a:solidFill>
+                <a:latin typeface="微软雅黑"/>
+              </a:rPr>
+              <a:t/>
+            </a:r>
+          </a:p>
+          <a:p>
+            <a:pPr algn="l">
+              <a:lnSpc>
+                <a:spcPct val="125000"/>
+              </a:lnSpc>
+              <a:spcAft>
+                <a:spcPts val="200"/>
+              </a:spcAft>
+            </a:pPr>
+            <a:r>
+              <a:rPr sz="1200" b="1">
+                <a:solidFill>
+                  <a:srgbClr val="34D399"/>
+                </a:solidFill>
+                <a:latin typeface="微软雅黑"/>
+              </a:rPr>
+              <a:t>旧存档兼容</a:t>
+            </a:r>
+          </a:p>
+          <a:p>
+            <a:pPr algn="l">
+              <a:lnSpc>
+                <a:spcPct val="125000"/>
+              </a:lnSpc>
+              <a:spcAft>
+                <a:spcPts val="200"/>
+              </a:spcAft>
+            </a:pPr>
+            <a:r>
+              <a:rPr sz="1100" b="0">
+                <a:solidFill>
+                  <a:srgbClr val="98A2B8"/>
+                </a:solidFill>
+                <a:latin typeface="微软雅黑"/>
+              </a:rPr>
+              <a:t>增加字段回填逻辑，老玩家的皮肤存档不会因数据结构升级而失效。</a:t>
             </a:r>
           </a:p>
         </p:txBody>
@@ -8210,7 +9266,7 @@
                 </a:solidFill>
                 <a:latin typeface="微软雅黑"/>
               </a:rPr>
-              <a:t>05 / 我的观点 · 观点二</a:t>
+              <a:t>05 / 我的观点 · 观点一</a:t>
             </a:r>
           </a:p>
         </p:txBody>
@@ -8428,7 +9484,7 @@
                 </a:solidFill>
                 <a:latin typeface="微软雅黑"/>
               </a:rPr>
-              <a:t>稀有度的本质是「可解释的价值差」</a:t>
+              <a:t>皮肤卖的不是美术，是「可被看见的自我」</a:t>
             </a:r>
           </a:p>
         </p:txBody>
@@ -8470,7 +9526,7 @@
                 </a:solidFill>
                 <a:latin typeface="微软雅黑"/>
               </a:rPr>
-              <a:t>玩家愿意为「看得见的额外投入」付费</a:t>
+              <a:t>可见性决定价值，而不是精细度</a:t>
             </a:r>
           </a:p>
         </p:txBody>
@@ -8531,7 +9587,7 @@
                 </a:solidFill>
                 <a:latin typeface="微软雅黑"/>
               </a:rPr>
-              <a:t>行业里所有成熟的皮肤分级（CS2 的颜色七档、VALORANT 的五档）都有共同点：高稀有皮肤确实多了东西——更多动画、更多特效、更独特的音效。稀有度是对「产品方多投入了成本」的诚实兑现，玩家感受到的不是「你收我更多钱」，而是「这套确实更用心」。</a:t>
+              <a:t>CS2 的 AWP | Dragon Lore 能拍到数万美元，不是因为它画得比别的枪细致十倍，而是因为它稀有、可交易、且能被别人看到。VALORANT 把最贵的皮肤做了「击杀横幅」——因为击杀瞬间是全场注意力最集中的时刻，是炫耀半径最大的设计点位。</a:t>
             </a:r>
           </a:p>
           <a:p>
@@ -8588,7 +9644,7 @@
                 </a:solidFill>
                 <a:latin typeface="微软雅黑"/>
               </a:rPr>
-              <a:t>如果高稀有和低稀有在体验上没有本质区别，高价就是在收智商税，短期能赚、长期摧毁玩家对定价的信任。所以我把价格严格绑定动效密度：多花 30 钻石，一定多看到一层动态。这不是美术偏好，是定价诚信。</a:t>
+              <a:t>设计皮肤前要先问「谁会看到它」。对俯视角游戏，别人看到你的方式只有一处：你的角色在战场上长什么样。所以我优先投入的是「角色剪影的辨识度」，而不是细节堆砌。反过来，一款皮肤做得再精致，但混战中认不出来，它的社交价值就是零。</a:t>
             </a:r>
           </a:p>
           <a:p>
@@ -8626,7 +9682,7 @@
                 </a:solidFill>
                 <a:latin typeface="微软雅黑"/>
               </a:rPr>
-              <a:t>→ 落地：稀有度同时驱动卡片配色、描边强度、动效数量三个维度，让「贵」在视觉上可被验证。</a:t>
+              <a:t>→ 落地：把「剪影优先」作为第一原则，专门为解决可读性写了底衬层，而不是先加光效。</a:t>
             </a:r>
           </a:p>
         </p:txBody>
@@ -8774,7 +9830,7 @@
                 </a:solidFill>
                 <a:latin typeface="微软雅黑"/>
               </a:rPr>
-              <a:t>05 / 我的观点 · 观点三</a:t>
+              <a:t>05 / 我的观点 · 观点二</a:t>
             </a:r>
           </a:p>
         </p:txBody>
@@ -8992,7 +10048,7 @@
                 </a:solidFill>
                 <a:latin typeface="微软雅黑"/>
               </a:rPr>
-              <a:t>真正的粘性来自「皮肤绑定战绩」，而不是皮肤好看</a:t>
+              <a:t>稀有度的本质是「可解释的价值差」</a:t>
             </a:r>
           </a:p>
         </p:txBody>
@@ -9034,7 +10090,7 @@
                 </a:solidFill>
                 <a:latin typeface="微软雅黑"/>
               </a:rPr>
-              <a:t>把使用行为外化成资产，才能制造沉没成本</a:t>
+              <a:t>玩家愿意为「看得见的额外投入」付费</a:t>
             </a:r>
           </a:p>
         </p:txBody>
@@ -9095,7 +10151,7 @@
                 </a:solidFill>
                 <a:latin typeface="微软雅黑"/>
               </a:rPr>
-              <a:t>CS2 的 StatTrak 计数器是最聪明的留存设计之一——它让「枪」与「我的击杀历史」绑定，只增不减。玩家舍不得丢弃的不是那层涂装，而是倾注在里面的时间。同理，战斗通行证进度、收藏完成度，都是在把「玩过」变成「不舍得离开」。</a:t>
+              <a:t>行业里所有成熟的皮肤分级（CS2 的颜色七档、VALORANT 的五档）都有共同点：高稀有皮肤确实多了东西——更多动画、更多特效、更独特的音效。稀有度是对「产品方多投入了成本」的诚实兑现，玩家感受到的不是「你收我更多钱」，而是「这套确实更用心」。</a:t>
             </a:r>
           </a:p>
           <a:p>
@@ -9152,7 +10208,7 @@
                 </a:solidFill>
                 <a:latin typeface="微软雅黑"/>
               </a:rPr>
-              <a:t>纯静态皮肤带来的粘性是有限的——买完就结束。真正能提升留存的，是让皮肤随玩家的行为而改变。这个项目原本完全没有这类机制，皮肤买完即是终点，这是它在留存设计上最大的空缺。</a:t>
+              <a:t>如果高稀有和低稀有在体验上没有本质区别，高价就是在收智商税，短期能赚、长期摧毁玩家对定价的信任。所以我把价格严格绑定动效密度：多花 30 钻石，一定多看到一层动态。这不是美术偏好，是定价诚信。</a:t>
             </a:r>
           </a:p>
           <a:p>
@@ -9190,7 +10246,7 @@
                 </a:solidFill>
                 <a:latin typeface="微软雅黑"/>
               </a:rPr>
-              <a:t>→ 建议下一步：为皮肤增加「击杀数进化」（如虚空领主随累计击杀增加环绕碎片数量），把皮肤从装饰品升级为战绩容器。</a:t>
+              <a:t>→ 落地：稀有度同时驱动卡片配色、描边强度、动效数量三个维度，让「贵」在视觉上可被验证。</a:t>
             </a:r>
           </a:p>
         </p:txBody>
@@ -9338,7 +10394,7 @@
                 </a:solidFill>
                 <a:latin typeface="微软雅黑"/>
               </a:rPr>
-              <a:t>05 / 我的观点 · 观点四</a:t>
+              <a:t>05 / 我的观点 · 观点三</a:t>
             </a:r>
           </a:p>
         </p:txBody>
@@ -9556,7 +10612,7 @@
                 </a:solidFill>
                 <a:latin typeface="微软雅黑"/>
               </a:rPr>
-              <a:t>在低资源项目里，约束应该成为设计语言，而不是借口</a:t>
+              <a:t>真正的粘性来自「皮肤绑定战绩」，而不是皮肤好看</a:t>
             </a:r>
           </a:p>
         </p:txBody>
@@ -9598,7 +10654,7 @@
                 </a:solidFill>
                 <a:latin typeface="微软雅黑"/>
               </a:rPr>
-              <a:t>「没有美术资源」反而逼出了更清晰的设计纪律</a:t>
+              <a:t>把使用行为外化成资产，才能制造沉没成本</a:t>
             </a:r>
           </a:p>
         </p:txBody>
@@ -9659,7 +10715,7 @@
                 </a:solidFill>
                 <a:latin typeface="微软雅黑"/>
               </a:rPr>
-              <a:t>这个项目没有美术，没有图片资源，皮肤只能靠代码画。常规思路会觉得「那只能做得很简陋」。但恰恰相反——正因为只能用几何图形，我被迫把皮肤拆解成「底盘/内核/描边/结构/光效」这种可复用的结构层。</a:t>
+              <a:t>CS2 的 StatTrak 计数器是最聪明的留存设计之一——它让「枪」与「我的击杀历史」绑定，只增不减。玩家舍不得丢弃的不是那层涂装，而是倾注在里面的时间。同理，战斗通行证进度、收藏完成度，都是在把「玩过」变成「不舍得离开」。</a:t>
             </a:r>
           </a:p>
           <a:p>
@@ -9716,7 +10772,7 @@
                 </a:solidFill>
                 <a:latin typeface="微软雅黑"/>
               </a:rPr>
-              <a:t>这种结构化的思路，比「凭感觉画一套图」更接近可规模化的设计系统。它让第 7 套皮肤的开发成本远低于第 1 套，也让「稀有度 = 层数」这种商业规则可以被机械地执行，而不依赖某个人当天的审美状态。</a:t>
+              <a:t>纯静态皮肤带来的粘性是有限的——买完就结束。真正能提升留存的，是让皮肤随玩家的行为而改变。这个项目原本完全没有这类机制，皮肤买完即是终点，这是它在留存设计上最大的空缺。</a:t>
             </a:r>
           </a:p>
           <a:p>
@@ -9754,7 +10810,7 @@
                 </a:solidFill>
                 <a:latin typeface="微软雅黑"/>
               </a:rPr>
-              <a:t>→ 结论：把约束转化为规范（分层结构 + 稀有度规则），是低资源项目做设计系统的正确姿势。</a:t>
+              <a:t>→ 建议下一步：为皮肤增加「击杀数进化」（如虚空领主随累计击杀增加环绕碎片数量），把皮肤从装饰品升级为战绩容器。</a:t>
             </a:r>
           </a:p>
         </p:txBody>
@@ -9902,7 +10958,7 @@
                 </a:solidFill>
                 <a:latin typeface="微软雅黑"/>
               </a:rPr>
-              <a:t>06 / 边界与反思</a:t>
+              <a:t>05 / 我的观点 · 观点四</a:t>
             </a:r>
           </a:p>
         </p:txBody>
@@ -9944,7 +11000,7 @@
                 </a:solidFill>
                 <a:latin typeface="微软雅黑"/>
               </a:rPr>
-              <a:t>哪些做了，哪些还没做</a:t>
+              <a:t>我的观点</a:t>
             </a:r>
           </a:p>
         </p:txBody>
@@ -9986,7 +11042,7 @@
                 </a:solidFill>
                 <a:latin typeface="微软雅黑"/>
               </a:rPr>
-              <a:t>说清楚「没做成什么」，比只列成绩更有价值</a:t>
+              <a:t>什么样的皮肤设计能吸引用户、增加粘性</a:t>
             </a:r>
           </a:p>
         </p:txBody>
@@ -10000,11 +11056,11 @@
         <p:spPr>
           <a:xfrm>
             <a:off x="841248" y="1783080"/>
-            <a:ext cx="10515600" cy="493776"/>
+            <a:ext cx="10515600" cy="4434840"/>
           </a:xfrm>
           <a:prstGeom prst="roundRect">
             <a:avLst>
-              <a:gd name="adj" fmla="val 9000"/>
+              <a:gd name="adj" fmla="val 4000"/>
             </a:avLst>
           </a:prstGeom>
           <a:solidFill>
@@ -10041,111 +11097,23 @@
       </p:sp>
       <p:sp>
         <p:nvSpPr>
-          <p:cNvPr id="8" name="TextBox 7"/>
-          <p:cNvSpPr txBox="1"/>
-          <p:nvPr/>
-        </p:nvSpPr>
-        <p:spPr>
-          <a:xfrm>
-            <a:off x="1143000" y="1783080"/>
-            <a:ext cx="3291840" cy="493776"/>
-          </a:xfrm>
-          <a:prstGeom prst="rect">
-            <a:avLst/>
-          </a:prstGeom>
-          <a:noFill/>
-        </p:spPr>
-        <p:txBody>
-          <a:bodyPr wrap="square" anchor="ctr" lIns="0" rIns="0" tIns="0" bIns="0">
-            <a:spAutoFit/>
-          </a:bodyPr>
-          <a:lstStyle/>
-          <a:p>
-            <a:pPr algn="l">
-              <a:lnSpc>
-                <a:spcPct val="100000"/>
-              </a:lnSpc>
-              <a:spcAft>
-                <a:spcPts val="0"/>
-              </a:spcAft>
-            </a:pPr>
-            <a:r>
-              <a:rPr sz="1200" b="1">
-                <a:solidFill>
-                  <a:srgbClr val="E8EBF2"/>
-                </a:solidFill>
-                <a:latin typeface="微软雅黑"/>
-              </a:rPr>
-              <a:t>六套皮肤分层渲染</a:t>
-            </a:r>
-          </a:p>
-        </p:txBody>
-      </p:sp>
-      <p:sp>
-        <p:nvSpPr>
-          <p:cNvPr id="9" name="TextBox 8"/>
-          <p:cNvSpPr txBox="1"/>
-          <p:nvPr/>
-        </p:nvSpPr>
-        <p:spPr>
-          <a:xfrm>
-            <a:off x="4663440" y="1783080"/>
-            <a:ext cx="6492240" cy="493776"/>
-          </a:xfrm>
-          <a:prstGeom prst="rect">
-            <a:avLst/>
-          </a:prstGeom>
-          <a:noFill/>
-        </p:spPr>
-        <p:txBody>
-          <a:bodyPr wrap="square" anchor="ctr" lIns="0" rIns="0" tIns="0" bIns="0">
-            <a:spAutoFit/>
-          </a:bodyPr>
-          <a:lstStyle/>
-          <a:p>
-            <a:pPr algn="l">
-              <a:lnSpc>
-                <a:spcPct val="100000"/>
-              </a:lnSpc>
-              <a:spcAft>
-                <a:spcPts val="0"/>
-              </a:spcAft>
-            </a:pPr>
-            <a:r>
-              <a:rPr sz="1100" b="0">
-                <a:solidFill>
-                  <a:srgbClr val="34D399"/>
-                </a:solidFill>
-                <a:latin typeface="微软雅黑"/>
-              </a:rPr>
-              <a:t>已上线</a:t>
-            </a:r>
-          </a:p>
-        </p:txBody>
-      </p:sp>
-      <p:sp>
-        <p:nvSpPr>
-          <p:cNvPr id="10" name="Rounded Rectangle 9"/>
+          <p:cNvPr id="8" name="Rectangle 7"/>
           <p:cNvSpPr/>
           <p:nvPr/>
         </p:nvSpPr>
         <p:spPr>
           <a:xfrm>
-            <a:off x="841248" y="2359152"/>
-            <a:ext cx="10515600" cy="493776"/>
-          </a:xfrm>
-          <a:prstGeom prst="roundRect">
-            <a:avLst>
-              <a:gd name="adj" fmla="val 9000"/>
-            </a:avLst>
+            <a:off x="841248" y="1783080"/>
+            <a:ext cx="45720" cy="4434840"/>
+          </a:xfrm>
+          <a:prstGeom prst="rect">
+            <a:avLst/>
           </a:prstGeom>
           <a:solidFill>
-            <a:srgbClr val="161A26"/>
+            <a:srgbClr val="E94560"/>
           </a:solidFill>
-          <a:ln w="9525">
-            <a:solidFill>
-              <a:srgbClr val="2A3144"/>
-            </a:solidFill>
+          <a:ln>
+            <a:noFill/>
           </a:ln>
           <a:effectLst/>
         </p:spPr>
@@ -10173,1008 +11141,240 @@
       </p:sp>
       <p:sp>
         <p:nvSpPr>
+          <p:cNvPr id="9" name="TextBox 8"/>
+          <p:cNvSpPr txBox="1"/>
+          <p:nvPr/>
+        </p:nvSpPr>
+        <p:spPr>
+          <a:xfrm>
+            <a:off x="1234440" y="1965960"/>
+            <a:ext cx="9784080" cy="320040"/>
+          </a:xfrm>
+          <a:prstGeom prst="rect">
+            <a:avLst/>
+          </a:prstGeom>
+          <a:noFill/>
+        </p:spPr>
+        <p:txBody>
+          <a:bodyPr wrap="square" anchor="t" lIns="0" rIns="0" tIns="0" bIns="0">
+            <a:spAutoFit/>
+          </a:bodyPr>
+          <a:lstStyle/>
+          <a:p>
+            <a:pPr algn="l">
+              <a:lnSpc>
+                <a:spcPct val="100000"/>
+              </a:lnSpc>
+              <a:spcAft>
+                <a:spcPts val="0"/>
+              </a:spcAft>
+            </a:pPr>
+            <a:r>
+              <a:rPr sz="1250" b="1">
+                <a:solidFill>
+                  <a:srgbClr val="FF6B8A"/>
+                </a:solidFill>
+                <a:latin typeface="微软雅黑"/>
+              </a:rPr>
+              <a:t>在低资源项目里，约束应该成为设计语言，而不是借口</a:t>
+            </a:r>
+          </a:p>
+        </p:txBody>
+      </p:sp>
+      <p:sp>
+        <p:nvSpPr>
+          <p:cNvPr id="10" name="TextBox 9"/>
+          <p:cNvSpPr txBox="1"/>
+          <p:nvPr/>
+        </p:nvSpPr>
+        <p:spPr>
+          <a:xfrm>
+            <a:off x="1234440" y="2331720"/>
+            <a:ext cx="9784080" cy="457200"/>
+          </a:xfrm>
+          <a:prstGeom prst="rect">
+            <a:avLst/>
+          </a:prstGeom>
+          <a:noFill/>
+        </p:spPr>
+        <p:txBody>
+          <a:bodyPr wrap="square" anchor="t" lIns="0" rIns="0" tIns="0" bIns="0">
+            <a:spAutoFit/>
+          </a:bodyPr>
+          <a:lstStyle/>
+          <a:p>
+            <a:pPr algn="l">
+              <a:lnSpc>
+                <a:spcPct val="100000"/>
+              </a:lnSpc>
+              <a:spcAft>
+                <a:spcPts val="0"/>
+              </a:spcAft>
+            </a:pPr>
+            <a:r>
+              <a:rPr sz="2200" b="1">
+                <a:solidFill>
+                  <a:srgbClr val="E8EBF2"/>
+                </a:solidFill>
+                <a:latin typeface="微软雅黑"/>
+              </a:rPr>
+              <a:t>「没有美术资源」反而逼出了更清晰的设计纪律</a:t>
+            </a:r>
+          </a:p>
+        </p:txBody>
+      </p:sp>
+      <p:sp>
+        <p:nvSpPr>
           <p:cNvPr id="11" name="TextBox 10"/>
           <p:cNvSpPr txBox="1"/>
           <p:nvPr/>
         </p:nvSpPr>
         <p:spPr>
           <a:xfrm>
-            <a:off x="1143000" y="2359152"/>
-            <a:ext cx="3291840" cy="493776"/>
-          </a:xfrm>
-          <a:prstGeom prst="rect">
-            <a:avLst/>
-          </a:prstGeom>
-          <a:noFill/>
-        </p:spPr>
-        <p:txBody>
-          <a:bodyPr wrap="square" anchor="ctr" lIns="0" rIns="0" tIns="0" bIns="0">
-            <a:spAutoFit/>
-          </a:bodyPr>
-          <a:lstStyle/>
-          <a:p>
-            <a:pPr algn="l">
-              <a:lnSpc>
-                <a:spcPct val="100000"/>
-              </a:lnSpc>
-              <a:spcAft>
-                <a:spcPts val="0"/>
+            <a:off x="1234440" y="2926080"/>
+            <a:ext cx="9784080" cy="3108960"/>
+          </a:xfrm>
+          <a:prstGeom prst="rect">
+            <a:avLst/>
+          </a:prstGeom>
+          <a:noFill/>
+        </p:spPr>
+        <p:txBody>
+          <a:bodyPr wrap="square" anchor="t" lIns="0" rIns="0" tIns="0" bIns="0">
+            <a:spAutoFit/>
+          </a:bodyPr>
+          <a:lstStyle/>
+          <a:p>
+            <a:pPr algn="l">
+              <a:lnSpc>
+                <a:spcPct val="133000"/>
+              </a:lnSpc>
+              <a:spcAft>
+                <a:spcPts val="400"/>
               </a:spcAft>
             </a:pPr>
             <a:r>
               <a:rPr sz="1200" b="1">
                 <a:solidFill>
-                  <a:srgbClr val="E8EBF2"/>
-                </a:solidFill>
-                <a:latin typeface="微软雅黑"/>
-              </a:rPr>
-              <a:t>稀有度四档体系</a:t>
-            </a:r>
-          </a:p>
-        </p:txBody>
-      </p:sp>
-      <p:sp>
-        <p:nvSpPr>
-          <p:cNvPr id="12" name="TextBox 11"/>
-          <p:cNvSpPr txBox="1"/>
-          <p:nvPr/>
-        </p:nvSpPr>
-        <p:spPr>
-          <a:xfrm>
-            <a:off x="4663440" y="2359152"/>
-            <a:ext cx="6492240" cy="493776"/>
-          </a:xfrm>
-          <a:prstGeom prst="rect">
-            <a:avLst/>
-          </a:prstGeom>
-          <a:noFill/>
-        </p:spPr>
-        <p:txBody>
-          <a:bodyPr wrap="square" anchor="ctr" lIns="0" rIns="0" tIns="0" bIns="0">
-            <a:spAutoFit/>
-          </a:bodyPr>
-          <a:lstStyle/>
-          <a:p>
-            <a:pPr algn="l">
-              <a:lnSpc>
-                <a:spcPct val="100000"/>
-              </a:lnSpc>
-              <a:spcAft>
-                <a:spcPts val="0"/>
-              </a:spcAft>
-            </a:pPr>
-            <a:r>
-              <a:rPr sz="1100" b="0">
+                  <a:srgbClr val="60A5FA"/>
+                </a:solidFill>
+                <a:latin typeface="微软雅黑"/>
+              </a:rPr>
+              <a:t>论据</a:t>
+            </a:r>
+          </a:p>
+          <a:p>
+            <a:pPr algn="l">
+              <a:lnSpc>
+                <a:spcPct val="133000"/>
+              </a:lnSpc>
+              <a:spcAft>
+                <a:spcPts val="400"/>
+              </a:spcAft>
+            </a:pPr>
+            <a:r>
+              <a:rPr sz="1200" b="0">
+                <a:solidFill>
+                  <a:srgbClr val="98A2B8"/>
+                </a:solidFill>
+                <a:latin typeface="微软雅黑"/>
+              </a:rPr>
+              <a:t>这个项目没有美术，没有图片资源，皮肤只能靠代码画。常规思路会觉得「那只能做得很简陋」。但恰恰相反——正因为只能用几何图形，我被迫把皮肤拆解成「底盘/内核/描边/结构/光效」这种可复用的结构层。</a:t>
+            </a:r>
+          </a:p>
+          <a:p>
+            <a:pPr algn="l">
+              <a:lnSpc>
+                <a:spcPct val="133000"/>
+              </a:lnSpc>
+              <a:spcAft>
+                <a:spcPts val="400"/>
+              </a:spcAft>
+            </a:pPr>
+            <a:r>
+              <a:rPr sz="900" b="0">
+                <a:solidFill>
+                  <a:srgbClr val="98A2B8"/>
+                </a:solidFill>
+                <a:latin typeface="微软雅黑"/>
+              </a:rPr>
+              <a:t/>
+            </a:r>
+          </a:p>
+          <a:p>
+            <a:pPr algn="l">
+              <a:lnSpc>
+                <a:spcPct val="133000"/>
+              </a:lnSpc>
+              <a:spcAft>
+                <a:spcPts val="400"/>
+              </a:spcAft>
+            </a:pPr>
+            <a:r>
+              <a:rPr sz="1200" b="1">
+                <a:solidFill>
+                  <a:srgbClr val="60A5FA"/>
+                </a:solidFill>
+                <a:latin typeface="微软雅黑"/>
+              </a:rPr>
+              <a:t>推论</a:t>
+            </a:r>
+          </a:p>
+          <a:p>
+            <a:pPr algn="l">
+              <a:lnSpc>
+                <a:spcPct val="133000"/>
+              </a:lnSpc>
+              <a:spcAft>
+                <a:spcPts val="400"/>
+              </a:spcAft>
+            </a:pPr>
+            <a:r>
+              <a:rPr sz="1200" b="0">
+                <a:solidFill>
+                  <a:srgbClr val="98A2B8"/>
+                </a:solidFill>
+                <a:latin typeface="微软雅黑"/>
+              </a:rPr>
+              <a:t>这种结构化的思路，比「凭感觉画一套图」更接近可规模化的设计系统。它让第 7 套皮肤的开发成本远低于第 1 套，也让「稀有度 = 层数」这种商业规则可以被机械地执行，而不依赖某个人当天的审美状态。</a:t>
+            </a:r>
+          </a:p>
+          <a:p>
+            <a:pPr algn="l">
+              <a:lnSpc>
+                <a:spcPct val="133000"/>
+              </a:lnSpc>
+              <a:spcAft>
+                <a:spcPts val="400"/>
+              </a:spcAft>
+            </a:pPr>
+            <a:r>
+              <a:rPr sz="900" b="0">
+                <a:solidFill>
+                  <a:srgbClr val="98A2B8"/>
+                </a:solidFill>
+                <a:latin typeface="微软雅黑"/>
+              </a:rPr>
+              <a:t/>
+            </a:r>
+          </a:p>
+          <a:p>
+            <a:pPr algn="l">
+              <a:lnSpc>
+                <a:spcPct val="133000"/>
+              </a:lnSpc>
+              <a:spcAft>
+                <a:spcPts val="400"/>
+              </a:spcAft>
+            </a:pPr>
+            <a:r>
+              <a:rPr sz="1200" b="1">
                 <a:solidFill>
                   <a:srgbClr val="34D399"/>
                 </a:solidFill>
                 <a:latin typeface="微软雅黑"/>
               </a:rPr>
-              <a:t>已上线</a:t>
-            </a:r>
-          </a:p>
-        </p:txBody>
-      </p:sp>
-      <p:sp>
-        <p:nvSpPr>
-          <p:cNvPr id="13" name="Rounded Rectangle 12"/>
-          <p:cNvSpPr/>
-          <p:nvPr/>
-        </p:nvSpPr>
-        <p:spPr>
-          <a:xfrm>
-            <a:off x="841248" y="2935224"/>
-            <a:ext cx="10515600" cy="493776"/>
-          </a:xfrm>
-          <a:prstGeom prst="roundRect">
-            <a:avLst>
-              <a:gd name="adj" fmla="val 9000"/>
-            </a:avLst>
-          </a:prstGeom>
-          <a:solidFill>
-            <a:srgbClr val="161A26"/>
-          </a:solidFill>
-          <a:ln w="9525">
-            <a:solidFill>
-              <a:srgbClr val="2A3144"/>
-            </a:solidFill>
-          </a:ln>
-          <a:effectLst/>
-        </p:spPr>
-        <p:style>
-          <a:lnRef idx="1">
-            <a:schemeClr val="accent1"/>
-          </a:lnRef>
-          <a:fillRef idx="3">
-            <a:schemeClr val="accent1"/>
-          </a:fillRef>
-          <a:effectRef idx="2">
-            <a:schemeClr val="accent1"/>
-          </a:effectRef>
-          <a:fontRef idx="minor">
-            <a:schemeClr val="lt1"/>
-          </a:fontRef>
-        </p:style>
-        <p:txBody>
-          <a:bodyPr rtlCol="0" anchor="ctr"/>
-          <a:lstStyle/>
-          <a:p>
-            <a:pPr algn="ctr"/>
-          </a:p>
-        </p:txBody>
-      </p:sp>
-      <p:sp>
-        <p:nvSpPr>
-          <p:cNvPr id="14" name="TextBox 13"/>
-          <p:cNvSpPr txBox="1"/>
-          <p:nvPr/>
-        </p:nvSpPr>
-        <p:spPr>
-          <a:xfrm>
-            <a:off x="1143000" y="2935224"/>
-            <a:ext cx="3291840" cy="493776"/>
-          </a:xfrm>
-          <a:prstGeom prst="rect">
-            <a:avLst/>
-          </a:prstGeom>
-          <a:noFill/>
-        </p:spPr>
-        <p:txBody>
-          <a:bodyPr wrap="square" anchor="ctr" lIns="0" rIns="0" tIns="0" bIns="0">
-            <a:spAutoFit/>
-          </a:bodyPr>
-          <a:lstStyle/>
-          <a:p>
-            <a:pPr algn="l">
-              <a:lnSpc>
-                <a:spcPct val="100000"/>
-              </a:lnSpc>
-              <a:spcAft>
-                <a:spcPts val="0"/>
-              </a:spcAft>
-            </a:pPr>
-            <a:r>
-              <a:rPr sz="1200" b="1">
-                <a:solidFill>
-                  <a:srgbClr val="E8EBF2"/>
-                </a:solidFill>
-                <a:latin typeface="微软雅黑"/>
-              </a:rPr>
-              <a:t>商店实时动效预览</a:t>
-            </a:r>
-          </a:p>
-        </p:txBody>
-      </p:sp>
-      <p:sp>
-        <p:nvSpPr>
-          <p:cNvPr id="15" name="TextBox 14"/>
-          <p:cNvSpPr txBox="1"/>
-          <p:nvPr/>
-        </p:nvSpPr>
-        <p:spPr>
-          <a:xfrm>
-            <a:off x="4663440" y="2935224"/>
-            <a:ext cx="6492240" cy="493776"/>
-          </a:xfrm>
-          <a:prstGeom prst="rect">
-            <a:avLst/>
-          </a:prstGeom>
-          <a:noFill/>
-        </p:spPr>
-        <p:txBody>
-          <a:bodyPr wrap="square" anchor="ctr" lIns="0" rIns="0" tIns="0" bIns="0">
-            <a:spAutoFit/>
-          </a:bodyPr>
-          <a:lstStyle/>
-          <a:p>
-            <a:pPr algn="l">
-              <a:lnSpc>
-                <a:spcPct val="100000"/>
-              </a:lnSpc>
-              <a:spcAft>
-                <a:spcPts val="0"/>
-              </a:spcAft>
-            </a:pPr>
-            <a:r>
-              <a:rPr sz="1100" b="0">
-                <a:solidFill>
-                  <a:srgbClr val="34D399"/>
-                </a:solidFill>
-                <a:latin typeface="微软雅黑"/>
-              </a:rPr>
-              <a:t>已上线</a:t>
-            </a:r>
-          </a:p>
-        </p:txBody>
-      </p:sp>
-      <p:sp>
-        <p:nvSpPr>
-          <p:cNvPr id="16" name="Rounded Rectangle 15"/>
-          <p:cNvSpPr/>
-          <p:nvPr/>
-        </p:nvSpPr>
-        <p:spPr>
-          <a:xfrm>
-            <a:off x="841248" y="3511296"/>
-            <a:ext cx="10515600" cy="493776"/>
-          </a:xfrm>
-          <a:prstGeom prst="roundRect">
-            <a:avLst>
-              <a:gd name="adj" fmla="val 9000"/>
-            </a:avLst>
-          </a:prstGeom>
-          <a:solidFill>
-            <a:srgbClr val="161A26"/>
-          </a:solidFill>
-          <a:ln w="9525">
-            <a:solidFill>
-              <a:srgbClr val="2A3144"/>
-            </a:solidFill>
-          </a:ln>
-          <a:effectLst/>
-        </p:spPr>
-        <p:style>
-          <a:lnRef idx="1">
-            <a:schemeClr val="accent1"/>
-          </a:lnRef>
-          <a:fillRef idx="3">
-            <a:schemeClr val="accent1"/>
-          </a:fillRef>
-          <a:effectRef idx="2">
-            <a:schemeClr val="accent1"/>
-          </a:effectRef>
-          <a:fontRef idx="minor">
-            <a:schemeClr val="lt1"/>
-          </a:fontRef>
-        </p:style>
-        <p:txBody>
-          <a:bodyPr rtlCol="0" anchor="ctr"/>
-          <a:lstStyle/>
-          <a:p>
-            <a:pPr algn="ctr"/>
-          </a:p>
-        </p:txBody>
-      </p:sp>
-      <p:sp>
-        <p:nvSpPr>
-          <p:cNvPr id="17" name="TextBox 16"/>
-          <p:cNvSpPr txBox="1"/>
-          <p:nvPr/>
-        </p:nvSpPr>
-        <p:spPr>
-          <a:xfrm>
-            <a:off x="1143000" y="3511296"/>
-            <a:ext cx="3291840" cy="493776"/>
-          </a:xfrm>
-          <a:prstGeom prst="rect">
-            <a:avLst/>
-          </a:prstGeom>
-          <a:noFill/>
-        </p:spPr>
-        <p:txBody>
-          <a:bodyPr wrap="square" anchor="ctr" lIns="0" rIns="0" tIns="0" bIns="0">
-            <a:spAutoFit/>
-          </a:bodyPr>
-          <a:lstStyle/>
-          <a:p>
-            <a:pPr algn="l">
-              <a:lnSpc>
-                <a:spcPct val="100000"/>
-              </a:lnSpc>
-              <a:spcAft>
-                <a:spcPts val="0"/>
-              </a:spcAft>
-            </a:pPr>
-            <a:r>
-              <a:rPr sz="1200" b="1">
-                <a:solidFill>
-                  <a:srgbClr val="E8EBF2"/>
-                </a:solidFill>
-                <a:latin typeface="微软雅黑"/>
-              </a:rPr>
-              <a:t>可读性底衬（剪影保障）</a:t>
-            </a:r>
-          </a:p>
-        </p:txBody>
-      </p:sp>
-      <p:sp>
-        <p:nvSpPr>
-          <p:cNvPr id="18" name="TextBox 17"/>
-          <p:cNvSpPr txBox="1"/>
-          <p:nvPr/>
-        </p:nvSpPr>
-        <p:spPr>
-          <a:xfrm>
-            <a:off x="4663440" y="3511296"/>
-            <a:ext cx="6492240" cy="493776"/>
-          </a:xfrm>
-          <a:prstGeom prst="rect">
-            <a:avLst/>
-          </a:prstGeom>
-          <a:noFill/>
-        </p:spPr>
-        <p:txBody>
-          <a:bodyPr wrap="square" anchor="ctr" lIns="0" rIns="0" tIns="0" bIns="0">
-            <a:spAutoFit/>
-          </a:bodyPr>
-          <a:lstStyle/>
-          <a:p>
-            <a:pPr algn="l">
-              <a:lnSpc>
-                <a:spcPct val="100000"/>
-              </a:lnSpc>
-              <a:spcAft>
-                <a:spcPts val="0"/>
-              </a:spcAft>
-            </a:pPr>
-            <a:r>
-              <a:rPr sz="1100" b="0">
-                <a:solidFill>
-                  <a:srgbClr val="34D399"/>
-                </a:solidFill>
-                <a:latin typeface="微软雅黑"/>
-              </a:rPr>
-              <a:t>已上线</a:t>
-            </a:r>
-          </a:p>
-        </p:txBody>
-      </p:sp>
-      <p:sp>
-        <p:nvSpPr>
-          <p:cNvPr id="19" name="Rounded Rectangle 18"/>
-          <p:cNvSpPr/>
-          <p:nvPr/>
-        </p:nvSpPr>
-        <p:spPr>
-          <a:xfrm>
-            <a:off x="841248" y="4087368"/>
-            <a:ext cx="10515600" cy="493776"/>
-          </a:xfrm>
-          <a:prstGeom prst="roundRect">
-            <a:avLst>
-              <a:gd name="adj" fmla="val 9000"/>
-            </a:avLst>
-          </a:prstGeom>
-          <a:solidFill>
-            <a:srgbClr val="161A26"/>
-          </a:solidFill>
-          <a:ln w="9525">
-            <a:solidFill>
-              <a:srgbClr val="2A3144"/>
-            </a:solidFill>
-          </a:ln>
-          <a:effectLst/>
-        </p:spPr>
-        <p:style>
-          <a:lnRef idx="1">
-            <a:schemeClr val="accent1"/>
-          </a:lnRef>
-          <a:fillRef idx="3">
-            <a:schemeClr val="accent1"/>
-          </a:fillRef>
-          <a:effectRef idx="2">
-            <a:schemeClr val="accent1"/>
-          </a:effectRef>
-          <a:fontRef idx="minor">
-            <a:schemeClr val="lt1"/>
-          </a:fontRef>
-        </p:style>
-        <p:txBody>
-          <a:bodyPr rtlCol="0" anchor="ctr"/>
-          <a:lstStyle/>
-          <a:p>
-            <a:pPr algn="ctr"/>
-          </a:p>
-        </p:txBody>
-      </p:sp>
-      <p:sp>
-        <p:nvSpPr>
-          <p:cNvPr id="20" name="TextBox 19"/>
-          <p:cNvSpPr txBox="1"/>
-          <p:nvPr/>
-        </p:nvSpPr>
-        <p:spPr>
-          <a:xfrm>
-            <a:off x="1143000" y="4087368"/>
-            <a:ext cx="3291840" cy="493776"/>
-          </a:xfrm>
-          <a:prstGeom prst="rect">
-            <a:avLst/>
-          </a:prstGeom>
-          <a:noFill/>
-        </p:spPr>
-        <p:txBody>
-          <a:bodyPr wrap="square" anchor="ctr" lIns="0" rIns="0" tIns="0" bIns="0">
-            <a:spAutoFit/>
-          </a:bodyPr>
-          <a:lstStyle/>
-          <a:p>
-            <a:pPr algn="l">
-              <a:lnSpc>
-                <a:spcPct val="100000"/>
-              </a:lnSpc>
-              <a:spcAft>
-                <a:spcPts val="0"/>
-              </a:spcAft>
-            </a:pPr>
-            <a:r>
-              <a:rPr sz="1200" b="1">
-                <a:solidFill>
-                  <a:srgbClr val="E8EBF2"/>
-                </a:solidFill>
-                <a:latin typeface="微软雅黑"/>
-              </a:rPr>
-              <a:t>移动端性能降级</a:t>
-            </a:r>
-          </a:p>
-        </p:txBody>
-      </p:sp>
-      <p:sp>
-        <p:nvSpPr>
-          <p:cNvPr id="21" name="TextBox 20"/>
-          <p:cNvSpPr txBox="1"/>
-          <p:nvPr/>
-        </p:nvSpPr>
-        <p:spPr>
-          <a:xfrm>
-            <a:off x="4663440" y="4087368"/>
-            <a:ext cx="6492240" cy="493776"/>
-          </a:xfrm>
-          <a:prstGeom prst="rect">
-            <a:avLst/>
-          </a:prstGeom>
-          <a:noFill/>
-        </p:spPr>
-        <p:txBody>
-          <a:bodyPr wrap="square" anchor="ctr" lIns="0" rIns="0" tIns="0" bIns="0">
-            <a:spAutoFit/>
-          </a:bodyPr>
-          <a:lstStyle/>
-          <a:p>
-            <a:pPr algn="l">
-              <a:lnSpc>
-                <a:spcPct val="100000"/>
-              </a:lnSpc>
-              <a:spcAft>
-                <a:spcPts val="0"/>
-              </a:spcAft>
-            </a:pPr>
-            <a:r>
-              <a:rPr sz="1100" b="0">
-                <a:solidFill>
-                  <a:srgbClr val="34D399"/>
-                </a:solidFill>
-                <a:latin typeface="微软雅黑"/>
-              </a:rPr>
-              <a:t>已上线</a:t>
-            </a:r>
-          </a:p>
-        </p:txBody>
-      </p:sp>
-      <p:sp>
-        <p:nvSpPr>
-          <p:cNvPr id="22" name="Rounded Rectangle 21"/>
-          <p:cNvSpPr/>
-          <p:nvPr/>
-        </p:nvSpPr>
-        <p:spPr>
-          <a:xfrm>
-            <a:off x="841248" y="4663440"/>
-            <a:ext cx="10515600" cy="493776"/>
-          </a:xfrm>
-          <a:prstGeom prst="roundRect">
-            <a:avLst>
-              <a:gd name="adj" fmla="val 9000"/>
-            </a:avLst>
-          </a:prstGeom>
-          <a:solidFill>
-            <a:srgbClr val="161A26"/>
-          </a:solidFill>
-          <a:ln w="9525">
-            <a:solidFill>
-              <a:srgbClr val="2A3144"/>
-            </a:solidFill>
-          </a:ln>
-          <a:effectLst/>
-        </p:spPr>
-        <p:style>
-          <a:lnRef idx="1">
-            <a:schemeClr val="accent1"/>
-          </a:lnRef>
-          <a:fillRef idx="3">
-            <a:schemeClr val="accent1"/>
-          </a:fillRef>
-          <a:effectRef idx="2">
-            <a:schemeClr val="accent1"/>
-          </a:effectRef>
-          <a:fontRef idx="minor">
-            <a:schemeClr val="lt1"/>
-          </a:fontRef>
-        </p:style>
-        <p:txBody>
-          <a:bodyPr rtlCol="0" anchor="ctr"/>
-          <a:lstStyle/>
-          <a:p>
-            <a:pPr algn="ctr"/>
-          </a:p>
-        </p:txBody>
-      </p:sp>
-      <p:sp>
-        <p:nvSpPr>
-          <p:cNvPr id="23" name="TextBox 22"/>
-          <p:cNvSpPr txBox="1"/>
-          <p:nvPr/>
-        </p:nvSpPr>
-        <p:spPr>
-          <a:xfrm>
-            <a:off x="1143000" y="4663440"/>
-            <a:ext cx="3291840" cy="493776"/>
-          </a:xfrm>
-          <a:prstGeom prst="rect">
-            <a:avLst/>
-          </a:prstGeom>
-          <a:noFill/>
-        </p:spPr>
-        <p:txBody>
-          <a:bodyPr wrap="square" anchor="ctr" lIns="0" rIns="0" tIns="0" bIns="0">
-            <a:spAutoFit/>
-          </a:bodyPr>
-          <a:lstStyle/>
-          <a:p>
-            <a:pPr algn="l">
-              <a:lnSpc>
-                <a:spcPct val="100000"/>
-              </a:lnSpc>
-              <a:spcAft>
-                <a:spcPts val="0"/>
-              </a:spcAft>
-            </a:pPr>
-            <a:r>
-              <a:rPr sz="1200" b="1">
-                <a:solidFill>
-                  <a:srgbClr val="E8EBF2"/>
-                </a:solidFill>
-                <a:latin typeface="微软雅黑"/>
-              </a:rPr>
-              <a:t>皮肤进化 / 战绩绑定</a:t>
-            </a:r>
-          </a:p>
-        </p:txBody>
-      </p:sp>
-      <p:sp>
-        <p:nvSpPr>
-          <p:cNvPr id="24" name="TextBox 23"/>
-          <p:cNvSpPr txBox="1"/>
-          <p:nvPr/>
-        </p:nvSpPr>
-        <p:spPr>
-          <a:xfrm>
-            <a:off x="4663440" y="4663440"/>
-            <a:ext cx="6492240" cy="493776"/>
-          </a:xfrm>
-          <a:prstGeom prst="rect">
-            <a:avLst/>
-          </a:prstGeom>
-          <a:noFill/>
-        </p:spPr>
-        <p:txBody>
-          <a:bodyPr wrap="square" anchor="ctr" lIns="0" rIns="0" tIns="0" bIns="0">
-            <a:spAutoFit/>
-          </a:bodyPr>
-          <a:lstStyle/>
-          <a:p>
-            <a:pPr algn="l">
-              <a:lnSpc>
-                <a:spcPct val="100000"/>
-              </a:lnSpc>
-              <a:spcAft>
-                <a:spcPts val="0"/>
-              </a:spcAft>
-            </a:pPr>
-            <a:r>
-              <a:rPr sz="1100" b="1">
-                <a:solidFill>
-                  <a:srgbClr val="6B7488"/>
-                </a:solidFill>
-                <a:latin typeface="微软雅黑"/>
-              </a:rPr>
-              <a:t>未落地 · 最能提升留存的方向，尚未接入击杀数驱动的进化</a:t>
-            </a:r>
-          </a:p>
-        </p:txBody>
-      </p:sp>
-      <p:sp>
-        <p:nvSpPr>
-          <p:cNvPr id="25" name="Rounded Rectangle 24"/>
-          <p:cNvSpPr/>
-          <p:nvPr/>
-        </p:nvSpPr>
-        <p:spPr>
-          <a:xfrm>
-            <a:off x="841248" y="5239512"/>
-            <a:ext cx="10515600" cy="493776"/>
-          </a:xfrm>
-          <a:prstGeom prst="roundRect">
-            <a:avLst>
-              <a:gd name="adj" fmla="val 9000"/>
-            </a:avLst>
-          </a:prstGeom>
-          <a:solidFill>
-            <a:srgbClr val="161A26"/>
-          </a:solidFill>
-          <a:ln w="9525">
-            <a:solidFill>
-              <a:srgbClr val="2A3144"/>
-            </a:solidFill>
-          </a:ln>
-          <a:effectLst/>
-        </p:spPr>
-        <p:style>
-          <a:lnRef idx="1">
-            <a:schemeClr val="accent1"/>
-          </a:lnRef>
-          <a:fillRef idx="3">
-            <a:schemeClr val="accent1"/>
-          </a:fillRef>
-          <a:effectRef idx="2">
-            <a:schemeClr val="accent1"/>
-          </a:effectRef>
-          <a:fontRef idx="minor">
-            <a:schemeClr val="lt1"/>
-          </a:fontRef>
-        </p:style>
-        <p:txBody>
-          <a:bodyPr rtlCol="0" anchor="ctr"/>
-          <a:lstStyle/>
-          <a:p>
-            <a:pPr algn="ctr"/>
-          </a:p>
-        </p:txBody>
-      </p:sp>
-      <p:sp>
-        <p:nvSpPr>
-          <p:cNvPr id="26" name="TextBox 25"/>
-          <p:cNvSpPr txBox="1"/>
-          <p:nvPr/>
-        </p:nvSpPr>
-        <p:spPr>
-          <a:xfrm>
-            <a:off x="1143000" y="5239512"/>
-            <a:ext cx="3291840" cy="493776"/>
-          </a:xfrm>
-          <a:prstGeom prst="rect">
-            <a:avLst/>
-          </a:prstGeom>
-          <a:noFill/>
-        </p:spPr>
-        <p:txBody>
-          <a:bodyPr wrap="square" anchor="ctr" lIns="0" rIns="0" tIns="0" bIns="0">
-            <a:spAutoFit/>
-          </a:bodyPr>
-          <a:lstStyle/>
-          <a:p>
-            <a:pPr algn="l">
-              <a:lnSpc>
-                <a:spcPct val="100000"/>
-              </a:lnSpc>
-              <a:spcAft>
-                <a:spcPts val="0"/>
-              </a:spcAft>
-            </a:pPr>
-            <a:r>
-              <a:rPr sz="1200" b="1">
-                <a:solidFill>
-                  <a:srgbClr val="E8EBF2"/>
-                </a:solidFill>
-                <a:latin typeface="微软雅黑"/>
-              </a:rPr>
-              <a:t>手绘级插画质感</a:t>
-            </a:r>
-          </a:p>
-        </p:txBody>
-      </p:sp>
-      <p:sp>
-        <p:nvSpPr>
-          <p:cNvPr id="27" name="TextBox 26"/>
-          <p:cNvSpPr txBox="1"/>
-          <p:nvPr/>
-        </p:nvSpPr>
-        <p:spPr>
-          <a:xfrm>
-            <a:off x="4663440" y="5239512"/>
-            <a:ext cx="6492240" cy="493776"/>
-          </a:xfrm>
-          <a:prstGeom prst="rect">
-            <a:avLst/>
-          </a:prstGeom>
-          <a:noFill/>
-        </p:spPr>
-        <p:txBody>
-          <a:bodyPr wrap="square" anchor="ctr" lIns="0" rIns="0" tIns="0" bIns="0">
-            <a:spAutoFit/>
-          </a:bodyPr>
-          <a:lstStyle/>
-          <a:p>
-            <a:pPr algn="l">
-              <a:lnSpc>
-                <a:spcPct val="100000"/>
-              </a:lnSpc>
-              <a:spcAft>
-                <a:spcPts val="0"/>
-              </a:spcAft>
-            </a:pPr>
-            <a:r>
-              <a:rPr sz="1100" b="1">
-                <a:solidFill>
-                  <a:srgbClr val="6B7488"/>
-                </a:solidFill>
-                <a:latin typeface="微软雅黑"/>
-              </a:rPr>
-              <a:t>不具备 · 程序化几何渲染的能力边界</a:t>
-            </a:r>
-          </a:p>
-        </p:txBody>
-      </p:sp>
-      <p:sp>
-        <p:nvSpPr>
-          <p:cNvPr id="28" name="Rounded Rectangle 27"/>
-          <p:cNvSpPr/>
-          <p:nvPr/>
-        </p:nvSpPr>
-        <p:spPr>
-          <a:xfrm>
-            <a:off x="841248" y="5815584"/>
-            <a:ext cx="10515600" cy="493776"/>
-          </a:xfrm>
-          <a:prstGeom prst="roundRect">
-            <a:avLst>
-              <a:gd name="adj" fmla="val 9000"/>
-            </a:avLst>
-          </a:prstGeom>
-          <a:solidFill>
-            <a:srgbClr val="161A26"/>
-          </a:solidFill>
-          <a:ln w="9525">
-            <a:solidFill>
-              <a:srgbClr val="2A3144"/>
-            </a:solidFill>
-          </a:ln>
-          <a:effectLst/>
-        </p:spPr>
-        <p:style>
-          <a:lnRef idx="1">
-            <a:schemeClr val="accent1"/>
-          </a:lnRef>
-          <a:fillRef idx="3">
-            <a:schemeClr val="accent1"/>
-          </a:fillRef>
-          <a:effectRef idx="2">
-            <a:schemeClr val="accent1"/>
-          </a:effectRef>
-          <a:fontRef idx="minor">
-            <a:schemeClr val="lt1"/>
-          </a:fontRef>
-        </p:style>
-        <p:txBody>
-          <a:bodyPr rtlCol="0" anchor="ctr"/>
-          <a:lstStyle/>
-          <a:p>
-            <a:pPr algn="ctr"/>
-          </a:p>
-        </p:txBody>
-      </p:sp>
-      <p:sp>
-        <p:nvSpPr>
-          <p:cNvPr id="29" name="TextBox 28"/>
-          <p:cNvSpPr txBox="1"/>
-          <p:nvPr/>
-        </p:nvSpPr>
-        <p:spPr>
-          <a:xfrm>
-            <a:off x="1143000" y="5815584"/>
-            <a:ext cx="3291840" cy="493776"/>
-          </a:xfrm>
-          <a:prstGeom prst="rect">
-            <a:avLst/>
-          </a:prstGeom>
-          <a:noFill/>
-        </p:spPr>
-        <p:txBody>
-          <a:bodyPr wrap="square" anchor="ctr" lIns="0" rIns="0" tIns="0" bIns="0">
-            <a:spAutoFit/>
-          </a:bodyPr>
-          <a:lstStyle/>
-          <a:p>
-            <a:pPr algn="l">
-              <a:lnSpc>
-                <a:spcPct val="100000"/>
-              </a:lnSpc>
-              <a:spcAft>
-                <a:spcPts val="0"/>
-              </a:spcAft>
-            </a:pPr>
-            <a:r>
-              <a:rPr sz="1200" b="1">
-                <a:solidFill>
-                  <a:srgbClr val="E8EBF2"/>
-                </a:solidFill>
-                <a:latin typeface="微软雅黑"/>
-              </a:rPr>
-              <a:t>真实支付接入</a:t>
-            </a:r>
-          </a:p>
-        </p:txBody>
-      </p:sp>
-      <p:sp>
-        <p:nvSpPr>
-          <p:cNvPr id="30" name="TextBox 29"/>
-          <p:cNvSpPr txBox="1"/>
-          <p:nvPr/>
-        </p:nvSpPr>
-        <p:spPr>
-          <a:xfrm>
-            <a:off x="4663440" y="5815584"/>
-            <a:ext cx="6492240" cy="493776"/>
-          </a:xfrm>
-          <a:prstGeom prst="rect">
-            <a:avLst/>
-          </a:prstGeom>
-          <a:noFill/>
-        </p:spPr>
-        <p:txBody>
-          <a:bodyPr wrap="square" anchor="ctr" lIns="0" rIns="0" tIns="0" bIns="0">
-            <a:spAutoFit/>
-          </a:bodyPr>
-          <a:lstStyle/>
-          <a:p>
-            <a:pPr algn="l">
-              <a:lnSpc>
-                <a:spcPct val="100000"/>
-              </a:lnSpc>
-              <a:spcAft>
-                <a:spcPts val="0"/>
-              </a:spcAft>
-            </a:pPr>
-            <a:r>
-              <a:rPr sz="1100" b="1">
-                <a:solidFill>
-                  <a:srgbClr val="6B7488"/>
-                </a:solidFill>
-                <a:latin typeface="微软雅黑"/>
-              </a:rPr>
-              <a:t>规划中 · 皮肤购买仍为模拟流程</a:t>
-            </a:r>
-          </a:p>
-        </p:txBody>
-      </p:sp>
-      <p:sp>
-        <p:nvSpPr>
-          <p:cNvPr id="31" name="Rounded Rectangle 30"/>
-          <p:cNvSpPr/>
-          <p:nvPr/>
-        </p:nvSpPr>
-        <p:spPr>
-          <a:xfrm>
-            <a:off x="841248" y="6391656"/>
-            <a:ext cx="10515600" cy="493776"/>
-          </a:xfrm>
-          <a:prstGeom prst="roundRect">
-            <a:avLst>
-              <a:gd name="adj" fmla="val 9000"/>
-            </a:avLst>
-          </a:prstGeom>
-          <a:solidFill>
-            <a:srgbClr val="161A26"/>
-          </a:solidFill>
-          <a:ln w="9525">
-            <a:solidFill>
-              <a:srgbClr val="2A3144"/>
-            </a:solidFill>
-          </a:ln>
-          <a:effectLst/>
-        </p:spPr>
-        <p:style>
-          <a:lnRef idx="1">
-            <a:schemeClr val="accent1"/>
-          </a:lnRef>
-          <a:fillRef idx="3">
-            <a:schemeClr val="accent1"/>
-          </a:fillRef>
-          <a:effectRef idx="2">
-            <a:schemeClr val="accent1"/>
-          </a:effectRef>
-          <a:fontRef idx="minor">
-            <a:schemeClr val="lt1"/>
-          </a:fontRef>
-        </p:style>
-        <p:txBody>
-          <a:bodyPr rtlCol="0" anchor="ctr"/>
-          <a:lstStyle/>
-          <a:p>
-            <a:pPr algn="ctr"/>
-          </a:p>
-        </p:txBody>
-      </p:sp>
-      <p:sp>
-        <p:nvSpPr>
-          <p:cNvPr id="32" name="TextBox 31"/>
-          <p:cNvSpPr txBox="1"/>
-          <p:nvPr/>
-        </p:nvSpPr>
-        <p:spPr>
-          <a:xfrm>
-            <a:off x="1143000" y="6391656"/>
-            <a:ext cx="3291840" cy="493776"/>
-          </a:xfrm>
-          <a:prstGeom prst="rect">
-            <a:avLst/>
-          </a:prstGeom>
-          <a:noFill/>
-        </p:spPr>
-        <p:txBody>
-          <a:bodyPr wrap="square" anchor="ctr" lIns="0" rIns="0" tIns="0" bIns="0">
-            <a:spAutoFit/>
-          </a:bodyPr>
-          <a:lstStyle/>
-          <a:p>
-            <a:pPr algn="l">
-              <a:lnSpc>
-                <a:spcPct val="100000"/>
-              </a:lnSpc>
-              <a:spcAft>
-                <a:spcPts val="0"/>
-              </a:spcAft>
-            </a:pPr>
-            <a:r>
-              <a:rPr sz="1200" b="1">
-                <a:solidFill>
-                  <a:srgbClr val="E8EBF2"/>
-                </a:solidFill>
-                <a:latin typeface="微软雅黑"/>
-              </a:rPr>
-              <a:t>真实用户数据</a:t>
-            </a:r>
-          </a:p>
-        </p:txBody>
-      </p:sp>
-      <p:sp>
-        <p:nvSpPr>
-          <p:cNvPr id="33" name="TextBox 32"/>
-          <p:cNvSpPr txBox="1"/>
-          <p:nvPr/>
-        </p:nvSpPr>
-        <p:spPr>
-          <a:xfrm>
-            <a:off x="4663440" y="6391656"/>
-            <a:ext cx="6492240" cy="493776"/>
-          </a:xfrm>
-          <a:prstGeom prst="rect">
-            <a:avLst/>
-          </a:prstGeom>
-          <a:noFill/>
-        </p:spPr>
-        <p:txBody>
-          <a:bodyPr wrap="square" anchor="ctr" lIns="0" rIns="0" tIns="0" bIns="0">
-            <a:spAutoFit/>
-          </a:bodyPr>
-          <a:lstStyle/>
-          <a:p>
-            <a:pPr algn="l">
-              <a:lnSpc>
-                <a:spcPct val="100000"/>
-              </a:lnSpc>
-              <a:spcAft>
-                <a:spcPts val="0"/>
-              </a:spcAft>
-            </a:pPr>
-            <a:r>
-              <a:rPr sz="1100" b="1">
-                <a:solidFill>
-                  <a:srgbClr val="6B7488"/>
-                </a:solidFill>
-                <a:latin typeface="微软雅黑"/>
-              </a:rPr>
-              <a:t>暂无 · 游戏已上线未推广，无付费与留存数据</a:t>
+              <a:t>→ 结论：把约束转化为规范（分层结构 + 稀有度规则），是低资源项目做设计系统的正确姿势。</a:t>
             </a:r>
           </a:p>
         </p:txBody>
@@ -11364,25 +11564,67 @@
                 </a:solidFill>
                 <a:latin typeface="微软雅黑"/>
               </a:rPr>
-              <a:t>做完之后的反思</a:t>
-            </a:r>
-          </a:p>
-        </p:txBody>
-      </p:sp>
-      <p:sp>
-        <p:nvSpPr>
-          <p:cNvPr id="6" name="Rounded Rectangle 5"/>
+              <a:t>哪些做了，哪些还没做</a:t>
+            </a:r>
+          </a:p>
+        </p:txBody>
+      </p:sp>
+      <p:sp>
+        <p:nvSpPr>
+          <p:cNvPr id="6" name="TextBox 5"/>
+          <p:cNvSpPr txBox="1"/>
+          <p:nvPr/>
+        </p:nvSpPr>
+        <p:spPr>
+          <a:xfrm>
+            <a:off x="841248" y="1243584"/>
+            <a:ext cx="10607040" cy="457200"/>
+          </a:xfrm>
+          <a:prstGeom prst="rect">
+            <a:avLst/>
+          </a:prstGeom>
+          <a:noFill/>
+        </p:spPr>
+        <p:txBody>
+          <a:bodyPr wrap="square" anchor="t" lIns="0" rIns="0" tIns="0" bIns="0">
+            <a:spAutoFit/>
+          </a:bodyPr>
+          <a:lstStyle/>
+          <a:p>
+            <a:pPr algn="l">
+              <a:lnSpc>
+                <a:spcPct val="122000"/>
+              </a:lnSpc>
+              <a:spcAft>
+                <a:spcPts val="0"/>
+              </a:spcAft>
+            </a:pPr>
+            <a:r>
+              <a:rPr sz="1250" b="0">
+                <a:solidFill>
+                  <a:srgbClr val="98A2B8"/>
+                </a:solidFill>
+                <a:latin typeface="微软雅黑"/>
+              </a:rPr>
+              <a:t>说清楚「没做成什么」，比只列成绩更有价值</a:t>
+            </a:r>
+          </a:p>
+        </p:txBody>
+      </p:sp>
+      <p:sp>
+        <p:nvSpPr>
+          <p:cNvPr id="7" name="Rounded Rectangle 6"/>
           <p:cNvSpPr/>
           <p:nvPr/>
         </p:nvSpPr>
         <p:spPr>
           <a:xfrm>
-            <a:off x="841248" y="1554480"/>
-            <a:ext cx="10515600" cy="1481328"/>
+            <a:off x="841248" y="1783080"/>
+            <a:ext cx="10515600" cy="493776"/>
           </a:xfrm>
           <a:prstGeom prst="roundRect">
             <a:avLst>
-              <a:gd name="adj" fmla="val 5000"/>
+              <a:gd name="adj" fmla="val 9000"/>
             </a:avLst>
           </a:prstGeom>
           <a:solidFill>
@@ -11390,7 +11632,7 @@
           </a:solidFill>
           <a:ln w="9525">
             <a:solidFill>
-              <a:srgbClr val="FBBF24"/>
+              <a:srgbClr val="2A3144"/>
             </a:solidFill>
           </a:ln>
           <a:effectLst/>
@@ -11419,22 +11661,22 @@
       </p:sp>
       <p:sp>
         <p:nvSpPr>
-          <p:cNvPr id="7" name="TextBox 6"/>
-          <p:cNvSpPr txBox="1"/>
-          <p:nvPr/>
-        </p:nvSpPr>
-        <p:spPr>
-          <a:xfrm>
-            <a:off x="1143000" y="1700784"/>
-            <a:ext cx="9966960" cy="320040"/>
-          </a:xfrm>
-          <a:prstGeom prst="rect">
-            <a:avLst/>
-          </a:prstGeom>
-          <a:noFill/>
-        </p:spPr>
-        <p:txBody>
-          <a:bodyPr wrap="square" anchor="t" lIns="0" rIns="0" tIns="0" bIns="0">
+          <p:cNvPr id="8" name="TextBox 7"/>
+          <p:cNvSpPr txBox="1"/>
+          <p:nvPr/>
+        </p:nvSpPr>
+        <p:spPr>
+          <a:xfrm>
+            <a:off x="1143000" y="1783080"/>
+            <a:ext cx="3291840" cy="493776"/>
+          </a:xfrm>
+          <a:prstGeom prst="rect">
+            <a:avLst/>
+          </a:prstGeom>
+          <a:noFill/>
+        </p:spPr>
+        <p:txBody>
+          <a:bodyPr wrap="square" anchor="ctr" lIns="0" rIns="0" tIns="0" bIns="0">
             <a:spAutoFit/>
           </a:bodyPr>
           <a:lstStyle/>
@@ -11448,73 +11690,73 @@
               </a:spcAft>
             </a:pPr>
             <a:r>
-              <a:rPr sz="1350" b="1">
-                <a:solidFill>
-                  <a:srgbClr val="FBBF24"/>
-                </a:solidFill>
-                <a:latin typeface="微软雅黑"/>
-              </a:rPr>
-              <a:t>1. 我一开始差点把它做成「美术练习」</a:t>
-            </a:r>
-          </a:p>
-        </p:txBody>
-      </p:sp>
-      <p:sp>
-        <p:nvSpPr>
-          <p:cNvPr id="8" name="TextBox 7"/>
-          <p:cNvSpPr txBox="1"/>
-          <p:nvPr/>
-        </p:nvSpPr>
-        <p:spPr>
-          <a:xfrm>
-            <a:off x="1143000" y="2084832"/>
-            <a:ext cx="9966960" cy="868680"/>
-          </a:xfrm>
-          <a:prstGeom prst="rect">
-            <a:avLst/>
-          </a:prstGeom>
-          <a:noFill/>
-        </p:spPr>
-        <p:txBody>
-          <a:bodyPr wrap="square" anchor="t" lIns="0" rIns="0" tIns="0" bIns="0">
-            <a:spAutoFit/>
-          </a:bodyPr>
-          <a:lstStyle/>
-          <a:p>
-            <a:pPr algn="l">
-              <a:lnSpc>
-                <a:spcPct val="128000"/>
-              </a:lnSpc>
-              <a:spcAft>
-                <a:spcPts val="0"/>
-              </a:spcAft>
-            </a:pPr>
-            <a:r>
-              <a:rPr sz="1080" b="0">
-                <a:solidFill>
-                  <a:srgbClr val="98A2B8"/>
-                </a:solidFill>
-                <a:latin typeface="微软雅黑"/>
-              </a:rPr>
-              <a:t>最初接到「美化皮肤」的需求，我的第一反应是「怎么画得更好看」。但想清楚之后发现，这个系统的病根不是审美，而是皮肤在商业结构里没有位置——没有稀有度、没有价值差、没有拥有感。如果我只把六个圆画得更漂亮，问题一个都没解决。产品经理的价值在于识别「这是结构问题还是表现问题」，而这次是前者。</a:t>
-            </a:r>
-          </a:p>
-        </p:txBody>
-      </p:sp>
-      <p:sp>
-        <p:nvSpPr>
-          <p:cNvPr id="9" name="Rounded Rectangle 8"/>
+              <a:rPr sz="1200" b="1">
+                <a:solidFill>
+                  <a:srgbClr val="E8EBF2"/>
+                </a:solidFill>
+                <a:latin typeface="微软雅黑"/>
+              </a:rPr>
+              <a:t>六套皮肤分层渲染</a:t>
+            </a:r>
+          </a:p>
+        </p:txBody>
+      </p:sp>
+      <p:sp>
+        <p:nvSpPr>
+          <p:cNvPr id="9" name="TextBox 8"/>
+          <p:cNvSpPr txBox="1"/>
+          <p:nvPr/>
+        </p:nvSpPr>
+        <p:spPr>
+          <a:xfrm>
+            <a:off x="4663440" y="1783080"/>
+            <a:ext cx="6492240" cy="493776"/>
+          </a:xfrm>
+          <a:prstGeom prst="rect">
+            <a:avLst/>
+          </a:prstGeom>
+          <a:noFill/>
+        </p:spPr>
+        <p:txBody>
+          <a:bodyPr wrap="square" anchor="ctr" lIns="0" rIns="0" tIns="0" bIns="0">
+            <a:spAutoFit/>
+          </a:bodyPr>
+          <a:lstStyle/>
+          <a:p>
+            <a:pPr algn="l">
+              <a:lnSpc>
+                <a:spcPct val="100000"/>
+              </a:lnSpc>
+              <a:spcAft>
+                <a:spcPts val="0"/>
+              </a:spcAft>
+            </a:pPr>
+            <a:r>
+              <a:rPr sz="1100" b="0">
+                <a:solidFill>
+                  <a:srgbClr val="34D399"/>
+                </a:solidFill>
+                <a:latin typeface="微软雅黑"/>
+              </a:rPr>
+              <a:t>已上线</a:t>
+            </a:r>
+          </a:p>
+        </p:txBody>
+      </p:sp>
+      <p:sp>
+        <p:nvSpPr>
+          <p:cNvPr id="10" name="Rounded Rectangle 9"/>
           <p:cNvSpPr/>
           <p:nvPr/>
         </p:nvSpPr>
         <p:spPr>
           <a:xfrm>
-            <a:off x="841248" y="3182112"/>
-            <a:ext cx="10515600" cy="1481328"/>
+            <a:off x="841248" y="2359152"/>
+            <a:ext cx="10515600" cy="493776"/>
           </a:xfrm>
           <a:prstGeom prst="roundRect">
             <a:avLst>
-              <a:gd name="adj" fmla="val 5000"/>
+              <a:gd name="adj" fmla="val 9000"/>
             </a:avLst>
           </a:prstGeom>
           <a:solidFill>
@@ -11522,7 +11764,7 @@
           </a:solidFill>
           <a:ln w="9525">
             <a:solidFill>
-              <a:srgbClr val="FBBF24"/>
+              <a:srgbClr val="2A3144"/>
             </a:solidFill>
           </a:ln>
           <a:effectLst/>
@@ -11551,22 +11793,22 @@
       </p:sp>
       <p:sp>
         <p:nvSpPr>
-          <p:cNvPr id="10" name="TextBox 9"/>
-          <p:cNvSpPr txBox="1"/>
-          <p:nvPr/>
-        </p:nvSpPr>
-        <p:spPr>
-          <a:xfrm>
-            <a:off x="1143000" y="3328416"/>
-            <a:ext cx="9966960" cy="320040"/>
-          </a:xfrm>
-          <a:prstGeom prst="rect">
-            <a:avLst/>
-          </a:prstGeom>
-          <a:noFill/>
-        </p:spPr>
-        <p:txBody>
-          <a:bodyPr wrap="square" anchor="t" lIns="0" rIns="0" tIns="0" bIns="0">
+          <p:cNvPr id="11" name="TextBox 10"/>
+          <p:cNvSpPr txBox="1"/>
+          <p:nvPr/>
+        </p:nvSpPr>
+        <p:spPr>
+          <a:xfrm>
+            <a:off x="1143000" y="2359152"/>
+            <a:ext cx="3291840" cy="493776"/>
+          </a:xfrm>
+          <a:prstGeom prst="rect">
+            <a:avLst/>
+          </a:prstGeom>
+          <a:noFill/>
+        </p:spPr>
+        <p:txBody>
+          <a:bodyPr wrap="square" anchor="ctr" lIns="0" rIns="0" tIns="0" bIns="0">
             <a:spAutoFit/>
           </a:bodyPr>
           <a:lstStyle/>
@@ -11580,73 +11822,73 @@
               </a:spcAft>
             </a:pPr>
             <a:r>
-              <a:rPr sz="1350" b="1">
-                <a:solidFill>
-                  <a:srgbClr val="FBBF24"/>
-                </a:solidFill>
-                <a:latin typeface="微软雅黑"/>
-              </a:rPr>
-              <a:t>2. 最难的设计决策是「暗影刺客怎么被看见」</a:t>
-            </a:r>
-          </a:p>
-        </p:txBody>
-      </p:sp>
-      <p:sp>
-        <p:nvSpPr>
-          <p:cNvPr id="11" name="TextBox 10"/>
-          <p:cNvSpPr txBox="1"/>
-          <p:nvPr/>
-        </p:nvSpPr>
-        <p:spPr>
-          <a:xfrm>
-            <a:off x="1143000" y="3712464"/>
-            <a:ext cx="9966960" cy="868680"/>
-          </a:xfrm>
-          <a:prstGeom prst="rect">
-            <a:avLst/>
-          </a:prstGeom>
-          <a:noFill/>
-        </p:spPr>
-        <p:txBody>
-          <a:bodyPr wrap="square" anchor="t" lIns="0" rIns="0" tIns="0" bIns="0">
-            <a:spAutoFit/>
-          </a:bodyPr>
-          <a:lstStyle/>
-          <a:p>
-            <a:pPr algn="l">
-              <a:lnSpc>
-                <a:spcPct val="128000"/>
-              </a:lnSpc>
-              <a:spcAft>
-                <a:spcPts val="0"/>
-              </a:spcAft>
-            </a:pPr>
-            <a:r>
-              <a:rPr sz="1080" b="0">
-                <a:solidFill>
-                  <a:srgbClr val="98A2B8"/>
-                </a:solidFill>
-                <a:latin typeface="微软雅黑"/>
-              </a:rPr>
-              <a:t>这套皮肤逼我做了一次真正的取舍：名字要求它「暗」，但游戏背景本身就是暗的，做得越暗越不可玩。最后我的解法是放弃用填充色表达存在感，改用发光描边与光点来「在黑暗里制造存在」。这让我理解了一个更普遍的道理——当需求和约束正面冲突时，不要在同一个维度上死磕（把暗色调亮一点），而要换一个维度解决（用光而不是色）。</a:t>
-            </a:r>
-          </a:p>
-        </p:txBody>
-      </p:sp>
-      <p:sp>
-        <p:nvSpPr>
-          <p:cNvPr id="12" name="Rounded Rectangle 11"/>
+              <a:rPr sz="1200" b="1">
+                <a:solidFill>
+                  <a:srgbClr val="E8EBF2"/>
+                </a:solidFill>
+                <a:latin typeface="微软雅黑"/>
+              </a:rPr>
+              <a:t>稀有度四档体系</a:t>
+            </a:r>
+          </a:p>
+        </p:txBody>
+      </p:sp>
+      <p:sp>
+        <p:nvSpPr>
+          <p:cNvPr id="12" name="TextBox 11"/>
+          <p:cNvSpPr txBox="1"/>
+          <p:nvPr/>
+        </p:nvSpPr>
+        <p:spPr>
+          <a:xfrm>
+            <a:off x="4663440" y="2359152"/>
+            <a:ext cx="6492240" cy="493776"/>
+          </a:xfrm>
+          <a:prstGeom prst="rect">
+            <a:avLst/>
+          </a:prstGeom>
+          <a:noFill/>
+        </p:spPr>
+        <p:txBody>
+          <a:bodyPr wrap="square" anchor="ctr" lIns="0" rIns="0" tIns="0" bIns="0">
+            <a:spAutoFit/>
+          </a:bodyPr>
+          <a:lstStyle/>
+          <a:p>
+            <a:pPr algn="l">
+              <a:lnSpc>
+                <a:spcPct val="100000"/>
+              </a:lnSpc>
+              <a:spcAft>
+                <a:spcPts val="0"/>
+              </a:spcAft>
+            </a:pPr>
+            <a:r>
+              <a:rPr sz="1100" b="0">
+                <a:solidFill>
+                  <a:srgbClr val="34D399"/>
+                </a:solidFill>
+                <a:latin typeface="微软雅黑"/>
+              </a:rPr>
+              <a:t>已上线</a:t>
+            </a:r>
+          </a:p>
+        </p:txBody>
+      </p:sp>
+      <p:sp>
+        <p:nvSpPr>
+          <p:cNvPr id="13" name="Rounded Rectangle 12"/>
           <p:cNvSpPr/>
           <p:nvPr/>
         </p:nvSpPr>
         <p:spPr>
           <a:xfrm>
-            <a:off x="841248" y="4809744"/>
-            <a:ext cx="10515600" cy="1481328"/>
+            <a:off x="841248" y="2935224"/>
+            <a:ext cx="10515600" cy="493776"/>
           </a:xfrm>
           <a:prstGeom prst="roundRect">
             <a:avLst>
-              <a:gd name="adj" fmla="val 5000"/>
+              <a:gd name="adj" fmla="val 9000"/>
             </a:avLst>
           </a:prstGeom>
           <a:solidFill>
@@ -11654,7 +11896,7 @@
           </a:solidFill>
           <a:ln w="9525">
             <a:solidFill>
-              <a:srgbClr val="FBBF24"/>
+              <a:srgbClr val="2A3144"/>
             </a:solidFill>
           </a:ln>
           <a:effectLst/>
@@ -11683,22 +11925,22 @@
       </p:sp>
       <p:sp>
         <p:nvSpPr>
-          <p:cNvPr id="13" name="TextBox 12"/>
-          <p:cNvSpPr txBox="1"/>
-          <p:nvPr/>
-        </p:nvSpPr>
-        <p:spPr>
-          <a:xfrm>
-            <a:off x="1143000" y="4956048"/>
-            <a:ext cx="9966960" cy="320040"/>
-          </a:xfrm>
-          <a:prstGeom prst="rect">
-            <a:avLst/>
-          </a:prstGeom>
-          <a:noFill/>
-        </p:spPr>
-        <p:txBody>
-          <a:bodyPr wrap="square" anchor="t" lIns="0" rIns="0" tIns="0" bIns="0">
+          <p:cNvPr id="14" name="TextBox 13"/>
+          <p:cNvSpPr txBox="1"/>
+          <p:nvPr/>
+        </p:nvSpPr>
+        <p:spPr>
+          <a:xfrm>
+            <a:off x="1143000" y="2935224"/>
+            <a:ext cx="3291840" cy="493776"/>
+          </a:xfrm>
+          <a:prstGeom prst="rect">
+            <a:avLst/>
+          </a:prstGeom>
+          <a:noFill/>
+        </p:spPr>
+        <p:txBody>
+          <a:bodyPr wrap="square" anchor="ctr" lIns="0" rIns="0" tIns="0" bIns="0">
             <a:spAutoFit/>
           </a:bodyPr>
           <a:lstStyle/>
@@ -11712,55 +11954,847 @@
               </a:spcAft>
             </a:pPr>
             <a:r>
-              <a:rPr sz="1350" b="1">
-                <a:solidFill>
-                  <a:srgbClr val="FBBF24"/>
-                </a:solidFill>
-                <a:latin typeface="微软雅黑"/>
-              </a:rPr>
-              <a:t>3. 我验证自己工作的方式，比结果更值得说</a:t>
-            </a:r>
-          </a:p>
-        </p:txBody>
-      </p:sp>
-      <p:sp>
-        <p:nvSpPr>
-          <p:cNvPr id="14" name="TextBox 13"/>
-          <p:cNvSpPr txBox="1"/>
-          <p:nvPr/>
-        </p:nvSpPr>
-        <p:spPr>
-          <a:xfrm>
-            <a:off x="1143000" y="5340096"/>
-            <a:ext cx="9966960" cy="868680"/>
-          </a:xfrm>
-          <a:prstGeom prst="rect">
-            <a:avLst/>
-          </a:prstGeom>
-          <a:noFill/>
-        </p:spPr>
-        <p:txBody>
-          <a:bodyPr wrap="square" anchor="t" lIns="0" rIns="0" tIns="0" bIns="0">
-            <a:spAutoFit/>
-          </a:bodyPr>
-          <a:lstStyle/>
-          <a:p>
-            <a:pPr algn="l">
-              <a:lnSpc>
-                <a:spcPct val="128000"/>
-              </a:lnSpc>
-              <a:spcAft>
-                <a:spcPts val="0"/>
-              </a:spcAft>
-            </a:pPr>
-            <a:r>
-              <a:rPr sz="1080" b="0">
-                <a:solidFill>
-                  <a:srgbClr val="98A2B8"/>
-                </a:solidFill>
-                <a:latin typeface="微软雅黑"/>
-              </a:rPr>
-              <a:t>中途我一度以为「虚空领主」没渲染出来——因为截图里角色所在位置是一团红色。后来我直接读取 canvas 的像素数据，才发现是敌人贴身围攻覆盖了角色，皮肤其实正常渲染。这让我意识到：凭截图和直觉判断会得出错误结论，产品判断要建立在可测量的证据上。这个习惯最后反过来让我发现了真正的可读性问题，并做了针对性修复。</a:t>
+              <a:rPr sz="1200" b="1">
+                <a:solidFill>
+                  <a:srgbClr val="E8EBF2"/>
+                </a:solidFill>
+                <a:latin typeface="微软雅黑"/>
+              </a:rPr>
+              <a:t>商店实时动效预览</a:t>
+            </a:r>
+          </a:p>
+        </p:txBody>
+      </p:sp>
+      <p:sp>
+        <p:nvSpPr>
+          <p:cNvPr id="15" name="TextBox 14"/>
+          <p:cNvSpPr txBox="1"/>
+          <p:nvPr/>
+        </p:nvSpPr>
+        <p:spPr>
+          <a:xfrm>
+            <a:off x="4663440" y="2935224"/>
+            <a:ext cx="6492240" cy="493776"/>
+          </a:xfrm>
+          <a:prstGeom prst="rect">
+            <a:avLst/>
+          </a:prstGeom>
+          <a:noFill/>
+        </p:spPr>
+        <p:txBody>
+          <a:bodyPr wrap="square" anchor="ctr" lIns="0" rIns="0" tIns="0" bIns="0">
+            <a:spAutoFit/>
+          </a:bodyPr>
+          <a:lstStyle/>
+          <a:p>
+            <a:pPr algn="l">
+              <a:lnSpc>
+                <a:spcPct val="100000"/>
+              </a:lnSpc>
+              <a:spcAft>
+                <a:spcPts val="0"/>
+              </a:spcAft>
+            </a:pPr>
+            <a:r>
+              <a:rPr sz="1100" b="0">
+                <a:solidFill>
+                  <a:srgbClr val="34D399"/>
+                </a:solidFill>
+                <a:latin typeface="微软雅黑"/>
+              </a:rPr>
+              <a:t>已上线</a:t>
+            </a:r>
+          </a:p>
+        </p:txBody>
+      </p:sp>
+      <p:sp>
+        <p:nvSpPr>
+          <p:cNvPr id="16" name="Rounded Rectangle 15"/>
+          <p:cNvSpPr/>
+          <p:nvPr/>
+        </p:nvSpPr>
+        <p:spPr>
+          <a:xfrm>
+            <a:off x="841248" y="3511296"/>
+            <a:ext cx="10515600" cy="493776"/>
+          </a:xfrm>
+          <a:prstGeom prst="roundRect">
+            <a:avLst>
+              <a:gd name="adj" fmla="val 9000"/>
+            </a:avLst>
+          </a:prstGeom>
+          <a:solidFill>
+            <a:srgbClr val="161A26"/>
+          </a:solidFill>
+          <a:ln w="9525">
+            <a:solidFill>
+              <a:srgbClr val="2A3144"/>
+            </a:solidFill>
+          </a:ln>
+          <a:effectLst/>
+        </p:spPr>
+        <p:style>
+          <a:lnRef idx="1">
+            <a:schemeClr val="accent1"/>
+          </a:lnRef>
+          <a:fillRef idx="3">
+            <a:schemeClr val="accent1"/>
+          </a:fillRef>
+          <a:effectRef idx="2">
+            <a:schemeClr val="accent1"/>
+          </a:effectRef>
+          <a:fontRef idx="minor">
+            <a:schemeClr val="lt1"/>
+          </a:fontRef>
+        </p:style>
+        <p:txBody>
+          <a:bodyPr rtlCol="0" anchor="ctr"/>
+          <a:lstStyle/>
+          <a:p>
+            <a:pPr algn="ctr"/>
+          </a:p>
+        </p:txBody>
+      </p:sp>
+      <p:sp>
+        <p:nvSpPr>
+          <p:cNvPr id="17" name="TextBox 16"/>
+          <p:cNvSpPr txBox="1"/>
+          <p:nvPr/>
+        </p:nvSpPr>
+        <p:spPr>
+          <a:xfrm>
+            <a:off x="1143000" y="3511296"/>
+            <a:ext cx="3291840" cy="493776"/>
+          </a:xfrm>
+          <a:prstGeom prst="rect">
+            <a:avLst/>
+          </a:prstGeom>
+          <a:noFill/>
+        </p:spPr>
+        <p:txBody>
+          <a:bodyPr wrap="square" anchor="ctr" lIns="0" rIns="0" tIns="0" bIns="0">
+            <a:spAutoFit/>
+          </a:bodyPr>
+          <a:lstStyle/>
+          <a:p>
+            <a:pPr algn="l">
+              <a:lnSpc>
+                <a:spcPct val="100000"/>
+              </a:lnSpc>
+              <a:spcAft>
+                <a:spcPts val="0"/>
+              </a:spcAft>
+            </a:pPr>
+            <a:r>
+              <a:rPr sz="1200" b="1">
+                <a:solidFill>
+                  <a:srgbClr val="E8EBF2"/>
+                </a:solidFill>
+                <a:latin typeface="微软雅黑"/>
+              </a:rPr>
+              <a:t>可读性底衬（剪影保障）</a:t>
+            </a:r>
+          </a:p>
+        </p:txBody>
+      </p:sp>
+      <p:sp>
+        <p:nvSpPr>
+          <p:cNvPr id="18" name="TextBox 17"/>
+          <p:cNvSpPr txBox="1"/>
+          <p:nvPr/>
+        </p:nvSpPr>
+        <p:spPr>
+          <a:xfrm>
+            <a:off x="4663440" y="3511296"/>
+            <a:ext cx="6492240" cy="493776"/>
+          </a:xfrm>
+          <a:prstGeom prst="rect">
+            <a:avLst/>
+          </a:prstGeom>
+          <a:noFill/>
+        </p:spPr>
+        <p:txBody>
+          <a:bodyPr wrap="square" anchor="ctr" lIns="0" rIns="0" tIns="0" bIns="0">
+            <a:spAutoFit/>
+          </a:bodyPr>
+          <a:lstStyle/>
+          <a:p>
+            <a:pPr algn="l">
+              <a:lnSpc>
+                <a:spcPct val="100000"/>
+              </a:lnSpc>
+              <a:spcAft>
+                <a:spcPts val="0"/>
+              </a:spcAft>
+            </a:pPr>
+            <a:r>
+              <a:rPr sz="1100" b="0">
+                <a:solidFill>
+                  <a:srgbClr val="34D399"/>
+                </a:solidFill>
+                <a:latin typeface="微软雅黑"/>
+              </a:rPr>
+              <a:t>已上线</a:t>
+            </a:r>
+          </a:p>
+        </p:txBody>
+      </p:sp>
+      <p:sp>
+        <p:nvSpPr>
+          <p:cNvPr id="19" name="Rounded Rectangle 18"/>
+          <p:cNvSpPr/>
+          <p:nvPr/>
+        </p:nvSpPr>
+        <p:spPr>
+          <a:xfrm>
+            <a:off x="841248" y="4087368"/>
+            <a:ext cx="10515600" cy="493776"/>
+          </a:xfrm>
+          <a:prstGeom prst="roundRect">
+            <a:avLst>
+              <a:gd name="adj" fmla="val 9000"/>
+            </a:avLst>
+          </a:prstGeom>
+          <a:solidFill>
+            <a:srgbClr val="161A26"/>
+          </a:solidFill>
+          <a:ln w="9525">
+            <a:solidFill>
+              <a:srgbClr val="2A3144"/>
+            </a:solidFill>
+          </a:ln>
+          <a:effectLst/>
+        </p:spPr>
+        <p:style>
+          <a:lnRef idx="1">
+            <a:schemeClr val="accent1"/>
+          </a:lnRef>
+          <a:fillRef idx="3">
+            <a:schemeClr val="accent1"/>
+          </a:fillRef>
+          <a:effectRef idx="2">
+            <a:schemeClr val="accent1"/>
+          </a:effectRef>
+          <a:fontRef idx="minor">
+            <a:schemeClr val="lt1"/>
+          </a:fontRef>
+        </p:style>
+        <p:txBody>
+          <a:bodyPr rtlCol="0" anchor="ctr"/>
+          <a:lstStyle/>
+          <a:p>
+            <a:pPr algn="ctr"/>
+          </a:p>
+        </p:txBody>
+      </p:sp>
+      <p:sp>
+        <p:nvSpPr>
+          <p:cNvPr id="20" name="TextBox 19"/>
+          <p:cNvSpPr txBox="1"/>
+          <p:nvPr/>
+        </p:nvSpPr>
+        <p:spPr>
+          <a:xfrm>
+            <a:off x="1143000" y="4087368"/>
+            <a:ext cx="3291840" cy="493776"/>
+          </a:xfrm>
+          <a:prstGeom prst="rect">
+            <a:avLst/>
+          </a:prstGeom>
+          <a:noFill/>
+        </p:spPr>
+        <p:txBody>
+          <a:bodyPr wrap="square" anchor="ctr" lIns="0" rIns="0" tIns="0" bIns="0">
+            <a:spAutoFit/>
+          </a:bodyPr>
+          <a:lstStyle/>
+          <a:p>
+            <a:pPr algn="l">
+              <a:lnSpc>
+                <a:spcPct val="100000"/>
+              </a:lnSpc>
+              <a:spcAft>
+                <a:spcPts val="0"/>
+              </a:spcAft>
+            </a:pPr>
+            <a:r>
+              <a:rPr sz="1200" b="1">
+                <a:solidFill>
+                  <a:srgbClr val="E8EBF2"/>
+                </a:solidFill>
+                <a:latin typeface="微软雅黑"/>
+              </a:rPr>
+              <a:t>移动端性能降级</a:t>
+            </a:r>
+          </a:p>
+        </p:txBody>
+      </p:sp>
+      <p:sp>
+        <p:nvSpPr>
+          <p:cNvPr id="21" name="TextBox 20"/>
+          <p:cNvSpPr txBox="1"/>
+          <p:nvPr/>
+        </p:nvSpPr>
+        <p:spPr>
+          <a:xfrm>
+            <a:off x="4663440" y="4087368"/>
+            <a:ext cx="6492240" cy="493776"/>
+          </a:xfrm>
+          <a:prstGeom prst="rect">
+            <a:avLst/>
+          </a:prstGeom>
+          <a:noFill/>
+        </p:spPr>
+        <p:txBody>
+          <a:bodyPr wrap="square" anchor="ctr" lIns="0" rIns="0" tIns="0" bIns="0">
+            <a:spAutoFit/>
+          </a:bodyPr>
+          <a:lstStyle/>
+          <a:p>
+            <a:pPr algn="l">
+              <a:lnSpc>
+                <a:spcPct val="100000"/>
+              </a:lnSpc>
+              <a:spcAft>
+                <a:spcPts val="0"/>
+              </a:spcAft>
+            </a:pPr>
+            <a:r>
+              <a:rPr sz="1100" b="0">
+                <a:solidFill>
+                  <a:srgbClr val="34D399"/>
+                </a:solidFill>
+                <a:latin typeface="微软雅黑"/>
+              </a:rPr>
+              <a:t>已上线</a:t>
+            </a:r>
+          </a:p>
+        </p:txBody>
+      </p:sp>
+      <p:sp>
+        <p:nvSpPr>
+          <p:cNvPr id="22" name="Rounded Rectangle 21"/>
+          <p:cNvSpPr/>
+          <p:nvPr/>
+        </p:nvSpPr>
+        <p:spPr>
+          <a:xfrm>
+            <a:off x="841248" y="4663440"/>
+            <a:ext cx="10515600" cy="493776"/>
+          </a:xfrm>
+          <a:prstGeom prst="roundRect">
+            <a:avLst>
+              <a:gd name="adj" fmla="val 9000"/>
+            </a:avLst>
+          </a:prstGeom>
+          <a:solidFill>
+            <a:srgbClr val="161A26"/>
+          </a:solidFill>
+          <a:ln w="9525">
+            <a:solidFill>
+              <a:srgbClr val="2A3144"/>
+            </a:solidFill>
+          </a:ln>
+          <a:effectLst/>
+        </p:spPr>
+        <p:style>
+          <a:lnRef idx="1">
+            <a:schemeClr val="accent1"/>
+          </a:lnRef>
+          <a:fillRef idx="3">
+            <a:schemeClr val="accent1"/>
+          </a:fillRef>
+          <a:effectRef idx="2">
+            <a:schemeClr val="accent1"/>
+          </a:effectRef>
+          <a:fontRef idx="minor">
+            <a:schemeClr val="lt1"/>
+          </a:fontRef>
+        </p:style>
+        <p:txBody>
+          <a:bodyPr rtlCol="0" anchor="ctr"/>
+          <a:lstStyle/>
+          <a:p>
+            <a:pPr algn="ctr"/>
+          </a:p>
+        </p:txBody>
+      </p:sp>
+      <p:sp>
+        <p:nvSpPr>
+          <p:cNvPr id="23" name="TextBox 22"/>
+          <p:cNvSpPr txBox="1"/>
+          <p:nvPr/>
+        </p:nvSpPr>
+        <p:spPr>
+          <a:xfrm>
+            <a:off x="1143000" y="4663440"/>
+            <a:ext cx="3291840" cy="493776"/>
+          </a:xfrm>
+          <a:prstGeom prst="rect">
+            <a:avLst/>
+          </a:prstGeom>
+          <a:noFill/>
+        </p:spPr>
+        <p:txBody>
+          <a:bodyPr wrap="square" anchor="ctr" lIns="0" rIns="0" tIns="0" bIns="0">
+            <a:spAutoFit/>
+          </a:bodyPr>
+          <a:lstStyle/>
+          <a:p>
+            <a:pPr algn="l">
+              <a:lnSpc>
+                <a:spcPct val="100000"/>
+              </a:lnSpc>
+              <a:spcAft>
+                <a:spcPts val="0"/>
+              </a:spcAft>
+            </a:pPr>
+            <a:r>
+              <a:rPr sz="1200" b="1">
+                <a:solidFill>
+                  <a:srgbClr val="E8EBF2"/>
+                </a:solidFill>
+                <a:latin typeface="微软雅黑"/>
+              </a:rPr>
+              <a:t>皮肤进化 / 战绩绑定</a:t>
+            </a:r>
+          </a:p>
+        </p:txBody>
+      </p:sp>
+      <p:sp>
+        <p:nvSpPr>
+          <p:cNvPr id="24" name="TextBox 23"/>
+          <p:cNvSpPr txBox="1"/>
+          <p:nvPr/>
+        </p:nvSpPr>
+        <p:spPr>
+          <a:xfrm>
+            <a:off x="4663440" y="4663440"/>
+            <a:ext cx="6492240" cy="493776"/>
+          </a:xfrm>
+          <a:prstGeom prst="rect">
+            <a:avLst/>
+          </a:prstGeom>
+          <a:noFill/>
+        </p:spPr>
+        <p:txBody>
+          <a:bodyPr wrap="square" anchor="ctr" lIns="0" rIns="0" tIns="0" bIns="0">
+            <a:spAutoFit/>
+          </a:bodyPr>
+          <a:lstStyle/>
+          <a:p>
+            <a:pPr algn="l">
+              <a:lnSpc>
+                <a:spcPct val="100000"/>
+              </a:lnSpc>
+              <a:spcAft>
+                <a:spcPts val="0"/>
+              </a:spcAft>
+            </a:pPr>
+            <a:r>
+              <a:rPr sz="1100" b="1">
+                <a:solidFill>
+                  <a:srgbClr val="6B7488"/>
+                </a:solidFill>
+                <a:latin typeface="微软雅黑"/>
+              </a:rPr>
+              <a:t>未落地 · 最能提升留存的方向，尚未接入击杀数驱动的进化</a:t>
+            </a:r>
+          </a:p>
+        </p:txBody>
+      </p:sp>
+      <p:sp>
+        <p:nvSpPr>
+          <p:cNvPr id="25" name="Rounded Rectangle 24"/>
+          <p:cNvSpPr/>
+          <p:nvPr/>
+        </p:nvSpPr>
+        <p:spPr>
+          <a:xfrm>
+            <a:off x="841248" y="5239512"/>
+            <a:ext cx="10515600" cy="493776"/>
+          </a:xfrm>
+          <a:prstGeom prst="roundRect">
+            <a:avLst>
+              <a:gd name="adj" fmla="val 9000"/>
+            </a:avLst>
+          </a:prstGeom>
+          <a:solidFill>
+            <a:srgbClr val="161A26"/>
+          </a:solidFill>
+          <a:ln w="9525">
+            <a:solidFill>
+              <a:srgbClr val="2A3144"/>
+            </a:solidFill>
+          </a:ln>
+          <a:effectLst/>
+        </p:spPr>
+        <p:style>
+          <a:lnRef idx="1">
+            <a:schemeClr val="accent1"/>
+          </a:lnRef>
+          <a:fillRef idx="3">
+            <a:schemeClr val="accent1"/>
+          </a:fillRef>
+          <a:effectRef idx="2">
+            <a:schemeClr val="accent1"/>
+          </a:effectRef>
+          <a:fontRef idx="minor">
+            <a:schemeClr val="lt1"/>
+          </a:fontRef>
+        </p:style>
+        <p:txBody>
+          <a:bodyPr rtlCol="0" anchor="ctr"/>
+          <a:lstStyle/>
+          <a:p>
+            <a:pPr algn="ctr"/>
+          </a:p>
+        </p:txBody>
+      </p:sp>
+      <p:sp>
+        <p:nvSpPr>
+          <p:cNvPr id="26" name="TextBox 25"/>
+          <p:cNvSpPr txBox="1"/>
+          <p:nvPr/>
+        </p:nvSpPr>
+        <p:spPr>
+          <a:xfrm>
+            <a:off x="1143000" y="5239512"/>
+            <a:ext cx="3291840" cy="493776"/>
+          </a:xfrm>
+          <a:prstGeom prst="rect">
+            <a:avLst/>
+          </a:prstGeom>
+          <a:noFill/>
+        </p:spPr>
+        <p:txBody>
+          <a:bodyPr wrap="square" anchor="ctr" lIns="0" rIns="0" tIns="0" bIns="0">
+            <a:spAutoFit/>
+          </a:bodyPr>
+          <a:lstStyle/>
+          <a:p>
+            <a:pPr algn="l">
+              <a:lnSpc>
+                <a:spcPct val="100000"/>
+              </a:lnSpc>
+              <a:spcAft>
+                <a:spcPts val="0"/>
+              </a:spcAft>
+            </a:pPr>
+            <a:r>
+              <a:rPr sz="1200" b="1">
+                <a:solidFill>
+                  <a:srgbClr val="E8EBF2"/>
+                </a:solidFill>
+                <a:latin typeface="微软雅黑"/>
+              </a:rPr>
+              <a:t>手绘级插画质感</a:t>
+            </a:r>
+          </a:p>
+        </p:txBody>
+      </p:sp>
+      <p:sp>
+        <p:nvSpPr>
+          <p:cNvPr id="27" name="TextBox 26"/>
+          <p:cNvSpPr txBox="1"/>
+          <p:nvPr/>
+        </p:nvSpPr>
+        <p:spPr>
+          <a:xfrm>
+            <a:off x="4663440" y="5239512"/>
+            <a:ext cx="6492240" cy="493776"/>
+          </a:xfrm>
+          <a:prstGeom prst="rect">
+            <a:avLst/>
+          </a:prstGeom>
+          <a:noFill/>
+        </p:spPr>
+        <p:txBody>
+          <a:bodyPr wrap="square" anchor="ctr" lIns="0" rIns="0" tIns="0" bIns="0">
+            <a:spAutoFit/>
+          </a:bodyPr>
+          <a:lstStyle/>
+          <a:p>
+            <a:pPr algn="l">
+              <a:lnSpc>
+                <a:spcPct val="100000"/>
+              </a:lnSpc>
+              <a:spcAft>
+                <a:spcPts val="0"/>
+              </a:spcAft>
+            </a:pPr>
+            <a:r>
+              <a:rPr sz="1100" b="1">
+                <a:solidFill>
+                  <a:srgbClr val="6B7488"/>
+                </a:solidFill>
+                <a:latin typeface="微软雅黑"/>
+              </a:rPr>
+              <a:t>不具备 · 程序化几何渲染的能力边界</a:t>
+            </a:r>
+          </a:p>
+        </p:txBody>
+      </p:sp>
+      <p:sp>
+        <p:nvSpPr>
+          <p:cNvPr id="28" name="Rounded Rectangle 27"/>
+          <p:cNvSpPr/>
+          <p:nvPr/>
+        </p:nvSpPr>
+        <p:spPr>
+          <a:xfrm>
+            <a:off x="841248" y="5815584"/>
+            <a:ext cx="10515600" cy="493776"/>
+          </a:xfrm>
+          <a:prstGeom prst="roundRect">
+            <a:avLst>
+              <a:gd name="adj" fmla="val 9000"/>
+            </a:avLst>
+          </a:prstGeom>
+          <a:solidFill>
+            <a:srgbClr val="161A26"/>
+          </a:solidFill>
+          <a:ln w="9525">
+            <a:solidFill>
+              <a:srgbClr val="2A3144"/>
+            </a:solidFill>
+          </a:ln>
+          <a:effectLst/>
+        </p:spPr>
+        <p:style>
+          <a:lnRef idx="1">
+            <a:schemeClr val="accent1"/>
+          </a:lnRef>
+          <a:fillRef idx="3">
+            <a:schemeClr val="accent1"/>
+          </a:fillRef>
+          <a:effectRef idx="2">
+            <a:schemeClr val="accent1"/>
+          </a:effectRef>
+          <a:fontRef idx="minor">
+            <a:schemeClr val="lt1"/>
+          </a:fontRef>
+        </p:style>
+        <p:txBody>
+          <a:bodyPr rtlCol="0" anchor="ctr"/>
+          <a:lstStyle/>
+          <a:p>
+            <a:pPr algn="ctr"/>
+          </a:p>
+        </p:txBody>
+      </p:sp>
+      <p:sp>
+        <p:nvSpPr>
+          <p:cNvPr id="29" name="TextBox 28"/>
+          <p:cNvSpPr txBox="1"/>
+          <p:nvPr/>
+        </p:nvSpPr>
+        <p:spPr>
+          <a:xfrm>
+            <a:off x="1143000" y="5815584"/>
+            <a:ext cx="3291840" cy="493776"/>
+          </a:xfrm>
+          <a:prstGeom prst="rect">
+            <a:avLst/>
+          </a:prstGeom>
+          <a:noFill/>
+        </p:spPr>
+        <p:txBody>
+          <a:bodyPr wrap="square" anchor="ctr" lIns="0" rIns="0" tIns="0" bIns="0">
+            <a:spAutoFit/>
+          </a:bodyPr>
+          <a:lstStyle/>
+          <a:p>
+            <a:pPr algn="l">
+              <a:lnSpc>
+                <a:spcPct val="100000"/>
+              </a:lnSpc>
+              <a:spcAft>
+                <a:spcPts val="0"/>
+              </a:spcAft>
+            </a:pPr>
+            <a:r>
+              <a:rPr sz="1200" b="1">
+                <a:solidFill>
+                  <a:srgbClr val="E8EBF2"/>
+                </a:solidFill>
+                <a:latin typeface="微软雅黑"/>
+              </a:rPr>
+              <a:t>真实支付接入</a:t>
+            </a:r>
+          </a:p>
+        </p:txBody>
+      </p:sp>
+      <p:sp>
+        <p:nvSpPr>
+          <p:cNvPr id="30" name="TextBox 29"/>
+          <p:cNvSpPr txBox="1"/>
+          <p:nvPr/>
+        </p:nvSpPr>
+        <p:spPr>
+          <a:xfrm>
+            <a:off x="4663440" y="5815584"/>
+            <a:ext cx="6492240" cy="493776"/>
+          </a:xfrm>
+          <a:prstGeom prst="rect">
+            <a:avLst/>
+          </a:prstGeom>
+          <a:noFill/>
+        </p:spPr>
+        <p:txBody>
+          <a:bodyPr wrap="square" anchor="ctr" lIns="0" rIns="0" tIns="0" bIns="0">
+            <a:spAutoFit/>
+          </a:bodyPr>
+          <a:lstStyle/>
+          <a:p>
+            <a:pPr algn="l">
+              <a:lnSpc>
+                <a:spcPct val="100000"/>
+              </a:lnSpc>
+              <a:spcAft>
+                <a:spcPts val="0"/>
+              </a:spcAft>
+            </a:pPr>
+            <a:r>
+              <a:rPr sz="1100" b="1">
+                <a:solidFill>
+                  <a:srgbClr val="6B7488"/>
+                </a:solidFill>
+                <a:latin typeface="微软雅黑"/>
+              </a:rPr>
+              <a:t>规划中 · 皮肤购买仍为模拟流程</a:t>
+            </a:r>
+          </a:p>
+        </p:txBody>
+      </p:sp>
+      <p:sp>
+        <p:nvSpPr>
+          <p:cNvPr id="31" name="Rounded Rectangle 30"/>
+          <p:cNvSpPr/>
+          <p:nvPr/>
+        </p:nvSpPr>
+        <p:spPr>
+          <a:xfrm>
+            <a:off x="841248" y="6391656"/>
+            <a:ext cx="10515600" cy="493776"/>
+          </a:xfrm>
+          <a:prstGeom prst="roundRect">
+            <a:avLst>
+              <a:gd name="adj" fmla="val 9000"/>
+            </a:avLst>
+          </a:prstGeom>
+          <a:solidFill>
+            <a:srgbClr val="161A26"/>
+          </a:solidFill>
+          <a:ln w="9525">
+            <a:solidFill>
+              <a:srgbClr val="2A3144"/>
+            </a:solidFill>
+          </a:ln>
+          <a:effectLst/>
+        </p:spPr>
+        <p:style>
+          <a:lnRef idx="1">
+            <a:schemeClr val="accent1"/>
+          </a:lnRef>
+          <a:fillRef idx="3">
+            <a:schemeClr val="accent1"/>
+          </a:fillRef>
+          <a:effectRef idx="2">
+            <a:schemeClr val="accent1"/>
+          </a:effectRef>
+          <a:fontRef idx="minor">
+            <a:schemeClr val="lt1"/>
+          </a:fontRef>
+        </p:style>
+        <p:txBody>
+          <a:bodyPr rtlCol="0" anchor="ctr"/>
+          <a:lstStyle/>
+          <a:p>
+            <a:pPr algn="ctr"/>
+          </a:p>
+        </p:txBody>
+      </p:sp>
+      <p:sp>
+        <p:nvSpPr>
+          <p:cNvPr id="32" name="TextBox 31"/>
+          <p:cNvSpPr txBox="1"/>
+          <p:nvPr/>
+        </p:nvSpPr>
+        <p:spPr>
+          <a:xfrm>
+            <a:off x="1143000" y="6391656"/>
+            <a:ext cx="3291840" cy="493776"/>
+          </a:xfrm>
+          <a:prstGeom prst="rect">
+            <a:avLst/>
+          </a:prstGeom>
+          <a:noFill/>
+        </p:spPr>
+        <p:txBody>
+          <a:bodyPr wrap="square" anchor="ctr" lIns="0" rIns="0" tIns="0" bIns="0">
+            <a:spAutoFit/>
+          </a:bodyPr>
+          <a:lstStyle/>
+          <a:p>
+            <a:pPr algn="l">
+              <a:lnSpc>
+                <a:spcPct val="100000"/>
+              </a:lnSpc>
+              <a:spcAft>
+                <a:spcPts val="0"/>
+              </a:spcAft>
+            </a:pPr>
+            <a:r>
+              <a:rPr sz="1200" b="1">
+                <a:solidFill>
+                  <a:srgbClr val="E8EBF2"/>
+                </a:solidFill>
+                <a:latin typeface="微软雅黑"/>
+              </a:rPr>
+              <a:t>真实用户数据</a:t>
+            </a:r>
+          </a:p>
+        </p:txBody>
+      </p:sp>
+      <p:sp>
+        <p:nvSpPr>
+          <p:cNvPr id="33" name="TextBox 32"/>
+          <p:cNvSpPr txBox="1"/>
+          <p:nvPr/>
+        </p:nvSpPr>
+        <p:spPr>
+          <a:xfrm>
+            <a:off x="4663440" y="6391656"/>
+            <a:ext cx="6492240" cy="493776"/>
+          </a:xfrm>
+          <a:prstGeom prst="rect">
+            <a:avLst/>
+          </a:prstGeom>
+          <a:noFill/>
+        </p:spPr>
+        <p:txBody>
+          <a:bodyPr wrap="square" anchor="ctr" lIns="0" rIns="0" tIns="0" bIns="0">
+            <a:spAutoFit/>
+          </a:bodyPr>
+          <a:lstStyle/>
+          <a:p>
+            <a:pPr algn="l">
+              <a:lnSpc>
+                <a:spcPct val="100000"/>
+              </a:lnSpc>
+              <a:spcAft>
+                <a:spcPts val="0"/>
+              </a:spcAft>
+            </a:pPr>
+            <a:r>
+              <a:rPr sz="1100" b="0">
+                <a:solidFill>
+                  <a:srgbClr val="34D399"/>
+                </a:solidFill>
+                <a:latin typeface="微软雅黑"/>
+              </a:rPr>
+              <a:t>已有 · 79 名独立玩家 / 133 局 / 1,996 条事件（部分均值受测试数据影响）</a:t>
             </a:r>
           </a:p>
         </p:txBody>
@@ -12977,6 +14011,592 @@
 </file>
 
 <file path=ppt/slides/slide20.xml><?xml version="1.0" encoding="utf-8"?>
+<p:sld xmlns:a="http://schemas.openxmlformats.org/drawingml/2006/main" xmlns:p="http://schemas.openxmlformats.org/presentationml/2006/main" xmlns:r="http://schemas.openxmlformats.org/officeDocument/2006/relationships">
+  <p:cSld>
+    <p:spTree>
+      <p:nvGrpSpPr>
+        <p:cNvPr id="1" name=""/>
+        <p:cNvGrpSpPr/>
+        <p:nvPr/>
+      </p:nvGrpSpPr>
+      <p:grpSpPr/>
+      <p:sp>
+        <p:nvSpPr>
+          <p:cNvPr id="2" name="Rectangle 1"/>
+          <p:cNvSpPr/>
+          <p:nvPr/>
+        </p:nvSpPr>
+        <p:spPr>
+          <a:xfrm>
+            <a:off x="0" y="0"/>
+            <a:ext cx="12191695" cy="6858000"/>
+          </a:xfrm>
+          <a:prstGeom prst="rect">
+            <a:avLst/>
+          </a:prstGeom>
+          <a:solidFill>
+            <a:srgbClr val="0A0A0F"/>
+          </a:solidFill>
+          <a:ln>
+            <a:noFill/>
+          </a:ln>
+          <a:effectLst/>
+        </p:spPr>
+        <p:style>
+          <a:lnRef idx="1">
+            <a:schemeClr val="accent1"/>
+          </a:lnRef>
+          <a:fillRef idx="3">
+            <a:schemeClr val="accent1"/>
+          </a:fillRef>
+          <a:effectRef idx="2">
+            <a:schemeClr val="accent1"/>
+          </a:effectRef>
+          <a:fontRef idx="minor">
+            <a:schemeClr val="lt1"/>
+          </a:fontRef>
+        </p:style>
+        <p:txBody>
+          <a:bodyPr rtlCol="0" anchor="ctr"/>
+          <a:lstStyle/>
+          <a:p>
+            <a:pPr algn="ctr"/>
+          </a:p>
+        </p:txBody>
+      </p:sp>
+      <p:sp>
+        <p:nvSpPr>
+          <p:cNvPr id="3" name="Rectangle 2"/>
+          <p:cNvSpPr/>
+          <p:nvPr/>
+        </p:nvSpPr>
+        <p:spPr>
+          <a:xfrm>
+            <a:off x="640080" y="566928"/>
+            <a:ext cx="54864" cy="384048"/>
+          </a:xfrm>
+          <a:prstGeom prst="rect">
+            <a:avLst/>
+          </a:prstGeom>
+          <a:solidFill>
+            <a:srgbClr val="E94560"/>
+          </a:solidFill>
+          <a:ln>
+            <a:noFill/>
+          </a:ln>
+          <a:effectLst/>
+        </p:spPr>
+        <p:style>
+          <a:lnRef idx="1">
+            <a:schemeClr val="accent1"/>
+          </a:lnRef>
+          <a:fillRef idx="3">
+            <a:schemeClr val="accent1"/>
+          </a:fillRef>
+          <a:effectRef idx="2">
+            <a:schemeClr val="accent1"/>
+          </a:effectRef>
+          <a:fontRef idx="minor">
+            <a:schemeClr val="lt1"/>
+          </a:fontRef>
+        </p:style>
+        <p:txBody>
+          <a:bodyPr rtlCol="0" anchor="ctr"/>
+          <a:lstStyle/>
+          <a:p>
+            <a:pPr algn="ctr"/>
+          </a:p>
+        </p:txBody>
+      </p:sp>
+      <p:sp>
+        <p:nvSpPr>
+          <p:cNvPr id="4" name="TextBox 3"/>
+          <p:cNvSpPr txBox="1"/>
+          <p:nvPr/>
+        </p:nvSpPr>
+        <p:spPr>
+          <a:xfrm>
+            <a:off x="841248" y="530352"/>
+            <a:ext cx="10058400" cy="274320"/>
+          </a:xfrm>
+          <a:prstGeom prst="rect">
+            <a:avLst/>
+          </a:prstGeom>
+          <a:noFill/>
+        </p:spPr>
+        <p:txBody>
+          <a:bodyPr wrap="square" anchor="t" lIns="0" rIns="0" tIns="0" bIns="0">
+            <a:spAutoFit/>
+          </a:bodyPr>
+          <a:lstStyle/>
+          <a:p>
+            <a:pPr algn="l">
+              <a:lnSpc>
+                <a:spcPct val="100000"/>
+              </a:lnSpc>
+              <a:spcAft>
+                <a:spcPts val="0"/>
+              </a:spcAft>
+            </a:pPr>
+            <a:r>
+              <a:rPr sz="1200" b="1">
+                <a:solidFill>
+                  <a:srgbClr val="E94560"/>
+                </a:solidFill>
+                <a:latin typeface="微软雅黑"/>
+              </a:rPr>
+              <a:t>06 / 边界与反思</a:t>
+            </a:r>
+          </a:p>
+        </p:txBody>
+      </p:sp>
+      <p:sp>
+        <p:nvSpPr>
+          <p:cNvPr id="5" name="TextBox 4"/>
+          <p:cNvSpPr txBox="1"/>
+          <p:nvPr/>
+        </p:nvSpPr>
+        <p:spPr>
+          <a:xfrm>
+            <a:off x="841248" y="777240"/>
+            <a:ext cx="10881360" cy="457200"/>
+          </a:xfrm>
+          <a:prstGeom prst="rect">
+            <a:avLst/>
+          </a:prstGeom>
+          <a:noFill/>
+        </p:spPr>
+        <p:txBody>
+          <a:bodyPr wrap="square" anchor="t" lIns="0" rIns="0" tIns="0" bIns="0">
+            <a:spAutoFit/>
+          </a:bodyPr>
+          <a:lstStyle/>
+          <a:p>
+            <a:pPr algn="l">
+              <a:lnSpc>
+                <a:spcPct val="100000"/>
+              </a:lnSpc>
+              <a:spcAft>
+                <a:spcPts val="0"/>
+              </a:spcAft>
+            </a:pPr>
+            <a:r>
+              <a:rPr sz="2700" b="1">
+                <a:solidFill>
+                  <a:srgbClr val="E8EBF2"/>
+                </a:solidFill>
+                <a:latin typeface="微软雅黑"/>
+              </a:rPr>
+              <a:t>做完之后的反思</a:t>
+            </a:r>
+          </a:p>
+        </p:txBody>
+      </p:sp>
+      <p:sp>
+        <p:nvSpPr>
+          <p:cNvPr id="6" name="Rounded Rectangle 5"/>
+          <p:cNvSpPr/>
+          <p:nvPr/>
+        </p:nvSpPr>
+        <p:spPr>
+          <a:xfrm>
+            <a:off x="841248" y="1554480"/>
+            <a:ext cx="10515600" cy="1481328"/>
+          </a:xfrm>
+          <a:prstGeom prst="roundRect">
+            <a:avLst>
+              <a:gd name="adj" fmla="val 5000"/>
+            </a:avLst>
+          </a:prstGeom>
+          <a:solidFill>
+            <a:srgbClr val="161A26"/>
+          </a:solidFill>
+          <a:ln w="9525">
+            <a:solidFill>
+              <a:srgbClr val="FBBF24"/>
+            </a:solidFill>
+          </a:ln>
+          <a:effectLst/>
+        </p:spPr>
+        <p:style>
+          <a:lnRef idx="1">
+            <a:schemeClr val="accent1"/>
+          </a:lnRef>
+          <a:fillRef idx="3">
+            <a:schemeClr val="accent1"/>
+          </a:fillRef>
+          <a:effectRef idx="2">
+            <a:schemeClr val="accent1"/>
+          </a:effectRef>
+          <a:fontRef idx="minor">
+            <a:schemeClr val="lt1"/>
+          </a:fontRef>
+        </p:style>
+        <p:txBody>
+          <a:bodyPr rtlCol="0" anchor="ctr"/>
+          <a:lstStyle/>
+          <a:p>
+            <a:pPr algn="ctr"/>
+          </a:p>
+        </p:txBody>
+      </p:sp>
+      <p:sp>
+        <p:nvSpPr>
+          <p:cNvPr id="7" name="TextBox 6"/>
+          <p:cNvSpPr txBox="1"/>
+          <p:nvPr/>
+        </p:nvSpPr>
+        <p:spPr>
+          <a:xfrm>
+            <a:off x="1143000" y="1700784"/>
+            <a:ext cx="9966960" cy="320040"/>
+          </a:xfrm>
+          <a:prstGeom prst="rect">
+            <a:avLst/>
+          </a:prstGeom>
+          <a:noFill/>
+        </p:spPr>
+        <p:txBody>
+          <a:bodyPr wrap="square" anchor="t" lIns="0" rIns="0" tIns="0" bIns="0">
+            <a:spAutoFit/>
+          </a:bodyPr>
+          <a:lstStyle/>
+          <a:p>
+            <a:pPr algn="l">
+              <a:lnSpc>
+                <a:spcPct val="100000"/>
+              </a:lnSpc>
+              <a:spcAft>
+                <a:spcPts val="0"/>
+              </a:spcAft>
+            </a:pPr>
+            <a:r>
+              <a:rPr sz="1350" b="1">
+                <a:solidFill>
+                  <a:srgbClr val="FBBF24"/>
+                </a:solidFill>
+                <a:latin typeface="微软雅黑"/>
+              </a:rPr>
+              <a:t>1. 我一开始差点把它做成「美术练习」</a:t>
+            </a:r>
+          </a:p>
+        </p:txBody>
+      </p:sp>
+      <p:sp>
+        <p:nvSpPr>
+          <p:cNvPr id="8" name="TextBox 7"/>
+          <p:cNvSpPr txBox="1"/>
+          <p:nvPr/>
+        </p:nvSpPr>
+        <p:spPr>
+          <a:xfrm>
+            <a:off x="1143000" y="2084832"/>
+            <a:ext cx="9966960" cy="868680"/>
+          </a:xfrm>
+          <a:prstGeom prst="rect">
+            <a:avLst/>
+          </a:prstGeom>
+          <a:noFill/>
+        </p:spPr>
+        <p:txBody>
+          <a:bodyPr wrap="square" anchor="t" lIns="0" rIns="0" tIns="0" bIns="0">
+            <a:spAutoFit/>
+          </a:bodyPr>
+          <a:lstStyle/>
+          <a:p>
+            <a:pPr algn="l">
+              <a:lnSpc>
+                <a:spcPct val="128000"/>
+              </a:lnSpc>
+              <a:spcAft>
+                <a:spcPts val="0"/>
+              </a:spcAft>
+            </a:pPr>
+            <a:r>
+              <a:rPr sz="1080" b="0">
+                <a:solidFill>
+                  <a:srgbClr val="98A2B8"/>
+                </a:solidFill>
+                <a:latin typeface="微软雅黑"/>
+              </a:rPr>
+              <a:t>最初接到「美化皮肤」的需求，我的第一反应是「怎么画得更好看」。但想清楚之后发现，这个系统的病根不是审美，而是皮肤在商业结构里没有位置——没有稀有度、没有价值差、没有拥有感。如果我只把六个圆画得更漂亮，问题一个都没解决。产品经理的价值在于识别「这是结构问题还是表现问题」，而这次是前者。</a:t>
+            </a:r>
+          </a:p>
+        </p:txBody>
+      </p:sp>
+      <p:sp>
+        <p:nvSpPr>
+          <p:cNvPr id="9" name="Rounded Rectangle 8"/>
+          <p:cNvSpPr/>
+          <p:nvPr/>
+        </p:nvSpPr>
+        <p:spPr>
+          <a:xfrm>
+            <a:off x="841248" y="3182112"/>
+            <a:ext cx="10515600" cy="1481328"/>
+          </a:xfrm>
+          <a:prstGeom prst="roundRect">
+            <a:avLst>
+              <a:gd name="adj" fmla="val 5000"/>
+            </a:avLst>
+          </a:prstGeom>
+          <a:solidFill>
+            <a:srgbClr val="161A26"/>
+          </a:solidFill>
+          <a:ln w="9525">
+            <a:solidFill>
+              <a:srgbClr val="FBBF24"/>
+            </a:solidFill>
+          </a:ln>
+          <a:effectLst/>
+        </p:spPr>
+        <p:style>
+          <a:lnRef idx="1">
+            <a:schemeClr val="accent1"/>
+          </a:lnRef>
+          <a:fillRef idx="3">
+            <a:schemeClr val="accent1"/>
+          </a:fillRef>
+          <a:effectRef idx="2">
+            <a:schemeClr val="accent1"/>
+          </a:effectRef>
+          <a:fontRef idx="minor">
+            <a:schemeClr val="lt1"/>
+          </a:fontRef>
+        </p:style>
+        <p:txBody>
+          <a:bodyPr rtlCol="0" anchor="ctr"/>
+          <a:lstStyle/>
+          <a:p>
+            <a:pPr algn="ctr"/>
+          </a:p>
+        </p:txBody>
+      </p:sp>
+      <p:sp>
+        <p:nvSpPr>
+          <p:cNvPr id="10" name="TextBox 9"/>
+          <p:cNvSpPr txBox="1"/>
+          <p:nvPr/>
+        </p:nvSpPr>
+        <p:spPr>
+          <a:xfrm>
+            <a:off x="1143000" y="3328416"/>
+            <a:ext cx="9966960" cy="320040"/>
+          </a:xfrm>
+          <a:prstGeom prst="rect">
+            <a:avLst/>
+          </a:prstGeom>
+          <a:noFill/>
+        </p:spPr>
+        <p:txBody>
+          <a:bodyPr wrap="square" anchor="t" lIns="0" rIns="0" tIns="0" bIns="0">
+            <a:spAutoFit/>
+          </a:bodyPr>
+          <a:lstStyle/>
+          <a:p>
+            <a:pPr algn="l">
+              <a:lnSpc>
+                <a:spcPct val="100000"/>
+              </a:lnSpc>
+              <a:spcAft>
+                <a:spcPts val="0"/>
+              </a:spcAft>
+            </a:pPr>
+            <a:r>
+              <a:rPr sz="1350" b="1">
+                <a:solidFill>
+                  <a:srgbClr val="FBBF24"/>
+                </a:solidFill>
+                <a:latin typeface="微软雅黑"/>
+              </a:rPr>
+              <a:t>2. 最难的设计决策是「暗影刺客怎么被看见」</a:t>
+            </a:r>
+          </a:p>
+        </p:txBody>
+      </p:sp>
+      <p:sp>
+        <p:nvSpPr>
+          <p:cNvPr id="11" name="TextBox 10"/>
+          <p:cNvSpPr txBox="1"/>
+          <p:nvPr/>
+        </p:nvSpPr>
+        <p:spPr>
+          <a:xfrm>
+            <a:off x="1143000" y="3712464"/>
+            <a:ext cx="9966960" cy="868680"/>
+          </a:xfrm>
+          <a:prstGeom prst="rect">
+            <a:avLst/>
+          </a:prstGeom>
+          <a:noFill/>
+        </p:spPr>
+        <p:txBody>
+          <a:bodyPr wrap="square" anchor="t" lIns="0" rIns="0" tIns="0" bIns="0">
+            <a:spAutoFit/>
+          </a:bodyPr>
+          <a:lstStyle/>
+          <a:p>
+            <a:pPr algn="l">
+              <a:lnSpc>
+                <a:spcPct val="128000"/>
+              </a:lnSpc>
+              <a:spcAft>
+                <a:spcPts val="0"/>
+              </a:spcAft>
+            </a:pPr>
+            <a:r>
+              <a:rPr sz="1080" b="0">
+                <a:solidFill>
+                  <a:srgbClr val="98A2B8"/>
+                </a:solidFill>
+                <a:latin typeface="微软雅黑"/>
+              </a:rPr>
+              <a:t>这套皮肤逼我做了一次真正的取舍：名字要求它「暗」，但游戏背景本身就是暗的，做得越暗越不可玩。最后我的解法是放弃用填充色表达存在感，改用发光描边与光点来「在黑暗里制造存在」。这让我理解了一个更普遍的道理——当需求和约束正面冲突时，不要在同一个维度上死磕（把暗色调亮一点），而要换一个维度解决（用光而不是色）。</a:t>
+            </a:r>
+          </a:p>
+        </p:txBody>
+      </p:sp>
+      <p:sp>
+        <p:nvSpPr>
+          <p:cNvPr id="12" name="Rounded Rectangle 11"/>
+          <p:cNvSpPr/>
+          <p:nvPr/>
+        </p:nvSpPr>
+        <p:spPr>
+          <a:xfrm>
+            <a:off x="841248" y="4809744"/>
+            <a:ext cx="10515600" cy="1481328"/>
+          </a:xfrm>
+          <a:prstGeom prst="roundRect">
+            <a:avLst>
+              <a:gd name="adj" fmla="val 5000"/>
+            </a:avLst>
+          </a:prstGeom>
+          <a:solidFill>
+            <a:srgbClr val="161A26"/>
+          </a:solidFill>
+          <a:ln w="9525">
+            <a:solidFill>
+              <a:srgbClr val="FBBF24"/>
+            </a:solidFill>
+          </a:ln>
+          <a:effectLst/>
+        </p:spPr>
+        <p:style>
+          <a:lnRef idx="1">
+            <a:schemeClr val="accent1"/>
+          </a:lnRef>
+          <a:fillRef idx="3">
+            <a:schemeClr val="accent1"/>
+          </a:fillRef>
+          <a:effectRef idx="2">
+            <a:schemeClr val="accent1"/>
+          </a:effectRef>
+          <a:fontRef idx="minor">
+            <a:schemeClr val="lt1"/>
+          </a:fontRef>
+        </p:style>
+        <p:txBody>
+          <a:bodyPr rtlCol="0" anchor="ctr"/>
+          <a:lstStyle/>
+          <a:p>
+            <a:pPr algn="ctr"/>
+          </a:p>
+        </p:txBody>
+      </p:sp>
+      <p:sp>
+        <p:nvSpPr>
+          <p:cNvPr id="13" name="TextBox 12"/>
+          <p:cNvSpPr txBox="1"/>
+          <p:nvPr/>
+        </p:nvSpPr>
+        <p:spPr>
+          <a:xfrm>
+            <a:off x="1143000" y="4956048"/>
+            <a:ext cx="9966960" cy="320040"/>
+          </a:xfrm>
+          <a:prstGeom prst="rect">
+            <a:avLst/>
+          </a:prstGeom>
+          <a:noFill/>
+        </p:spPr>
+        <p:txBody>
+          <a:bodyPr wrap="square" anchor="t" lIns="0" rIns="0" tIns="0" bIns="0">
+            <a:spAutoFit/>
+          </a:bodyPr>
+          <a:lstStyle/>
+          <a:p>
+            <a:pPr algn="l">
+              <a:lnSpc>
+                <a:spcPct val="100000"/>
+              </a:lnSpc>
+              <a:spcAft>
+                <a:spcPts val="0"/>
+              </a:spcAft>
+            </a:pPr>
+            <a:r>
+              <a:rPr sz="1350" b="1">
+                <a:solidFill>
+                  <a:srgbClr val="FBBF24"/>
+                </a:solidFill>
+                <a:latin typeface="微软雅黑"/>
+              </a:rPr>
+              <a:t>3. 我验证自己工作的方式，比结果更值得说</a:t>
+            </a:r>
+          </a:p>
+        </p:txBody>
+      </p:sp>
+      <p:sp>
+        <p:nvSpPr>
+          <p:cNvPr id="14" name="TextBox 13"/>
+          <p:cNvSpPr txBox="1"/>
+          <p:nvPr/>
+        </p:nvSpPr>
+        <p:spPr>
+          <a:xfrm>
+            <a:off x="1143000" y="5340096"/>
+            <a:ext cx="9966960" cy="868680"/>
+          </a:xfrm>
+          <a:prstGeom prst="rect">
+            <a:avLst/>
+          </a:prstGeom>
+          <a:noFill/>
+        </p:spPr>
+        <p:txBody>
+          <a:bodyPr wrap="square" anchor="t" lIns="0" rIns="0" tIns="0" bIns="0">
+            <a:spAutoFit/>
+          </a:bodyPr>
+          <a:lstStyle/>
+          <a:p>
+            <a:pPr algn="l">
+              <a:lnSpc>
+                <a:spcPct val="128000"/>
+              </a:lnSpc>
+              <a:spcAft>
+                <a:spcPts val="0"/>
+              </a:spcAft>
+            </a:pPr>
+            <a:r>
+              <a:rPr sz="1080" b="0">
+                <a:solidFill>
+                  <a:srgbClr val="98A2B8"/>
+                </a:solidFill>
+                <a:latin typeface="微软雅黑"/>
+              </a:rPr>
+              <a:t>中途我一度以为「虚空领主」没渲染出来——因为截图里角色所在位置是一团红色。后来我直接读取 canvas 的像素数据，才发现是敌人贴身围攻覆盖了角色，皮肤其实正常渲染。这让我意识到：凭截图和直觉判断会得出错误结论，产品判断要建立在可测量的证据上。这个习惯最后反过来让我发现了真正的可读性问题，并做了针对性修复。</a:t>
+            </a:r>
+          </a:p>
+        </p:txBody>
+      </p:sp>
+    </p:spTree>
+  </p:cSld>
+  <p:clrMapOvr>
+    <a:masterClrMapping/>
+  </p:clrMapOvr>
+</p:sld>
+</file>
+
+<file path=ppt/slides/slide21.xml><?xml version="1.0" encoding="utf-8"?>
 <p:sld xmlns:a="http://schemas.openxmlformats.org/drawingml/2006/main" xmlns:p="http://schemas.openxmlformats.org/presentationml/2006/main" xmlns:r="http://schemas.openxmlformats.org/officeDocument/2006/relationships">
   <p:cSld>
     <p:spTree>

--- a/portfolio/生存竞技场-武器皮肤分析与创意策划案.pptx
+++ b/portfolio/生存竞技场-武器皮肤分析与创意策划案.pptx
@@ -4747,7 +4747,7 @@
                 </a:solidFill>
                 <a:latin typeface="微软雅黑"/>
               </a:rPr>
-              <a:t>79 人</a:t>
+              <a:t>160+ 人</a:t>
             </a:r>
           </a:p>
         </p:txBody>
@@ -4789,7 +4789,7 @@
                 </a:solidFill>
                 <a:latin typeface="微软雅黑"/>
               </a:rPr>
-              <a:t>累计独立玩家</a:t>
+              <a:t>累计独立用户</a:t>
             </a:r>
           </a:p>
         </p:txBody>
@@ -4923,7 +4923,7 @@
                 </a:solidFill>
                 <a:latin typeface="微软雅黑"/>
               </a:rPr>
-              <a:t>133 局</a:t>
+              <a:t>47 人</a:t>
             </a:r>
           </a:p>
         </p:txBody>
@@ -4965,7 +4965,7 @@
                 </a:solidFill>
                 <a:latin typeface="微软雅黑"/>
               </a:rPr>
-              <a:t>累计开局对局</a:t>
+              <a:t>实际下场玩过的玩家</a:t>
             </a:r>
           </a:p>
         </p:txBody>
@@ -5275,7 +5275,7 @@
                 </a:solidFill>
                 <a:latin typeface="微软雅黑"/>
               </a:rPr>
-              <a:t>56 次</a:t>
+              <a:t>133 局</a:t>
             </a:r>
           </a:p>
         </p:txBody>
@@ -5317,7 +5317,7 @@
                 </a:solidFill>
                 <a:latin typeface="微软雅黑"/>
               </a:rPr>
-              <a:t>复活次数</a:t>
+              <a:t>累计开局对局</a:t>
             </a:r>
           </a:p>
         </p:txBody>
@@ -5451,7 +5451,7 @@
                 </a:solidFill>
                 <a:latin typeface="微软雅黑"/>
               </a:rPr>
-              <a:t>31 笔</a:t>
+              <a:t>56 次</a:t>
             </a:r>
           </a:p>
         </p:txBody>
@@ -5493,7 +5493,7 @@
                 </a:solidFill>
                 <a:latin typeface="微软雅黑"/>
               </a:rPr>
-              <a:t>商店购买</a:t>
+              <a:t>复活次数</a:t>
             </a:r>
           </a:p>
         </p:txBody>
@@ -5627,7 +5627,7 @@
                 </a:solidFill>
                 <a:latin typeface="微软雅黑"/>
               </a:rPr>
-              <a:t>37%</a:t>
+              <a:t>31 笔</a:t>
             </a:r>
           </a:p>
         </p:txBody>
@@ -5669,7 +5669,7 @@
                 </a:solidFill>
                 <a:latin typeface="微软雅黑"/>
               </a:rPr>
-              <a:t>移动端事件占比</a:t>
+              <a:t>商店购买</a:t>
             </a:r>
           </a:p>
         </p:txBody>
@@ -5831,7 +5831,7 @@
                 </a:solidFill>
                 <a:latin typeface="微软雅黑"/>
               </a:rPr>
-              <a:t>从数据里读到的三件事</a:t>
+              <a:t>从数据里读到的四件事</a:t>
             </a:r>
           </a:p>
           <a:p>
@@ -5878,7 +5878,7 @@
                 </a:solidFill>
                 <a:latin typeface="微软雅黑"/>
               </a:rPr>
-              <a:t>— 移动端 UA 产生 275 条事件、桌面端 725 条，「手机+电脑都能玩」不是宣传语。</a:t>
+              <a:t>— 移动端 UA 产生 701 条事件、桌面端 1,295 条（移动端占 35%），「手机+电脑都能玩」不是宣传语。</a:t>
             </a:r>
           </a:p>
           <a:p>
@@ -5925,7 +5925,7 @@
                 </a:solidFill>
                 <a:latin typeface="微软雅黑"/>
               </a:rPr>
-              <a:t>③ 武器使用率 81% 集中在手枪 </a:t>
+              <a:t>③ 武器使用率 92% 集中在手枪 </a:t>
             </a:r>
             <a:r>
               <a:rPr sz="1150" b="0">
@@ -5934,7 +5934,7 @@
                 </a:solidFill>
                 <a:latin typeface="微软雅黑"/>
               </a:rPr>
-              <a:t>— 最有价值的负面发现：手枪是免费初始武器，说明多数玩家没走到解锁新武器的波次就阵亡了。</a:t>
+              <a:t>— 133 次开局中手枪占 122 次；手枪是免费初始武器，说明多数玩家没走到解锁新武器的波次就阵亡了。</a:t>
             </a:r>
           </a:p>
           <a:p>
@@ -5947,6 +5947,34 @@
               </a:spcAft>
             </a:pPr>
             <a:r>
+              <a:rPr sz="1200" b="1">
+                <a:solidFill>
+                  <a:srgbClr val="E8EBF2"/>
+                </a:solidFill>
+                <a:latin typeface="微软雅黑"/>
+              </a:rPr>
+              <a:t>④ 皮肤占商店购买的 71%</a:t>
+            </a:r>
+            <a:r>
+              <a:rPr sz="1150" b="0">
+                <a:solidFill>
+                  <a:srgbClr val="98A2B8"/>
+                </a:solidFill>
+                <a:latin typeface="微软雅黑"/>
+              </a:rPr>
+              <a:t>— 31 笔购买中 22 笔是皮肤（烈焰 7 / 虚空 4 / 黄金 4 / 霓虹 3 / 暗影 2）。这是本次皮肤改造最直接的正向验证。</a:t>
+            </a:r>
+          </a:p>
+          <a:p>
+            <a:pPr algn="l">
+              <a:lnSpc>
+                <a:spcPct val="130000"/>
+              </a:lnSpc>
+              <a:spcAft>
+                <a:spcPts val="200"/>
+              </a:spcAft>
+            </a:pPr>
+            <a:r>
               <a:rPr sz="700" b="0">
                 <a:solidFill>
                   <a:srgbClr val="98A2B8"/>
@@ -6000,7 +6028,7 @@
                 </a:solidFill>
                 <a:latin typeface="微软雅黑"/>
               </a:rPr>
-              <a:t>玩家数 / 开局数 / 复活数 / 购买数均为按事件去重的真实累计值；比率类指标仅作趋势参考。</a:t>
+              <a:t>用户数口径：累计独立用户 160+，但实际下场玩过的只有 47 人（其余为仅浏览/登录未开局）；看板另显示过一个 74（会话口径）。三个数字不等价，引用须注明口径。</a:t>
             </a:r>
           </a:p>
         </p:txBody>
@@ -12794,7 +12822,7 @@
                 </a:solidFill>
                 <a:latin typeface="微软雅黑"/>
               </a:rPr>
-              <a:t>已有 · 79 名独立玩家 / 133 局 / 1,996 条事件（部分均值受测试数据影响）</a:t>
+              <a:t>已有 · 160+ 独立用户（47 人实际下场）/ 133 局 / 1,996 条事件</a:t>
             </a:r>
           </a:p>
         </p:txBody>
